--- a/Tlamatini_eXtended_Artificial_Intelligence_Humanly_Tempered.pptx
+++ b/Tlamatini_eXtended_Artificial_Intelligence_Humanly_Tempered.pptx
@@ -91,7 +91,6 @@
     <p:sldId id="339" r:id="rId90"/>
     <p:sldId id="340" r:id="rId91"/>
     <p:sldId id="341" r:id="rId92"/>
-    <p:sldId id="342" r:id="rId93"/>
   </p:sldIdLst>
   <p:sldSz cx="12191695" cy="6858000" type="screen4x3"/>
   <p:notesSz cx="6858000" cy="9144000"/>
@@ -3524,7 +3523,7 @@
                 </a:solidFill>
                 <a:latin typeface="Aptos"/>
               </a:rPr>
-              <a:t>Self-hosted AI developer assistant (cloud LLMs by default) with RAG, Multi-Turn orchestration, 74 agents, ACPX delegation, visual workflows, self-knowledge, and Windows packaging.</a:t>
+              <a:t>Self-hosted AI developer assistant (cloud LLMs by default) with RAG, Multi-Turn orchestration, 76 agents, ACPX delegation, visual workflows, self-knowledge, and Windows packaging.</a:t>
             </a:r>
           </a:p>
         </p:txBody>
@@ -3639,7 +3638,7 @@
                 </a:solidFill>
                 <a:latin typeface="Aptos"/>
               </a:rPr>
-              <a:t>649</a:t>
+              <a:t>672</a:t>
             </a:r>
           </a:p>
         </p:txBody>
@@ -3754,7 +3753,7 @@
                 </a:solidFill>
                 <a:latin typeface="Aptos"/>
               </a:rPr>
-              <a:t>74</a:t>
+              <a:t>76</a:t>
             </a:r>
           </a:p>
         </p:txBody>
@@ -3869,7 +3868,7 @@
                 </a:solidFill>
                 <a:latin typeface="Aptos"/>
               </a:rPr>
-              <a:t>131,376</a:t>
+              <a:t>138,522</a:t>
             </a:r>
           </a:p>
         </p:txBody>
@@ -3904,7 +3903,7 @@
                 </a:solidFill>
                 <a:latin typeface="Aptos"/>
               </a:rPr>
-              <a:t>Generated June 06, 2026 11:17 PM UTC-0600 at HEAD 6762e43</a:t>
+              <a:t>Generated June 10, 2026 11:49 AM UTC-0600 at HEAD fc1eb10</a:t>
             </a:r>
           </a:p>
         </p:txBody>
@@ -5586,7 +5585,7 @@
                 </a:solidFill>
                 <a:latin typeface="Aptos"/>
               </a:rPr>
-              <a:t>V1.10.0 SAFETY MODIFIER STILL ACTIVE IN V1.17.2</a:t>
+              <a:t>V1.10.0 SAFETY MODIFIER STILL ACTIVE IN V1.19.3</a:t>
             </a:r>
           </a:p>
         </p:txBody>
@@ -5783,7 +5782,7 @@
               </a:defRPr>
             </a:pPr>
             <a:r>
-              <a:t>Introduced in `v1.10.0` and still part of the current `v1.17.2` surface, `Ask Execs` is the Multi-Turn-only safety modifier that makes Tlamatini ask before each state-changing Tool, MCP, wrapped agent, or skill-backed execution instead of running it immediately.</a:t>
+              <a:t>Introduced in `v1.10.0` and still part of the current `v1.19.3` surface, `Ask Execs` is the Multi-Turn-only safety modifier that makes Tlamatini ask before each state-changing Tool, MCP, wrapped agent, or skill-backed execution instead of running it immediately.</a:t>
             </a:r>
           </a:p>
           <a:p>
@@ -6968,7 +6967,7 @@
                 </a:solidFill>
                 <a:latin typeface="Aptos"/>
               </a:rPr>
-              <a:t>V1.11.0 UNINSTALL INTEGRATION CARRIED INTO V1.17.2</a:t>
+              <a:t>V1.11.0 UNINSTALL INTEGRATION CARRIED INTO V1.19.3</a:t>
             </a:r>
           </a:p>
         </p:txBody>
@@ -7165,7 +7164,7 @@
               </a:defRPr>
             </a:pPr>
             <a:r>
-              <a:t>Introduced in `v1.11.0` and still carried by the current `v1.17.2` release, the frozen install now behaves like a real Windows application: `install.py` writes a per-user HKCU Add/Remove Programs entry so Tlamatini appears in Settings -&gt; Apps -&gt; Installed apps and in the legacy Programs and Features list.</a:t>
+              <a:t>Introduced in `v1.11.0` and still carried by the current `v1.19.3` release, the frozen install now behaves like a real Windows application: `install.py` writes a per-user HKCU Add/Remove Programs entry so Tlamatini appears in Settings -&gt; Apps -&gt; Installed apps and in the legacy Programs and Features list.</a:t>
             </a:r>
           </a:p>
           <a:p>
@@ -8401,7 +8400,7 @@
                 </a:solidFill>
                 <a:latin typeface="Aptos Display"/>
               </a:rPr>
-              <a:t>The 74 Guardians</a:t>
+              <a:t>The 76 Guardians</a:t>
             </a:r>
           </a:p>
         </p:txBody>
@@ -9286,7 +9285,7 @@
               </a:defRPr>
             </a:pPr>
             <a:r>
-              <a:t>Templates on disk with config.yaml: 74</a:t>
+              <a:t>Templates on disk with config.yaml: 76</a:t>
             </a:r>
           </a:p>
           <a:p>
@@ -9302,7 +9301,7 @@
               </a:defRPr>
             </a:pPr>
             <a:r>
-              <a:t>Description rows in `agents_descriptions.md`: 74</a:t>
+              <a:t>Description rows in `agents_descriptions.md`: 76</a:t>
             </a:r>
           </a:p>
           <a:p>
@@ -9318,7 +9317,7 @@
               </a:defRPr>
             </a:pPr>
             <a:r>
-              <a:t>README and Book bestiary sections align with the same 74-agent inventory.</a:t>
+              <a:t>README and Book bestiary sections align with the same 76-agent inventory.</a:t>
             </a:r>
           </a:p>
         </p:txBody>
@@ -10668,7 +10667,7 @@
               </a:defRPr>
             </a:pPr>
             <a:r>
-              <a:t>The live operator surface now stands at 69 workflow agents, 76 Multi-Turn tools, 12 ACPX tools, and 26 skills.</a:t>
+              <a:t>The live operator surface now stands at 76 workflow agents, 83 Multi-Turn tools, 12 ACPX tools, and 27 skills.</a:t>
             </a:r>
           </a:p>
           <a:p>
@@ -10684,7 +10683,7 @@
               </a:defRPr>
             </a:pPr>
             <a:r>
-              <a:t>Source inspection confirms the newer total: 44 wrapped chat-agent tools in `chat_agent_registry.py`, which combines with 20 core Python tools and 12 ACPX/Skill tools for 76 Multi-Turn tools overall.</a:t>
+              <a:t>Source inspection confirms the total: 51 distinct wrapped chat-agent tools bound from `chat_agent_registry.py`, which combines with 20 core Python tools and 12 ACPX/Skill tools for 83 Multi-Turn tools overall.</a:t>
             </a:r>
           </a:p>
           <a:p>
@@ -10894,7 +10893,7 @@
               </a:defRPr>
             </a:pPr>
             <a:r>
-              <a:t>Those counts complement the 74-agent bestiary instead of replacing it: skills, wrapped tools, and ACPX tools are different layers of the same operating surface.</a:t>
+              <a:t>Those counts complement the 76-agent bestiary instead of replacing it: skills, wrapped tools, and ACPX tools are different layers of the same operating surface.</a:t>
             </a:r>
           </a:p>
           <a:p>
@@ -11375,7 +11374,7 @@
               </a:defRPr>
             </a:pPr>
             <a:r>
-              <a:t>Tlamatini is a self-hosted AI developer assistant (cloud LLMs by default; app and RAG run locally) built with Django, Django Channels, LangChain, LangGraph, FAISS/BM25 retrieval, and a large in-repository agent application.</a:t>
+              <a:t>Tlamatini is a self-hosted AI developer assistant (cloud LLMs by default; the app and RAG run locally) built with Django, Django Channels, LangChain, LangGraph, FAISS/BM25 retrieval, and a large in-repository agent application.</a:t>
             </a:r>
           </a:p>
           <a:p>
@@ -19492,7 +19491,7 @@
               </a:defRPr>
             </a:pPr>
             <a:r>
-              <a:t>Can manage real desktop windows by title: focus them, tile them, resize them, list them, and close them deterministically through Win32 calls.</a:t>
+              <a:t>Can SPEAK and LISTEN: Talker (text-to-speech) renders input_text to a 24 kHz WAV through an Ollama neural TTS model (default Orpheus-3b-FT) and is female-voice-only by design, while Whisperer (speech-to-text) records the microphone itself or transcribes a file via faster-whisper locally (NVIDIA-GPU auto-detect with an always-present CPU fallback) or a cloud Whisper API; both light a zero-latency console REC indicator driven by the live audio stream and are observational/output, on the canvas and as wrapped chat tools.</a:t>
             </a:r>
           </a:p>
           <a:p>
@@ -19508,7 +19507,7 @@
               </a:defRPr>
             </a:pPr>
             <a:r>
-              <a:t>Can drive a real Playwright browser through scripted interactive steps for logins, forms, assertions, downloads, extraction, and end-to-end UI checks.</a:t>
+              <a:t>Can manage real desktop windows by title: focus them, tile them, resize them, list them, and close them deterministically through Win32 calls.</a:t>
             </a:r>
           </a:p>
           <a:p>
@@ -19524,7 +19523,7 @@
               </a:defRPr>
             </a:pPr>
             <a:r>
-              <a:t>Can drive a live Unreal Engine 5 editor through the Unreal MCP plugin, from either Multi-Turn chat or the visual workflow canvas.</a:t>
+              <a:t>Can drive a real Playwright browser through scripted interactive steps for logins, forms, assertions, downloads, extraction, and end-to-end UI checks.</a:t>
             </a:r>
           </a:p>
           <a:p>
@@ -19540,7 +19539,7 @@
               </a:defRPr>
             </a:pPr>
             <a:r>
-              <a:t>Actively reaps orphaned Windows console-host and pool-child processes so long Multi-Turn or ACPX sessions do not leave misleading Tlamatini-icon ghosts in Task Manager.</a:t>
+              <a:t>Can drive a live Unreal Engine 5 editor through the Unreal MCP plugin, from either Multi-Turn chat or the visual workflow canvas.</a:t>
             </a:r>
           </a:p>
         </p:txBody>
@@ -23467,7 +23466,7 @@
               </a:defRPr>
             </a:pPr>
             <a:r>
-              <a:t>Those readability rules remain in force in the current documentation set, and the current `v1.17.2` release state keeps the version badge, runtime surfaces, self-knowledge wording, STM32er/ESP32er demo prompts, and operator handbook aligned.</a:t>
+              <a:t>Those readability rules remain in force in the current documentation set, and the current `v1.19.3` release state keeps the version badge, runtime surfaces, self-knowledge wording, STM32er/ESP32er demo prompts, and operator handbook aligned.</a:t>
             </a:r>
           </a:p>
         </p:txBody>
@@ -24916,7 +24915,7 @@
                 </a:solidFill>
                 <a:latin typeface="Cascadia Mono"/>
               </a:rPr>
-              <a:t>Resolved current version: 1.17.2 | build: 1.17.2</a:t>
+              <a:t>Resolved current version: 1.19.3 | build: 1.19.3</a:t>
             </a:r>
           </a:p>
         </p:txBody>
@@ -27103,7 +27102,7 @@
               </a:defRPr>
             </a:pPr>
             <a:r>
-              <a:t>Runs checked Multi-Turn requests through request-scoped planning, capability selection, tool calls, observations, monitoring, and final synthesis.</a:t>
+              <a:t>Actively reaps orphaned Windows console-host and pool-child processes so long Multi-Turn or ACPX sessions do not leave misleading Tlamatini-icon ghosts in Task Manager.</a:t>
             </a:r>
           </a:p>
           <a:p>
@@ -27119,7 +27118,7 @@
               </a:defRPr>
             </a:pPr>
             <a:r>
-              <a:t>Can optionally inspect and modify her own bundled source tree in self-modify builds after verifying that `TlamatiniSourceCode/` is actually present.</a:t>
+              <a:t>Runs checked Multi-Turn requests through request-scoped planning, capability selection, tool calls, observations, monitoring, and final synthesis.</a:t>
             </a:r>
           </a:p>
           <a:p>
@@ -27135,7 +27134,7 @@
               </a:defRPr>
             </a:pPr>
             <a:r>
-              <a:t>Launches wrapped copies of selected workflow agents in isolated runtime folders without mutating templates.</a:t>
+              <a:t>Can optionally inspect and modify her own bundled source tree in self-modify builds after verifying that `TlamatiniSourceCode/` is actually present.</a:t>
             </a:r>
           </a:p>
           <a:p>
@@ -27151,7 +27150,7 @@
               </a:defRPr>
             </a:pPr>
             <a:r>
-              <a:t>Lets users design, validate, save, pause, resume, and stop visual workflows through the Agentic Control Panel.</a:t>
+              <a:t>Launches wrapped copies of selected workflow agents in isolated runtime folders without mutating templates.</a:t>
             </a:r>
           </a:p>
           <a:p>
@@ -27167,7 +27166,7 @@
               </a:defRPr>
             </a:pPr>
             <a:r>
-              <a:t>Turns successful Multi-Turn tool executions into starter `.flw` workflows that can be inspected and validated in ACP.</a:t>
+              <a:t>Lets users design, validate, save, pause, resume, and stop visual workflows through the Agentic Control Panel.</a:t>
             </a:r>
           </a:p>
         </p:txBody>
@@ -35178,6 +35177,22 @@
               </a:defRPr>
             </a:pPr>
             <a:r>
+              <a:t>Turns successful Multi-Turn tool executions into starter `.flw` workflows that can be inspected and validated in ACP.</a:t>
+            </a:r>
+          </a:p>
+          <a:p>
+            <a:pPr>
+              <a:spcAft>
+                <a:spcPts val="400"/>
+              </a:spcAft>
+              <a:defRPr sz="1400">
+                <a:solidFill>
+                  <a:srgbClr val="B4BAAE"/>
+                </a:solidFill>
+                <a:latin typeface="Aptos"/>
+              </a:defRPr>
+            </a:pPr>
+            <a:r>
               <a:t>Packages the project into a distributable Windows release with installer and uninstaller tooling.</a:t>
             </a:r>
           </a:p>
@@ -35596,7 +35611,7 @@
                 </a:solidFill>
                 <a:latin typeface="Aptos"/>
               </a:rPr>
-              <a:t>649</a:t>
+              <a:t>672</a:t>
             </a:r>
           </a:p>
         </p:txBody>
@@ -35711,7 +35726,7 @@
                 </a:solidFill>
                 <a:latin typeface="Aptos"/>
               </a:rPr>
-              <a:t>74</a:t>
+              <a:t>76</a:t>
             </a:r>
           </a:p>
         </p:txBody>
@@ -35826,7 +35841,7 @@
                 </a:solidFill>
                 <a:latin typeface="Aptos"/>
               </a:rPr>
-              <a:t>119</a:t>
+              <a:t>125</a:t>
             </a:r>
           </a:p>
         </p:txBody>
@@ -36333,7 +36348,7 @@
               </a:defRPr>
             </a:pPr>
             <a:r>
-              <a:t>6762e43 - Implement the almost invulnerable Whatdog designed by Claude Opus 4.8, commit by Tlamatini's-AutoBot.</a:t>
+              <a:t>fc1eb10 - Fixing out of playing reaper, by Tlamatini's-AutoBot.</a:t>
             </a:r>
           </a:p>
           <a:p>
@@ -36349,7 +36364,7 @@
               </a:defRPr>
             </a:pPr>
             <a:r>
-              <a:t>Resolved version: 1.17.2 (git)</a:t>
+              <a:t>Resolved version: 1.19.3 (git)</a:t>
             </a:r>
           </a:p>
           <a:p>
@@ -36365,7 +36380,7 @@
               </a:defRPr>
             </a:pPr>
             <a:r>
-              <a:t>Generated on June 06, 2026 11:17 PM UTC-0600</a:t>
+              <a:t>Generated on June 10, 2026 11:49 AM UTC-0600</a:t>
             </a:r>
           </a:p>
           <a:p>
@@ -36381,7 +36396,7 @@
               </a:defRPr>
             </a:pPr>
             <a:r>
-              <a:t>Multi-Turn tools: 81; wrapped chat-agent tools: 49; skills: 27</a:t>
+              <a:t>Multi-Turn tools: 83; wrapped chat-agent tools: 51; skills: 27</a:t>
             </a:r>
           </a:p>
           <a:p>
@@ -36397,7 +36412,7 @@
               </a:defRPr>
             </a:pPr>
             <a:r>
-              <a:t>Python requirements: 75; authoritative agent-description rows: 74</a:t>
+              <a:t>Python requirements: 78; authoritative agent-description rows: 76</a:t>
             </a:r>
           </a:p>
           <a:p>
@@ -36413,7 +36428,7 @@
               </a:defRPr>
             </a:pPr>
             <a:r>
-              <a:t>Binary or asset tracked files skipped from line count: 22</a:t>
+              <a:t>Binary or asset tracked files skipped from line count: 23</a:t>
             </a:r>
           </a:p>
         </p:txBody>
@@ -36878,7 +36893,7 @@
               </a:defRPr>
             </a:pPr>
             <a:r>
-              <a:t>fabd9dc on 2026-06-05</a:t>
+              <a:t>ccb309a on 2026-06-08</a:t>
             </a:r>
           </a:p>
           <a:p>
@@ -36894,7 +36909,7 @@
               </a:defRPr>
             </a:pPr>
             <a:r>
-              <a:t>Official release of documentation as Tlamatini v1.17.0, by angelahack1</a:t>
+              <a:t>Setted documentation as 1.19.0, by angelahack1</a:t>
             </a:r>
           </a:p>
           <a:p>
@@ -36910,7 +36925,7 @@
               </a:defRPr>
             </a:pPr>
             <a:r>
-              <a:t>Commits since then: 8</a:t>
+              <a:t>Commits since then: 5</a:t>
             </a:r>
           </a:p>
         </p:txBody>
@@ -37340,7 +37355,7 @@
                 </a:solidFill>
                 <a:latin typeface="Aptos"/>
               </a:rPr>
-              <a:t>THE MEDIA-I/O FAMILY COMPLETES, PLUS SKILL, DIRECTORY POLICY, AND MONITORING COVERAGE</a:t>
+              <a:t>THE MEDIA-I/O FAMILY COMPLETES, VOICE IN/OUT ARRIVES, PLUS SKILL, DIRECTORY POLICY, AND MONITORING COVERAGE</a:t>
             </a:r>
           </a:p>
         </p:txBody>
@@ -37498,7 +37513,7 @@
                 </a:solidFill>
                 <a:latin typeface="Aptos"/>
               </a:rPr>
-              <a:t>New agents — the media-I/O family + firmware</a:t>
+              <a:t>New agents — media-I/O, voice (Talker/Whisperer) + firmware</a:t>
             </a:r>
           </a:p>
         </p:txBody>
@@ -37537,7 +37552,7 @@
               </a:defRPr>
             </a:pPr>
             <a:r>
-              <a:t>Camcorder + Recorder (capture): webcam photo/video via OpenCV and microphone WAV via sounddevice — read-only siblings of Shoter (screen), saved to Pictures/Music.</a:t>
+              <a:t>Talker (text-to-speech): SPEAKS input_text aloud via an Ollama neural TTS model (default Orpheus-3b-FT), SNAC-decoded to a 24 kHz WAV — FEMALE-VOICE-ONLY by design (a male voice is refused, never substituted); needs snac+torch (CPU is fine) else degrades to tokens_only.</a:t>
             </a:r>
           </a:p>
           <a:p>
@@ -37553,7 +37568,7 @@
               </a:defRPr>
             </a:pPr>
             <a:r>
-              <a:t>AudioPlayer (playback): plays an audio file to the speakers via soundfile + sounddevice — volume in percent, and a time-played budget that TRUNCATES a longer file or LOOPS a shorter one; sample-rate read from the file (correct pitch).</a:t>
+              <a:t>Whisperer (speech-to-text): records the mic ITSELF (no Recorder dep, 30 s default) or transcribes a file, via faster-whisper LOCALLY — NVIDIA-GPU auto-detect with an ALWAYS-present CPU fallback — or cloud Groq/OpenAI; Ollama can only tidy the finished transcript.</a:t>
             </a:r>
           </a:p>
           <a:p>
@@ -37569,7 +37584,7 @@
               </a:defRPr>
             </a:pPr>
             <a:r>
-              <a:t>VideoPlayer (playback): plays a video file WITH audio on a chosen display via ffpyplayer (its wheel bundles ffmpeg + SDL — no external ffmpeg) plus an OpenCV window — display, volume, the same truncate/loop time budget, window size, and fullscreen; silent-OpenCV fallback.</a:t>
+              <a:t>Both audio agents now light a zero-latency console REC indicator (blinking dot + live VU bar) driven by the audio-stream callback — ON within ~20 ms of real samples, OFF the instant the stream stops; the agent reveals its own console even when spawned headless.</a:t>
             </a:r>
           </a:p>
           <a:p>
@@ -37585,7 +37600,7 @@
               </a:defRPr>
             </a:pPr>
             <a:r>
-              <a:t>The whole family is observational/output, so it stays out of the Exec Report; each ships on the canvas and as a wrapped Multi-Turn tool (screen / camera-in / mic-in / speakers-out / screen-out).</a:t>
+              <a:t>Camcorder + Recorder (capture): webcam photo/video via OpenCV and microphone WAV via sounddevice; AudioPlayer + VideoPlayer (playback): file to speakers / to a chosen display — the media-I/O family (screen / camera-in / mic-in / speakers-out / screen-out).</a:t>
             </a:r>
           </a:p>
           <a:p>
@@ -37601,7 +37616,7 @@
               </a:defRPr>
             </a:pPr>
             <a:r>
-              <a:t>Arduiner: the third microcontroller agent — a direct arduino-cli bridge that builds and uploads firmware for any fqbn-selected board, with zero-config bootstrap, auto board-core install, and a serial-port safety preflight.</a:t>
+              <a:t>The capture/playback/voice family is observational/output, so it stays out of the Exec Report; each ships on the canvas and as a wrapped Multi-Turn tool. Arduiner adds a direct arduino-cli firmware bridge with zero-config bootstrap and a serial preflight.</a:t>
             </a:r>
           </a:p>
         </p:txBody>
@@ -37811,7 +37826,7 @@
               </a:defRPr>
             </a:pPr>
             <a:r>
-              <a:t>Catalog now stands at 74 workflow agents and 81 Multi-Turn tools (49 wrapped chat-agent + 12 ACPX/Skill + 20 core), with 27 skills.</a:t>
+              <a:t>Catalog now stands at 76 workflow agents and 83 Multi-Turn tools (51 wrapped chat-agent + 12 ACPX/Skill + 20 core), with 27 skills.</a:t>
             </a:r>
           </a:p>
         </p:txBody>
@@ -38229,7 +38244,7 @@
                 </a:solidFill>
                 <a:latin typeface="Aptos"/>
               </a:rPr>
-              <a:t>131,376</a:t>
+              <a:t>138,522</a:t>
             </a:r>
           </a:p>
         </p:txBody>
@@ -38344,7 +38359,7 @@
                 </a:solidFill>
                 <a:latin typeface="Aptos"/>
               </a:rPr>
-              <a:t>180,783</a:t>
+              <a:t>191,116</a:t>
             </a:r>
           </a:p>
         </p:txBody>
@@ -38495,18 +38510,18 @@
                 <a:latin typeface="Cascadia Mono"/>
               </a:rPr>
               <a:t>LANGUAGE                 FILES   EFFECTIVE      TOTAL   SHARE
-Python                   339      91,772    129,180  69.9%
-Markdown                 142      16,394     20,858  12.5%
-JavaScript                28      13,770     17,337  10.5%
-CSS                        6       3,717      4,731   2.8%
-YAML                      79       1,614      3,875   1.2%
+Python                   355      97,732    137,830  70.6%
+Markdown                 144      17,266     21,899  12.5%
+JavaScript                28      13,895     17,486  10.0%
+CSS                        6       3,760      4,799   2.7%
+YAML                      81       1,687      4,225   1.2%
 Other text                 7         906      1,101   0.7%
-HTML                       4         858        876   0.7%
-Prompt template            2         759        867   0.6%
+HTML                       4         858        876   0.6%
+Prompt template            2         797        907   0.6%
 PowerShell                 5         508        754   0.4%
-JSON                       6         414        414   0.3%
-JavaScript module          1         403        472   0.3%
-Text                       6         226        256   0.2%
+JSON                       7         422        422   0.3%
+JavaScript module          1         405        474   0.3%
+Text                       7         251        281   0.2%
 Protocol Buffers           1          20         33   0.0%
 Batch                      1          15         29   0.0%</a:t>
             </a:r>
@@ -38847,20 +38862,20 @@
                 <a:latin typeface="Cascadia Mono"/>
               </a:rPr>
               <a:t>PATH                                                     LANGUAGE     EFFECTIVE   TOTAL
-Tlamatini/agent/views.py                                Python         7,648  11,139
-Tlamatini/agent/tests.py                                Python         5,118   6,583
-Tlamatini/agent/tools.py                                Python         2,667   3,845
-Tlamatini/agent/doc_generation/complete_project_docs.py Python         2,322   2,629
-BookOfTlamatini.md                                      Markdown       2,116   2,977
-Tlamatini/agent/agents/flowcreator/agentic_skill.md     Markdown       2,070   2,290
-...ini/agent/static/agent/css/agentic_control_panel.css CSS            1,794   2,400
+Tlamatini/agent/views.py                                Python         7,760  11,317
+Tlamatini/agent/tests.py                                Python         5,213   6,727
+Tlamatini/agent/tools.py                                Python         2,686   3,887
+Tlamatini/agent/doc_generation/complete_project_docs.py Python         2,323   2,630
+Tlamatini/agent/agents/flowcreator/agentic_skill.md     Markdown       2,138   2,360
+BookOfTlamatini.md                                      Markdown       2,121   2,985
+...ini/agent/static/agent/css/agentic_control_panel.css CSS            1,820   2,436
 Tlamatini/agent/static/agent/js/agent_page_init.js      JavaScript     1,435   1,687
-Tlamatini/agent/static/agent/css/agent_page.css         CSS            1,362   1,671
-README.md                                               Markdown       1,351   1,922
-Tlamatini/agent/static/agent/js/acp-canvas-core.js      JavaScript     1,327   1,637
-Tlamatini/agent/static/agent/js/acp-agent-connectors.js JavaScript     1,325   1,477
-Tlamatini/agent/consumers.py                            Python         1,300   1,638
-Tlamatini/agent/static/agent/js/agent_page_chat.js      JavaScript     1,294   1,769</a:t>
+Tlamatini/agent/static/agent/css/agent_page.css         CSS            1,379   1,703
+README.md                                               Markdown       1,367   1,941
+Tlamatini/agent/static/agent/js/acp-agent-connectors.js JavaScript     1,361   1,515
+Tlamatini/agent/static/agent/js/agent_page_chat.js      JavaScript     1,361   1,858
+Tlamatini/agent/static/agent/js/acp-canvas-core.js      JavaScript     1,335   1,645
+Tlamatini/agent/consumers.py                            Python         1,300   1,638</a:t>
             </a:r>
           </a:p>
         </p:txBody>
@@ -39628,7 +39643,7 @@
                 </a:solidFill>
                 <a:latin typeface="Aptos Display"/>
               </a:rPr>
-              <a:t>Visual Dossier Change Appendix 1/2</a:t>
+              <a:t>Visual Dossier Change Appendix 1/1</a:t>
             </a:r>
           </a:p>
         </p:txBody>
@@ -39790,7 +39805,7 @@
               </a:defRPr>
             </a:pPr>
             <a:r>
-              <a:t>2026-06-06 | 6762e43 | Implement the almost invulnerable Whatdog designed by Claude Opus 4.8, commit by Tlamatini's-AutoBot.</a:t>
+              <a:t>2026-06-10 | fc1eb10 | Fixing out of playing reaper, by Tlamatini's-AutoBot.</a:t>
             </a:r>
           </a:p>
           <a:p>
@@ -39806,7 +39821,7 @@
               </a:defRPr>
             </a:pPr>
             <a:r>
-              <a:t>2026-06-06 | c99cb33 | Implementing smart executor-watchdog!, by Tlamatini's-AutoBot.</a:t>
+              <a:t>2026-06-09 | dad4f7f | Fixing out of order Talker paged exxecution, by Tlamatini's-AutoBot.</a:t>
             </a:r>
           </a:p>
           <a:p>
@@ -39822,7 +39837,7 @@
               </a:defRPr>
             </a:pPr>
             <a:r>
-              <a:t>2026-06-06 | 0e44a6c | Update to v1.17.1 everywhere, by angelahack1</a:t>
+              <a:t>2026-06-09 | 4d12919 | Improving temp file location in media agents, by angelahack1</a:t>
             </a:r>
           </a:p>
           <a:p>
@@ -39838,7 +39853,7 @@
               </a:defRPr>
             </a:pPr>
             <a:r>
-              <a:t>2026-06-06 | b0c7bc7 | I hope Claude is right!, I dont know why it startes to gimme a 4g release, that's absurd, Claude make an optimization I dont know if believe it or not, but I'll test it, by angelahack1</a:t>
+              <a:t>2026-06-09 | 648e6ae | Upgrading Talker to enable Tlamatini speak non-stop, by Tlamatini's-AutoBot.</a:t>
             </a:r>
           </a:p>
           <a:p>
@@ -39854,23 +39869,7 @@
               </a:defRPr>
             </a:pPr>
             <a:r>
-              <a:t>2026-06-06 | 01cb02f | Fix of hanged comand's execution, by angelahack1</a:t>
-            </a:r>
-          </a:p>
-          <a:p>
-            <a:pPr>
-              <a:spcAft>
-                <a:spcPts val="400"/>
-              </a:spcAft>
-              <a:defRPr sz="1200">
-                <a:solidFill>
-                  <a:srgbClr val="B4BAAE"/>
-                </a:solidFill>
-                <a:latin typeface="Aptos"/>
-              </a:defRPr>
-            </a:pPr>
-            <a:r>
-              <a:t>2026-06-06 | 31e28f2 | Fix of hanged comand's execution, by angelahack1</a:t>
+              <a:t>2026-06-09 | fe803fb | Trying to fix Talker in token managing, by angelahack1</a:t>
             </a:r>
           </a:p>
         </p:txBody>
@@ -40138,7 +40137,7 @@
                 </a:solidFill>
                 <a:latin typeface="Aptos"/>
               </a:rPr>
-              <a:t>COMMITS SINCE THE LAST COMMITTED PDF/PPTX REFRESH</a:t>
+              <a:t>ALL COMMITS FROM TODAY ACCORDING TO GIT</a:t>
             </a:r>
           </a:p>
         </p:txBody>
@@ -40173,7 +40172,7 @@
                 </a:solidFill>
                 <a:latin typeface="Aptos Display"/>
               </a:rPr>
-              <a:t>Visual Dossier Change Appendix 2/2</a:t>
+              <a:t>Today's Commit Appendix 1/1</a:t>
             </a:r>
           </a:p>
         </p:txBody>
@@ -40335,23 +40334,7 @@
               </a:defRPr>
             </a:pPr>
             <a:r>
-              <a:t>2026-06-06 | d48dfaf | Track Claude Code assets in-repo (hooks, settings, skills, memories)</a:t>
-            </a:r>
-          </a:p>
-          <a:p>
-            <a:pPr>
-              <a:spcAft>
-                <a:spcPts val="400"/>
-              </a:spcAft>
-              <a:defRPr sz="1200">
-                <a:solidFill>
-                  <a:srgbClr val="B4BAAE"/>
-                </a:solidFill>
-                <a:latin typeface="Aptos"/>
-              </a:defRPr>
-            </a:pPr>
-            <a:r>
-              <a:t>2026-06-05 | 9261c2b | Erasing trash, by angelahack1</a:t>
+              <a:t>2026-06-10 | fc1eb10 | Fixing out of playing reaper, by Tlamatini's-AutoBot.</a:t>
             </a:r>
           </a:p>
         </p:txBody>
@@ -40432,7 +40415,7 @@
             <a:avLst/>
           </a:prstGeom>
           <a:solidFill>
-            <a:srgbClr val="C48052"/>
+            <a:srgbClr val="48BF8F"/>
           </a:solidFill>
           <a:ln>
             <a:noFill/>
@@ -40475,7 +40458,7 @@
             <a:avLst/>
           </a:prstGeom>
           <a:solidFill>
-            <a:srgbClr val="C48052"/>
+            <a:srgbClr val="48BF8F"/>
           </a:solidFill>
           <a:ln>
             <a:noFill/>
@@ -40518,7 +40501,7 @@
             <a:avLst/>
           </a:prstGeom>
           <a:solidFill>
-            <a:srgbClr val="C48052"/>
+            <a:srgbClr val="48BF8F"/>
           </a:solidFill>
           <a:ln>
             <a:noFill/>
@@ -40561,7 +40544,7 @@
             <a:avLst/>
           </a:prstGeom>
           <a:solidFill>
-            <a:srgbClr val="C48052"/>
+            <a:srgbClr val="48BF8F"/>
           </a:solidFill>
           <a:ln>
             <a:noFill/>
@@ -40615,11 +40598,11 @@
             <a:r>
               <a:rPr sz="1000" b="1">
                 <a:solidFill>
-                  <a:srgbClr val="C48052"/>
+                  <a:srgbClr val="48BF8F"/>
                 </a:solidFill>
                 <a:latin typeface="Aptos"/>
               </a:rPr>
-              <a:t>ALL COMMITS FROM TODAY ACCORDING TO GIT</a:t>
+              <a:t>COMPLETE TRACKED FILE TREE, NO TRACKED FILE OMITTED</a:t>
             </a:r>
           </a:p>
         </p:txBody>
@@ -40654,109 +40637,21 @@
                 </a:solidFill>
                 <a:latin typeface="Aptos Display"/>
               </a:rPr>
-              <a:t>Today's Commit Appendix 1/2</a:t>
-            </a:r>
-          </a:p>
-        </p:txBody>
-      </p:sp>
-      <p:sp>
-        <p:nvSpPr>
-          <p:cNvPr id="9" name="Rounded Rectangle 8"/>
-          <p:cNvSpPr/>
-          <p:nvPr/>
-        </p:nvSpPr>
-        <p:spPr>
-          <a:xfrm>
-            <a:off x="749808" y="1536192"/>
-            <a:ext cx="10561320" cy="4443984"/>
-          </a:xfrm>
-          <a:prstGeom prst="roundRect">
-            <a:avLst/>
-          </a:prstGeom>
-          <a:solidFill>
-            <a:srgbClr val="161A19"/>
-          </a:solidFill>
-          <a:ln>
-            <a:solidFill>
-              <a:srgbClr val="595F56"/>
-            </a:solidFill>
-          </a:ln>
-        </p:spPr>
-        <p:style>
-          <a:lnRef idx="1">
-            <a:schemeClr val="accent1"/>
-          </a:lnRef>
-          <a:fillRef idx="3">
-            <a:schemeClr val="accent1"/>
-          </a:fillRef>
-          <a:effectRef idx="2">
-            <a:schemeClr val="accent1"/>
-          </a:effectRef>
-          <a:fontRef idx="minor">
-            <a:schemeClr val="lt1"/>
-          </a:fontRef>
-        </p:style>
-        <p:txBody>
-          <a:bodyPr rtlCol="0" anchor="ctr"/>
-          <a:lstStyle/>
-          <a:p>
-            <a:pPr algn="ctr"/>
-          </a:p>
-        </p:txBody>
-      </p:sp>
-      <p:sp>
-        <p:nvSpPr>
-          <p:cNvPr id="10" name="Rectangle 9"/>
-          <p:cNvSpPr/>
-          <p:nvPr/>
-        </p:nvSpPr>
-        <p:spPr>
-          <a:xfrm>
-            <a:off x="749808" y="1536192"/>
-            <a:ext cx="10561320" cy="109728"/>
-          </a:xfrm>
-          <a:prstGeom prst="rect">
-            <a:avLst/>
-          </a:prstGeom>
-          <a:solidFill>
-            <a:srgbClr val="C48052"/>
-          </a:solidFill>
-          <a:ln>
-            <a:noFill/>
-          </a:ln>
-        </p:spPr>
-        <p:style>
-          <a:lnRef idx="1">
-            <a:schemeClr val="accent1"/>
-          </a:lnRef>
-          <a:fillRef idx="3">
-            <a:schemeClr val="accent1"/>
-          </a:fillRef>
-          <a:effectRef idx="2">
-            <a:schemeClr val="accent1"/>
-          </a:effectRef>
-          <a:fontRef idx="minor">
-            <a:schemeClr val="lt1"/>
-          </a:fontRef>
-        </p:style>
-        <p:txBody>
-          <a:bodyPr rtlCol="0" anchor="ctr"/>
-          <a:lstStyle/>
-          <a:p>
-            <a:pPr algn="ctr"/>
-          </a:p>
-        </p:txBody>
-      </p:sp>
-      <p:sp>
-        <p:nvSpPr>
-          <p:cNvPr id="11" name="TextBox 10"/>
+              <a:t>Tracked File Tree Appendix 1/28</a:t>
+            </a:r>
+          </a:p>
+        </p:txBody>
+      </p:sp>
+      <p:sp>
+        <p:nvSpPr>
+          <p:cNvPr id="9" name="TextBox 8"/>
           <p:cNvSpPr txBox="1"/>
           <p:nvPr/>
         </p:nvSpPr>
         <p:spPr>
           <a:xfrm>
-            <a:off x="950976" y="1737360"/>
-            <a:ext cx="10158984" cy="310896"/>
+            <a:off x="658368" y="1426464"/>
+            <a:ext cx="10927080" cy="4956048"/>
           </a:xfrm>
           <a:prstGeom prst="rect">
             <a:avLst/>
@@ -40771,132 +40666,43 @@
           <a:p>
             <a:pPr algn="l"/>
             <a:r>
-              <a:rPr sz="1400" b="1">
-                <a:solidFill>
-                  <a:srgbClr val="C48052"/>
-                </a:solidFill>
-                <a:latin typeface="Aptos"/>
+              <a:rPr sz="700" b="0">
+                <a:solidFill>
+                  <a:srgbClr val="E8E8DE"/>
+                </a:solidFill>
+                <a:latin typeface="Cascadia Mono"/>
               </a:rPr>
-              <a:t>Commit timeline</a:t>
-            </a:r>
-          </a:p>
-        </p:txBody>
-      </p:sp>
-      <p:sp>
-        <p:nvSpPr>
-          <p:cNvPr id="12" name="TextBox 11"/>
-          <p:cNvSpPr txBox="1"/>
-          <p:nvPr/>
-        </p:nvSpPr>
-        <p:spPr>
-          <a:xfrm>
-            <a:off x="950976" y="2194560"/>
-            <a:ext cx="10158984" cy="3639312"/>
-          </a:xfrm>
-          <a:prstGeom prst="rect">
-            <a:avLst/>
-          </a:prstGeom>
-          <a:noFill/>
-        </p:spPr>
-        <p:txBody>
-          <a:bodyPr wrap="square" anchor="t" lIns="38100" rIns="38100" tIns="25400" bIns="25400">
-            <a:normAutofit/>
-          </a:bodyPr>
-          <a:lstStyle/>
-          <a:p>
-            <a:pPr>
-              <a:spcAft>
-                <a:spcPts val="400"/>
-              </a:spcAft>
-              <a:defRPr sz="1200">
-                <a:solidFill>
-                  <a:srgbClr val="B4BAAE"/>
-                </a:solidFill>
-                <a:latin typeface="Aptos"/>
-              </a:defRPr>
-            </a:pPr>
-            <a:r>
-              <a:t>2026-06-06 | 6762e43 | Implement the almost invulnerable Whatdog designed by Claude Opus 4.8, commit by Tlamatini's-AutoBot.</a:t>
-            </a:r>
-          </a:p>
-          <a:p>
-            <a:pPr>
-              <a:spcAft>
-                <a:spcPts val="400"/>
-              </a:spcAft>
-              <a:defRPr sz="1200">
-                <a:solidFill>
-                  <a:srgbClr val="B4BAAE"/>
-                </a:solidFill>
-                <a:latin typeface="Aptos"/>
-              </a:defRPr>
-            </a:pPr>
-            <a:r>
-              <a:t>2026-06-06 | c99cb33 | Implementing smart executor-watchdog!, by Tlamatini's-AutoBot.</a:t>
-            </a:r>
-          </a:p>
-          <a:p>
-            <a:pPr>
-              <a:spcAft>
-                <a:spcPts val="400"/>
-              </a:spcAft>
-              <a:defRPr sz="1200">
-                <a:solidFill>
-                  <a:srgbClr val="B4BAAE"/>
-                </a:solidFill>
-                <a:latin typeface="Aptos"/>
-              </a:defRPr>
-            </a:pPr>
-            <a:r>
-              <a:t>2026-06-06 | 0e44a6c | Update to v1.17.1 everywhere, by angelahack1</a:t>
-            </a:r>
-          </a:p>
-          <a:p>
-            <a:pPr>
-              <a:spcAft>
-                <a:spcPts val="400"/>
-              </a:spcAft>
-              <a:defRPr sz="1200">
-                <a:solidFill>
-                  <a:srgbClr val="B4BAAE"/>
-                </a:solidFill>
-                <a:latin typeface="Aptos"/>
-              </a:defRPr>
-            </a:pPr>
-            <a:r>
-              <a:t>2026-06-06 | b0c7bc7 | I hope Claude is right!, I dont know why it startes to gimme a 4g release, that's absurd, Claude make an optimization I dont know if believe it or not, but I'll test it, by angelahack1</a:t>
-            </a:r>
-          </a:p>
-          <a:p>
-            <a:pPr>
-              <a:spcAft>
-                <a:spcPts val="400"/>
-              </a:spcAft>
-              <a:defRPr sz="1200">
-                <a:solidFill>
-                  <a:srgbClr val="B4BAAE"/>
-                </a:solidFill>
-                <a:latin typeface="Aptos"/>
-              </a:defRPr>
-            </a:pPr>
-            <a:r>
-              <a:t>2026-06-06 | 01cb02f | Fix of hanged comand's execution, by angelahack1</a:t>
-            </a:r>
-          </a:p>
-          <a:p>
-            <a:pPr>
-              <a:spcAft>
-                <a:spcPts val="400"/>
-              </a:spcAft>
-              <a:defRPr sz="1200">
-                <a:solidFill>
-                  <a:srgbClr val="B4BAAE"/>
-                </a:solidFill>
-                <a:latin typeface="Aptos"/>
-              </a:defRPr>
-            </a:pPr>
-            <a:r>
-              <a:t>2026-06-06 | 31e28f2 | Fix of hanged comand's execution, by angelahack1</a:t>
+              <a:t>Tlamatini/
+|-- .gitignore
+|-- .mcp.json
+|-- _acpx_pipeline_demo_report.md
+|-- ACPX.md
+|-- agents_descriptions.md
+|-- BookOfTlamatini.md
+|-- build.py
+|-- build_installer.py
+|-- build_uninstaller.py
+|-- Claude-Desktop-KALI-MCP-Session.md
+|-- CLAUDE.md
+|-- CreateShortcut.json
+|-- CreateShortcut.ps1
+|-- eslint.config.mjs
+|-- example_of_prompt_to_make_de-compresser_agent.txt
+|-- image.png
+|-- install.py
+|-- KIMI.md
+|-- LICENSE
+|-- OllamaPricing.png
+|-- package.json
+|-- PIVOT_CHANGES.md
+|-- pnpm-lock.yaml
+|-- prompt_example_2_create_agent.txt
+|-- README.md
+|-- regen_secrets.py
+|-- register_flw.ps1
+|-- RemoveShortcut.ps1
+|-- requirements.txt
+|-- Tlamatini-Kali-Setup.md</a:t>
             </a:r>
           </a:p>
         </p:txBody>
@@ -40977,7 +40783,7 @@
             <a:avLst/>
           </a:prstGeom>
           <a:solidFill>
-            <a:srgbClr val="48BF8F"/>
+            <a:srgbClr val="C48052"/>
           </a:solidFill>
           <a:ln>
             <a:noFill/>
@@ -41020,7 +40826,7 @@
             <a:avLst/>
           </a:prstGeom>
           <a:solidFill>
-            <a:srgbClr val="48BF8F"/>
+            <a:srgbClr val="C48052"/>
           </a:solidFill>
           <a:ln>
             <a:noFill/>
@@ -41063,7 +40869,7 @@
             <a:avLst/>
           </a:prstGeom>
           <a:solidFill>
-            <a:srgbClr val="48BF8F"/>
+            <a:srgbClr val="C48052"/>
           </a:solidFill>
           <a:ln>
             <a:noFill/>
@@ -41106,7 +40912,7 @@
             <a:avLst/>
           </a:prstGeom>
           <a:solidFill>
-            <a:srgbClr val="48BF8F"/>
+            <a:srgbClr val="C48052"/>
           </a:solidFill>
           <a:ln>
             <a:noFill/>
@@ -41160,11 +40966,11 @@
             <a:r>
               <a:rPr sz="1000" b="1">
                 <a:solidFill>
-                  <a:srgbClr val="48BF8F"/>
+                  <a:srgbClr val="C48052"/>
                 </a:solidFill>
                 <a:latin typeface="Aptos"/>
               </a:rPr>
-              <a:t>ALL COMMITS FROM TODAY ACCORDING TO GIT</a:t>
+              <a:t>COMPLETE TRACKED FILE TREE, NO TRACKED FILE OMITTED</a:t>
             </a:r>
           </a:p>
         </p:txBody>
@@ -41199,109 +41005,21 @@
                 </a:solidFill>
                 <a:latin typeface="Aptos Display"/>
               </a:rPr>
-              <a:t>Today's Commit Appendix 2/2</a:t>
-            </a:r>
-          </a:p>
-        </p:txBody>
-      </p:sp>
-      <p:sp>
-        <p:nvSpPr>
-          <p:cNvPr id="9" name="Rounded Rectangle 8"/>
-          <p:cNvSpPr/>
-          <p:nvPr/>
-        </p:nvSpPr>
-        <p:spPr>
-          <a:xfrm>
-            <a:off x="749808" y="1536192"/>
-            <a:ext cx="10561320" cy="4443984"/>
-          </a:xfrm>
-          <a:prstGeom prst="roundRect">
-            <a:avLst/>
-          </a:prstGeom>
-          <a:solidFill>
-            <a:srgbClr val="161A19"/>
-          </a:solidFill>
-          <a:ln>
-            <a:solidFill>
-              <a:srgbClr val="595F56"/>
-            </a:solidFill>
-          </a:ln>
-        </p:spPr>
-        <p:style>
-          <a:lnRef idx="1">
-            <a:schemeClr val="accent1"/>
-          </a:lnRef>
-          <a:fillRef idx="3">
-            <a:schemeClr val="accent1"/>
-          </a:fillRef>
-          <a:effectRef idx="2">
-            <a:schemeClr val="accent1"/>
-          </a:effectRef>
-          <a:fontRef idx="minor">
-            <a:schemeClr val="lt1"/>
-          </a:fontRef>
-        </p:style>
-        <p:txBody>
-          <a:bodyPr rtlCol="0" anchor="ctr"/>
-          <a:lstStyle/>
-          <a:p>
-            <a:pPr algn="ctr"/>
-          </a:p>
-        </p:txBody>
-      </p:sp>
-      <p:sp>
-        <p:nvSpPr>
-          <p:cNvPr id="10" name="Rectangle 9"/>
-          <p:cNvSpPr/>
-          <p:nvPr/>
-        </p:nvSpPr>
-        <p:spPr>
-          <a:xfrm>
-            <a:off x="749808" y="1536192"/>
-            <a:ext cx="10561320" cy="109728"/>
-          </a:xfrm>
-          <a:prstGeom prst="rect">
-            <a:avLst/>
-          </a:prstGeom>
-          <a:solidFill>
-            <a:srgbClr val="48BF8F"/>
-          </a:solidFill>
-          <a:ln>
-            <a:noFill/>
-          </a:ln>
-        </p:spPr>
-        <p:style>
-          <a:lnRef idx="1">
-            <a:schemeClr val="accent1"/>
-          </a:lnRef>
-          <a:fillRef idx="3">
-            <a:schemeClr val="accent1"/>
-          </a:fillRef>
-          <a:effectRef idx="2">
-            <a:schemeClr val="accent1"/>
-          </a:effectRef>
-          <a:fontRef idx="minor">
-            <a:schemeClr val="lt1"/>
-          </a:fontRef>
-        </p:style>
-        <p:txBody>
-          <a:bodyPr rtlCol="0" anchor="ctr"/>
-          <a:lstStyle/>
-          <a:p>
-            <a:pPr algn="ctr"/>
-          </a:p>
-        </p:txBody>
-      </p:sp>
-      <p:sp>
-        <p:nvSpPr>
-          <p:cNvPr id="11" name="TextBox 10"/>
+              <a:t>Tracked File Tree Appendix 2/28</a:t>
+            </a:r>
+          </a:p>
+        </p:txBody>
+      </p:sp>
+      <p:sp>
+        <p:nvSpPr>
+          <p:cNvPr id="9" name="TextBox 8"/>
           <p:cNvSpPr txBox="1"/>
           <p:nvPr/>
         </p:nvSpPr>
         <p:spPr>
           <a:xfrm>
-            <a:off x="950976" y="1737360"/>
-            <a:ext cx="10158984" cy="310896"/>
+            <a:off x="658368" y="1426464"/>
+            <a:ext cx="10927080" cy="4956048"/>
           </a:xfrm>
           <a:prstGeom prst="rect">
             <a:avLst/>
@@ -41316,1896 +41034,19 @@
           <a:p>
             <a:pPr algn="l"/>
             <a:r>
-              <a:rPr sz="1400" b="1">
-                <a:solidFill>
-                  <a:srgbClr val="48BF8F"/>
-                </a:solidFill>
-                <a:latin typeface="Aptos"/>
-              </a:rPr>
-              <a:t>Commit timeline</a:t>
-            </a:r>
-          </a:p>
-        </p:txBody>
-      </p:sp>
-      <p:sp>
-        <p:nvSpPr>
-          <p:cNvPr id="12" name="TextBox 11"/>
-          <p:cNvSpPr txBox="1"/>
-          <p:nvPr/>
-        </p:nvSpPr>
-        <p:spPr>
-          <a:xfrm>
-            <a:off x="950976" y="2194560"/>
-            <a:ext cx="10158984" cy="3639312"/>
-          </a:xfrm>
-          <a:prstGeom prst="rect">
-            <a:avLst/>
-          </a:prstGeom>
-          <a:noFill/>
-        </p:spPr>
-        <p:txBody>
-          <a:bodyPr wrap="square" anchor="t" lIns="38100" rIns="38100" tIns="25400" bIns="25400">
-            <a:normAutofit/>
-          </a:bodyPr>
-          <a:lstStyle/>
-          <a:p>
-            <a:pPr>
-              <a:spcAft>
-                <a:spcPts val="400"/>
-              </a:spcAft>
-              <a:defRPr sz="1200">
-                <a:solidFill>
-                  <a:srgbClr val="B4BAAE"/>
-                </a:solidFill>
-                <a:latin typeface="Aptos"/>
-              </a:defRPr>
-            </a:pPr>
-            <a:r>
-              <a:t>2026-06-06 | d48dfaf | Track Claude Code assets in-repo (hooks, settings, skills, memories)</a:t>
-            </a:r>
-          </a:p>
-        </p:txBody>
-      </p:sp>
-    </p:spTree>
-  </p:cSld>
-  <p:clrMapOvr>
-    <a:masterClrMapping/>
-  </p:clrMapOvr>
-</p:sld>
-</file>
-
-<file path=ppt/slides/slide6.xml><?xml version="1.0" encoding="utf-8"?>
-<p:sld xmlns:a="http://schemas.openxmlformats.org/drawingml/2006/main" xmlns:p="http://schemas.openxmlformats.org/presentationml/2006/main" xmlns:r="http://schemas.openxmlformats.org/officeDocument/2006/relationships">
-  <p:cSld>
-    <p:spTree>
-      <p:nvGrpSpPr>
-        <p:cNvPr id="1" name=""/>
-        <p:cNvGrpSpPr/>
-        <p:nvPr/>
-      </p:nvGrpSpPr>
-      <p:grpSpPr/>
-      <p:sp>
-        <p:nvSpPr>
-          <p:cNvPr id="2" name="Rectangle 1"/>
-          <p:cNvSpPr/>
-          <p:nvPr/>
-        </p:nvSpPr>
-        <p:spPr>
-          <a:xfrm>
-            <a:off x="0" y="0"/>
-            <a:ext cx="12191695" cy="6858000"/>
-          </a:xfrm>
-          <a:prstGeom prst="rect">
-            <a:avLst/>
-          </a:prstGeom>
-          <a:solidFill>
-            <a:srgbClr val="080D0D"/>
-          </a:solidFill>
-          <a:ln>
-            <a:noFill/>
-          </a:ln>
-        </p:spPr>
-        <p:style>
-          <a:lnRef idx="1">
-            <a:schemeClr val="accent1"/>
-          </a:lnRef>
-          <a:fillRef idx="3">
-            <a:schemeClr val="accent1"/>
-          </a:fillRef>
-          <a:effectRef idx="2">
-            <a:schemeClr val="accent1"/>
-          </a:effectRef>
-          <a:fontRef idx="minor">
-            <a:schemeClr val="lt1"/>
-          </a:fontRef>
-        </p:style>
-        <p:txBody>
-          <a:bodyPr rtlCol="0" anchor="ctr"/>
-          <a:lstStyle/>
-          <a:p>
-            <a:pPr algn="ctr"/>
-          </a:p>
-        </p:txBody>
-      </p:sp>
-      <p:sp>
-        <p:nvSpPr>
-          <p:cNvPr id="3" name="Rectangle 2"/>
-          <p:cNvSpPr/>
-          <p:nvPr/>
-        </p:nvSpPr>
-        <p:spPr>
-          <a:xfrm>
-            <a:off x="320040" y="384048"/>
-            <a:ext cx="36576" cy="6080760"/>
-          </a:xfrm>
-          <a:prstGeom prst="rect">
-            <a:avLst/>
-          </a:prstGeom>
-          <a:solidFill>
-            <a:srgbClr val="48BF8F"/>
-          </a:solidFill>
-          <a:ln>
-            <a:noFill/>
-          </a:ln>
-        </p:spPr>
-        <p:style>
-          <a:lnRef idx="1">
-            <a:schemeClr val="accent1"/>
-          </a:lnRef>
-          <a:fillRef idx="3">
-            <a:schemeClr val="accent1"/>
-          </a:fillRef>
-          <a:effectRef idx="2">
-            <a:schemeClr val="accent1"/>
-          </a:effectRef>
-          <a:fontRef idx="minor">
-            <a:schemeClr val="lt1"/>
-          </a:fontRef>
-        </p:style>
-        <p:txBody>
-          <a:bodyPr rtlCol="0" anchor="ctr"/>
-          <a:lstStyle/>
-          <a:p>
-            <a:pPr algn="ctr"/>
-          </a:p>
-        </p:txBody>
-      </p:sp>
-      <p:sp>
-        <p:nvSpPr>
-          <p:cNvPr id="4" name="Rectangle 3"/>
-          <p:cNvSpPr/>
-          <p:nvPr/>
-        </p:nvSpPr>
-        <p:spPr>
-          <a:xfrm>
-            <a:off x="11716207" y="384048"/>
-            <a:ext cx="36576" cy="6080760"/>
-          </a:xfrm>
-          <a:prstGeom prst="rect">
-            <a:avLst/>
-          </a:prstGeom>
-          <a:solidFill>
-            <a:srgbClr val="48BF8F"/>
-          </a:solidFill>
-          <a:ln>
-            <a:noFill/>
-          </a:ln>
-        </p:spPr>
-        <p:style>
-          <a:lnRef idx="1">
-            <a:schemeClr val="accent1"/>
-          </a:lnRef>
-          <a:fillRef idx="3">
-            <a:schemeClr val="accent1"/>
-          </a:fillRef>
-          <a:effectRef idx="2">
-            <a:schemeClr val="accent1"/>
-          </a:effectRef>
-          <a:fontRef idx="minor">
-            <a:schemeClr val="lt1"/>
-          </a:fontRef>
-        </p:style>
-        <p:txBody>
-          <a:bodyPr rtlCol="0" anchor="ctr"/>
-          <a:lstStyle/>
-          <a:p>
-            <a:pPr algn="ctr"/>
-          </a:p>
-        </p:txBody>
-      </p:sp>
-      <p:sp>
-        <p:nvSpPr>
-          <p:cNvPr id="5" name="Rectangle 4"/>
-          <p:cNvSpPr/>
-          <p:nvPr/>
-        </p:nvSpPr>
-        <p:spPr>
-          <a:xfrm>
-            <a:off x="502920" y="384048"/>
-            <a:ext cx="11155680" cy="27432"/>
-          </a:xfrm>
-          <a:prstGeom prst="rect">
-            <a:avLst/>
-          </a:prstGeom>
-          <a:solidFill>
-            <a:srgbClr val="48BF8F"/>
-          </a:solidFill>
-          <a:ln>
-            <a:noFill/>
-          </a:ln>
-        </p:spPr>
-        <p:style>
-          <a:lnRef idx="1">
-            <a:schemeClr val="accent1"/>
-          </a:lnRef>
-          <a:fillRef idx="3">
-            <a:schemeClr val="accent1"/>
-          </a:fillRef>
-          <a:effectRef idx="2">
-            <a:schemeClr val="accent1"/>
-          </a:effectRef>
-          <a:fontRef idx="minor">
-            <a:schemeClr val="lt1"/>
-          </a:fontRef>
-        </p:style>
-        <p:txBody>
-          <a:bodyPr rtlCol="0" anchor="ctr"/>
-          <a:lstStyle/>
-          <a:p>
-            <a:pPr algn="ctr"/>
-          </a:p>
-        </p:txBody>
-      </p:sp>
-      <p:sp>
-        <p:nvSpPr>
-          <p:cNvPr id="6" name="Rectangle 5"/>
-          <p:cNvSpPr/>
-          <p:nvPr/>
-        </p:nvSpPr>
-        <p:spPr>
-          <a:xfrm>
-            <a:off x="502920" y="6437376"/>
-            <a:ext cx="11155680" cy="27432"/>
-          </a:xfrm>
-          <a:prstGeom prst="rect">
-            <a:avLst/>
-          </a:prstGeom>
-          <a:solidFill>
-            <a:srgbClr val="48BF8F"/>
-          </a:solidFill>
-          <a:ln>
-            <a:noFill/>
-          </a:ln>
-        </p:spPr>
-        <p:style>
-          <a:lnRef idx="1">
-            <a:schemeClr val="accent1"/>
-          </a:lnRef>
-          <a:fillRef idx="3">
-            <a:schemeClr val="accent1"/>
-          </a:fillRef>
-          <a:effectRef idx="2">
-            <a:schemeClr val="accent1"/>
-          </a:effectRef>
-          <a:fontRef idx="minor">
-            <a:schemeClr val="lt1"/>
-          </a:fontRef>
-        </p:style>
-        <p:txBody>
-          <a:bodyPr rtlCol="0" anchor="ctr"/>
-          <a:lstStyle/>
-          <a:p>
-            <a:pPr algn="ctr"/>
-          </a:p>
-        </p:txBody>
-      </p:sp>
-      <p:sp>
-        <p:nvSpPr>
-          <p:cNvPr id="7" name="TextBox 6"/>
-          <p:cNvSpPr txBox="1"/>
-          <p:nvPr/>
-        </p:nvSpPr>
-        <p:spPr>
-          <a:xfrm>
-            <a:off x="713232" y="548640"/>
-            <a:ext cx="10698480" cy="301752"/>
-          </a:xfrm>
-          <a:prstGeom prst="rect">
-            <a:avLst/>
-          </a:prstGeom>
-          <a:noFill/>
-        </p:spPr>
-        <p:txBody>
-          <a:bodyPr wrap="square" anchor="t">
-            <a:spAutoFit/>
-          </a:bodyPr>
-          <a:lstStyle/>
-          <a:p>
-            <a:pPr algn="l"/>
-            <a:r>
-              <a:rPr sz="1000" b="1">
-                <a:solidFill>
-                  <a:srgbClr val="48BF8F"/>
-                </a:solidFill>
-                <a:latin typeface="Aptos"/>
-              </a:rPr>
-              <a:t>EXECUTION PIPELINE</a:t>
-            </a:r>
-          </a:p>
-        </p:txBody>
-      </p:sp>
-      <p:sp>
-        <p:nvSpPr>
-          <p:cNvPr id="8" name="TextBox 7"/>
-          <p:cNvSpPr txBox="1"/>
-          <p:nvPr/>
-        </p:nvSpPr>
-        <p:spPr>
-          <a:xfrm>
-            <a:off x="694944" y="850392"/>
-            <a:ext cx="10881360" cy="566928"/>
-          </a:xfrm>
-          <a:prstGeom prst="rect">
-            <a:avLst/>
-          </a:prstGeom>
-          <a:noFill/>
-        </p:spPr>
-        <p:txBody>
-          <a:bodyPr wrap="square" anchor="t">
-            <a:spAutoFit/>
-          </a:bodyPr>
-          <a:lstStyle/>
-          <a:p>
-            <a:pPr algn="l"/>
-            <a:r>
-              <a:rPr sz="2700" b="0">
-                <a:solidFill>
-                  <a:srgbClr val="E8E8DE"/>
-                </a:solidFill>
-                <a:latin typeface="Aptos Display"/>
-              </a:rPr>
-              <a:t>How It Works</a:t>
-            </a:r>
-          </a:p>
-        </p:txBody>
-      </p:sp>
-      <p:sp>
-        <p:nvSpPr>
-          <p:cNvPr id="9" name="Rounded Rectangle 8"/>
-          <p:cNvSpPr/>
-          <p:nvPr/>
-        </p:nvSpPr>
-        <p:spPr>
-          <a:xfrm>
-            <a:off x="868680" y="2377440"/>
-            <a:ext cx="1591056" cy="685800"/>
-          </a:xfrm>
-          <a:prstGeom prst="roundRect">
-            <a:avLst/>
-          </a:prstGeom>
-          <a:solidFill>
-            <a:srgbClr val="202322"/>
-          </a:solidFill>
-          <a:ln>
-            <a:solidFill>
-              <a:srgbClr val="48BF8F"/>
-            </a:solidFill>
-          </a:ln>
-        </p:spPr>
-        <p:style>
-          <a:lnRef idx="1">
-            <a:schemeClr val="accent1"/>
-          </a:lnRef>
-          <a:fillRef idx="3">
-            <a:schemeClr val="accent1"/>
-          </a:fillRef>
-          <a:effectRef idx="2">
-            <a:schemeClr val="accent1"/>
-          </a:effectRef>
-          <a:fontRef idx="minor">
-            <a:schemeClr val="lt1"/>
-          </a:fontRef>
-        </p:style>
-        <p:txBody>
-          <a:bodyPr rtlCol="0" anchor="ctr"/>
-          <a:lstStyle/>
-          <a:p>
-            <a:pPr algn="ctr"/>
-          </a:p>
-        </p:txBody>
-      </p:sp>
-      <p:sp>
-        <p:nvSpPr>
-          <p:cNvPr id="10" name="TextBox 9"/>
-          <p:cNvSpPr txBox="1"/>
-          <p:nvPr/>
-        </p:nvSpPr>
-        <p:spPr>
-          <a:xfrm>
-            <a:off x="941832" y="2542032"/>
-            <a:ext cx="1444752" cy="256032"/>
-          </a:xfrm>
-          <a:prstGeom prst="rect">
-            <a:avLst/>
-          </a:prstGeom>
-          <a:noFill/>
-        </p:spPr>
-        <p:txBody>
-          <a:bodyPr wrap="square" anchor="t">
-            <a:spAutoFit/>
-          </a:bodyPr>
-          <a:lstStyle/>
-          <a:p>
-            <a:pPr algn="ctr"/>
-            <a:r>
-              <a:rPr sz="1000" b="1">
-                <a:solidFill>
-                  <a:srgbClr val="E8E8DE"/>
-                </a:solidFill>
-                <a:latin typeface="Aptos"/>
-              </a:rPr>
-              <a:t>Browser</a:t>
-            </a:r>
-          </a:p>
-        </p:txBody>
-      </p:sp>
-      <p:sp>
-        <p:nvSpPr>
-          <p:cNvPr id="11" name="TextBox 10"/>
-          <p:cNvSpPr txBox="1"/>
-          <p:nvPr/>
-        </p:nvSpPr>
-        <p:spPr>
-          <a:xfrm>
-            <a:off x="2459736" y="2551176"/>
-            <a:ext cx="246888" cy="182880"/>
-          </a:xfrm>
-          <a:prstGeom prst="rect">
-            <a:avLst/>
-          </a:prstGeom>
-          <a:noFill/>
-        </p:spPr>
-        <p:txBody>
-          <a:bodyPr wrap="square" anchor="t">
-            <a:spAutoFit/>
-          </a:bodyPr>
-          <a:lstStyle/>
-          <a:p>
-            <a:pPr algn="ctr"/>
-            <a:r>
-              <a:rPr sz="1200" b="1">
-                <a:solidFill>
-                  <a:srgbClr val="48BF8F"/>
-                </a:solidFill>
-                <a:latin typeface="Aptos"/>
-              </a:rPr>
-              <a:t>&gt;</a:t>
-            </a:r>
-          </a:p>
-        </p:txBody>
-      </p:sp>
-      <p:sp>
-        <p:nvSpPr>
-          <p:cNvPr id="12" name="Rounded Rectangle 11"/>
-          <p:cNvSpPr/>
-          <p:nvPr/>
-        </p:nvSpPr>
-        <p:spPr>
-          <a:xfrm>
-            <a:off x="2706624" y="2377440"/>
-            <a:ext cx="1591056" cy="685800"/>
-          </a:xfrm>
-          <a:prstGeom prst="roundRect">
-            <a:avLst/>
-          </a:prstGeom>
-          <a:solidFill>
-            <a:srgbClr val="202322"/>
-          </a:solidFill>
-          <a:ln>
-            <a:solidFill>
-              <a:srgbClr val="48BF8F"/>
-            </a:solidFill>
-          </a:ln>
-        </p:spPr>
-        <p:style>
-          <a:lnRef idx="1">
-            <a:schemeClr val="accent1"/>
-          </a:lnRef>
-          <a:fillRef idx="3">
-            <a:schemeClr val="accent1"/>
-          </a:fillRef>
-          <a:effectRef idx="2">
-            <a:schemeClr val="accent1"/>
-          </a:effectRef>
-          <a:fontRef idx="minor">
-            <a:schemeClr val="lt1"/>
-          </a:fontRef>
-        </p:style>
-        <p:txBody>
-          <a:bodyPr rtlCol="0" anchor="ctr"/>
-          <a:lstStyle/>
-          <a:p>
-            <a:pPr algn="ctr"/>
-          </a:p>
-        </p:txBody>
-      </p:sp>
-      <p:sp>
-        <p:nvSpPr>
-          <p:cNvPr id="13" name="TextBox 12"/>
-          <p:cNvSpPr txBox="1"/>
-          <p:nvPr/>
-        </p:nvSpPr>
-        <p:spPr>
-          <a:xfrm>
-            <a:off x="2779776" y="2542032"/>
-            <a:ext cx="1444752" cy="256032"/>
-          </a:xfrm>
-          <a:prstGeom prst="rect">
-            <a:avLst/>
-          </a:prstGeom>
-          <a:noFill/>
-        </p:spPr>
-        <p:txBody>
-          <a:bodyPr wrap="square" anchor="t">
-            <a:spAutoFit/>
-          </a:bodyPr>
-          <a:lstStyle/>
-          <a:p>
-            <a:pPr algn="ctr"/>
-            <a:r>
-              <a:rPr sz="1000" b="1">
-                <a:solidFill>
-                  <a:srgbClr val="E8E8DE"/>
-                </a:solidFill>
-                <a:latin typeface="Aptos"/>
-              </a:rPr>
-              <a:t>Channels</a:t>
-            </a:r>
-          </a:p>
-        </p:txBody>
-      </p:sp>
-      <p:sp>
-        <p:nvSpPr>
-          <p:cNvPr id="14" name="TextBox 13"/>
-          <p:cNvSpPr txBox="1"/>
-          <p:nvPr/>
-        </p:nvSpPr>
-        <p:spPr>
-          <a:xfrm>
-            <a:off x="4297680" y="2551176"/>
-            <a:ext cx="246888" cy="182880"/>
-          </a:xfrm>
-          <a:prstGeom prst="rect">
-            <a:avLst/>
-          </a:prstGeom>
-          <a:noFill/>
-        </p:spPr>
-        <p:txBody>
-          <a:bodyPr wrap="square" anchor="t">
-            <a:spAutoFit/>
-          </a:bodyPr>
-          <a:lstStyle/>
-          <a:p>
-            <a:pPr algn="ctr"/>
-            <a:r>
-              <a:rPr sz="1200" b="1">
-                <a:solidFill>
-                  <a:srgbClr val="48BF8F"/>
-                </a:solidFill>
-                <a:latin typeface="Aptos"/>
-              </a:rPr>
-              <a:t>&gt;</a:t>
-            </a:r>
-          </a:p>
-        </p:txBody>
-      </p:sp>
-      <p:sp>
-        <p:nvSpPr>
-          <p:cNvPr id="15" name="Rounded Rectangle 14"/>
-          <p:cNvSpPr/>
-          <p:nvPr/>
-        </p:nvSpPr>
-        <p:spPr>
-          <a:xfrm>
-            <a:off x="4544568" y="2377440"/>
-            <a:ext cx="1591056" cy="685800"/>
-          </a:xfrm>
-          <a:prstGeom prst="roundRect">
-            <a:avLst/>
-          </a:prstGeom>
-          <a:solidFill>
-            <a:srgbClr val="202322"/>
-          </a:solidFill>
-          <a:ln>
-            <a:solidFill>
-              <a:srgbClr val="48BF8F"/>
-            </a:solidFill>
-          </a:ln>
-        </p:spPr>
-        <p:style>
-          <a:lnRef idx="1">
-            <a:schemeClr val="accent1"/>
-          </a:lnRef>
-          <a:fillRef idx="3">
-            <a:schemeClr val="accent1"/>
-          </a:fillRef>
-          <a:effectRef idx="2">
-            <a:schemeClr val="accent1"/>
-          </a:effectRef>
-          <a:fontRef idx="minor">
-            <a:schemeClr val="lt1"/>
-          </a:fontRef>
-        </p:style>
-        <p:txBody>
-          <a:bodyPr rtlCol="0" anchor="ctr"/>
-          <a:lstStyle/>
-          <a:p>
-            <a:pPr algn="ctr"/>
-          </a:p>
-        </p:txBody>
-      </p:sp>
-      <p:sp>
-        <p:nvSpPr>
-          <p:cNvPr id="16" name="TextBox 15"/>
-          <p:cNvSpPr txBox="1"/>
-          <p:nvPr/>
-        </p:nvSpPr>
-        <p:spPr>
-          <a:xfrm>
-            <a:off x="4617720" y="2542032"/>
-            <a:ext cx="1444752" cy="256032"/>
-          </a:xfrm>
-          <a:prstGeom prst="rect">
-            <a:avLst/>
-          </a:prstGeom>
-          <a:noFill/>
-        </p:spPr>
-        <p:txBody>
-          <a:bodyPr wrap="square" anchor="t">
-            <a:spAutoFit/>
-          </a:bodyPr>
-          <a:lstStyle/>
-          <a:p>
-            <a:pPr algn="ctr"/>
-            <a:r>
-              <a:rPr sz="1000" b="1">
-                <a:solidFill>
-                  <a:srgbClr val="E8E8DE"/>
-                </a:solidFill>
-                <a:latin typeface="Aptos"/>
-              </a:rPr>
-              <a:t>RAG</a:t>
-            </a:r>
-          </a:p>
-        </p:txBody>
-      </p:sp>
-      <p:sp>
-        <p:nvSpPr>
-          <p:cNvPr id="17" name="TextBox 16"/>
-          <p:cNvSpPr txBox="1"/>
-          <p:nvPr/>
-        </p:nvSpPr>
-        <p:spPr>
-          <a:xfrm>
-            <a:off x="6135624" y="2551176"/>
-            <a:ext cx="246888" cy="182880"/>
-          </a:xfrm>
-          <a:prstGeom prst="rect">
-            <a:avLst/>
-          </a:prstGeom>
-          <a:noFill/>
-        </p:spPr>
-        <p:txBody>
-          <a:bodyPr wrap="square" anchor="t">
-            <a:spAutoFit/>
-          </a:bodyPr>
-          <a:lstStyle/>
-          <a:p>
-            <a:pPr algn="ctr"/>
-            <a:r>
-              <a:rPr sz="1200" b="1">
-                <a:solidFill>
-                  <a:srgbClr val="48BF8F"/>
-                </a:solidFill>
-                <a:latin typeface="Aptos"/>
-              </a:rPr>
-              <a:t>&gt;</a:t>
-            </a:r>
-          </a:p>
-        </p:txBody>
-      </p:sp>
-      <p:sp>
-        <p:nvSpPr>
-          <p:cNvPr id="18" name="Rounded Rectangle 17"/>
-          <p:cNvSpPr/>
-          <p:nvPr/>
-        </p:nvSpPr>
-        <p:spPr>
-          <a:xfrm>
-            <a:off x="6382512" y="2377440"/>
-            <a:ext cx="1591056" cy="685800"/>
-          </a:xfrm>
-          <a:prstGeom prst="roundRect">
-            <a:avLst/>
-          </a:prstGeom>
-          <a:solidFill>
-            <a:srgbClr val="202322"/>
-          </a:solidFill>
-          <a:ln>
-            <a:solidFill>
-              <a:srgbClr val="48BF8F"/>
-            </a:solidFill>
-          </a:ln>
-        </p:spPr>
-        <p:style>
-          <a:lnRef idx="1">
-            <a:schemeClr val="accent1"/>
-          </a:lnRef>
-          <a:fillRef idx="3">
-            <a:schemeClr val="accent1"/>
-          </a:fillRef>
-          <a:effectRef idx="2">
-            <a:schemeClr val="accent1"/>
-          </a:effectRef>
-          <a:fontRef idx="minor">
-            <a:schemeClr val="lt1"/>
-          </a:fontRef>
-        </p:style>
-        <p:txBody>
-          <a:bodyPr rtlCol="0" anchor="ctr"/>
-          <a:lstStyle/>
-          <a:p>
-            <a:pPr algn="ctr"/>
-          </a:p>
-        </p:txBody>
-      </p:sp>
-      <p:sp>
-        <p:nvSpPr>
-          <p:cNvPr id="19" name="TextBox 18"/>
-          <p:cNvSpPr txBox="1"/>
-          <p:nvPr/>
-        </p:nvSpPr>
-        <p:spPr>
-          <a:xfrm>
-            <a:off x="6455664" y="2542032"/>
-            <a:ext cx="1444752" cy="256032"/>
-          </a:xfrm>
-          <a:prstGeom prst="rect">
-            <a:avLst/>
-          </a:prstGeom>
-          <a:noFill/>
-        </p:spPr>
-        <p:txBody>
-          <a:bodyPr wrap="square" anchor="t">
-            <a:spAutoFit/>
-          </a:bodyPr>
-          <a:lstStyle/>
-          <a:p>
-            <a:pPr algn="ctr"/>
-            <a:r>
-              <a:rPr sz="1000" b="1">
-                <a:solidFill>
-                  <a:srgbClr val="E8E8DE"/>
-                </a:solidFill>
-                <a:latin typeface="Aptos"/>
-              </a:rPr>
-              <a:t>Planner</a:t>
-            </a:r>
-          </a:p>
-        </p:txBody>
-      </p:sp>
-      <p:sp>
-        <p:nvSpPr>
-          <p:cNvPr id="20" name="TextBox 19"/>
-          <p:cNvSpPr txBox="1"/>
-          <p:nvPr/>
-        </p:nvSpPr>
-        <p:spPr>
-          <a:xfrm>
-            <a:off x="7973567" y="2551176"/>
-            <a:ext cx="246888" cy="182880"/>
-          </a:xfrm>
-          <a:prstGeom prst="rect">
-            <a:avLst/>
-          </a:prstGeom>
-          <a:noFill/>
-        </p:spPr>
-        <p:txBody>
-          <a:bodyPr wrap="square" anchor="t">
-            <a:spAutoFit/>
-          </a:bodyPr>
-          <a:lstStyle/>
-          <a:p>
-            <a:pPr algn="ctr"/>
-            <a:r>
-              <a:rPr sz="1200" b="1">
-                <a:solidFill>
-                  <a:srgbClr val="48BF8F"/>
-                </a:solidFill>
-                <a:latin typeface="Aptos"/>
-              </a:rPr>
-              <a:t>&gt;</a:t>
-            </a:r>
-          </a:p>
-        </p:txBody>
-      </p:sp>
-      <p:sp>
-        <p:nvSpPr>
-          <p:cNvPr id="21" name="Rounded Rectangle 20"/>
-          <p:cNvSpPr/>
-          <p:nvPr/>
-        </p:nvSpPr>
-        <p:spPr>
-          <a:xfrm>
-            <a:off x="8220455" y="2377440"/>
-            <a:ext cx="1591056" cy="685800"/>
-          </a:xfrm>
-          <a:prstGeom prst="roundRect">
-            <a:avLst/>
-          </a:prstGeom>
-          <a:solidFill>
-            <a:srgbClr val="202322"/>
-          </a:solidFill>
-          <a:ln>
-            <a:solidFill>
-              <a:srgbClr val="48BF8F"/>
-            </a:solidFill>
-          </a:ln>
-        </p:spPr>
-        <p:style>
-          <a:lnRef idx="1">
-            <a:schemeClr val="accent1"/>
-          </a:lnRef>
-          <a:fillRef idx="3">
-            <a:schemeClr val="accent1"/>
-          </a:fillRef>
-          <a:effectRef idx="2">
-            <a:schemeClr val="accent1"/>
-          </a:effectRef>
-          <a:fontRef idx="minor">
-            <a:schemeClr val="lt1"/>
-          </a:fontRef>
-        </p:style>
-        <p:txBody>
-          <a:bodyPr rtlCol="0" anchor="ctr"/>
-          <a:lstStyle/>
-          <a:p>
-            <a:pPr algn="ctr"/>
-          </a:p>
-        </p:txBody>
-      </p:sp>
-      <p:sp>
-        <p:nvSpPr>
-          <p:cNvPr id="22" name="TextBox 21"/>
-          <p:cNvSpPr txBox="1"/>
-          <p:nvPr/>
-        </p:nvSpPr>
-        <p:spPr>
-          <a:xfrm>
-            <a:off x="8293607" y="2542032"/>
-            <a:ext cx="1444752" cy="256032"/>
-          </a:xfrm>
-          <a:prstGeom prst="rect">
-            <a:avLst/>
-          </a:prstGeom>
-          <a:noFill/>
-        </p:spPr>
-        <p:txBody>
-          <a:bodyPr wrap="square" anchor="t">
-            <a:spAutoFit/>
-          </a:bodyPr>
-          <a:lstStyle/>
-          <a:p>
-            <a:pPr algn="ctr"/>
-            <a:r>
-              <a:rPr sz="1000" b="1">
-                <a:solidFill>
-                  <a:srgbClr val="E8E8DE"/>
-                </a:solidFill>
-                <a:latin typeface="Aptos"/>
-              </a:rPr>
-              <a:t>Tools</a:t>
-            </a:r>
-          </a:p>
-        </p:txBody>
-      </p:sp>
-      <p:sp>
-        <p:nvSpPr>
-          <p:cNvPr id="23" name="TextBox 22"/>
-          <p:cNvSpPr txBox="1"/>
-          <p:nvPr/>
-        </p:nvSpPr>
-        <p:spPr>
-          <a:xfrm>
-            <a:off x="9811511" y="2551176"/>
-            <a:ext cx="246888" cy="182880"/>
-          </a:xfrm>
-          <a:prstGeom prst="rect">
-            <a:avLst/>
-          </a:prstGeom>
-          <a:noFill/>
-        </p:spPr>
-        <p:txBody>
-          <a:bodyPr wrap="square" anchor="t">
-            <a:spAutoFit/>
-          </a:bodyPr>
-          <a:lstStyle/>
-          <a:p>
-            <a:pPr algn="ctr"/>
-            <a:r>
-              <a:rPr sz="1200" b="1">
-                <a:solidFill>
-                  <a:srgbClr val="48BF8F"/>
-                </a:solidFill>
-                <a:latin typeface="Aptos"/>
-              </a:rPr>
-              <a:t>&gt;</a:t>
-            </a:r>
-          </a:p>
-        </p:txBody>
-      </p:sp>
-      <p:sp>
-        <p:nvSpPr>
-          <p:cNvPr id="24" name="Rounded Rectangle 23"/>
-          <p:cNvSpPr/>
-          <p:nvPr/>
-        </p:nvSpPr>
-        <p:spPr>
-          <a:xfrm>
-            <a:off x="10058399" y="2377440"/>
-            <a:ext cx="1591056" cy="685800"/>
-          </a:xfrm>
-          <a:prstGeom prst="roundRect">
-            <a:avLst/>
-          </a:prstGeom>
-          <a:solidFill>
-            <a:srgbClr val="202322"/>
-          </a:solidFill>
-          <a:ln>
-            <a:solidFill>
-              <a:srgbClr val="48BF8F"/>
-            </a:solidFill>
-          </a:ln>
-        </p:spPr>
-        <p:style>
-          <a:lnRef idx="1">
-            <a:schemeClr val="accent1"/>
-          </a:lnRef>
-          <a:fillRef idx="3">
-            <a:schemeClr val="accent1"/>
-          </a:fillRef>
-          <a:effectRef idx="2">
-            <a:schemeClr val="accent1"/>
-          </a:effectRef>
-          <a:fontRef idx="minor">
-            <a:schemeClr val="lt1"/>
-          </a:fontRef>
-        </p:style>
-        <p:txBody>
-          <a:bodyPr rtlCol="0" anchor="ctr"/>
-          <a:lstStyle/>
-          <a:p>
-            <a:pPr algn="ctr"/>
-          </a:p>
-        </p:txBody>
-      </p:sp>
-      <p:sp>
-        <p:nvSpPr>
-          <p:cNvPr id="25" name="TextBox 24"/>
-          <p:cNvSpPr txBox="1"/>
-          <p:nvPr/>
-        </p:nvSpPr>
-        <p:spPr>
-          <a:xfrm>
-            <a:off x="10131551" y="2542032"/>
-            <a:ext cx="1444752" cy="256032"/>
-          </a:xfrm>
-          <a:prstGeom prst="rect">
-            <a:avLst/>
-          </a:prstGeom>
-          <a:noFill/>
-        </p:spPr>
-        <p:txBody>
-          <a:bodyPr wrap="square" anchor="t">
-            <a:spAutoFit/>
-          </a:bodyPr>
-          <a:lstStyle/>
-          <a:p>
-            <a:pPr algn="ctr"/>
-            <a:r>
-              <a:rPr sz="1000" b="1">
-                <a:solidFill>
-                  <a:srgbClr val="E8E8DE"/>
-                </a:solidFill>
-                <a:latin typeface="Aptos"/>
-              </a:rPr>
-              <a:t>Answer</a:t>
-            </a:r>
-          </a:p>
-        </p:txBody>
-      </p:sp>
-      <p:sp>
-        <p:nvSpPr>
-          <p:cNvPr id="26" name="Rounded Rectangle 25"/>
-          <p:cNvSpPr/>
-          <p:nvPr/>
-        </p:nvSpPr>
-        <p:spPr>
-          <a:xfrm>
-            <a:off x="749808" y="3657600"/>
-            <a:ext cx="10561320" cy="2240280"/>
-          </a:xfrm>
-          <a:prstGeom prst="roundRect">
-            <a:avLst/>
-          </a:prstGeom>
-          <a:solidFill>
-            <a:srgbClr val="161A19"/>
-          </a:solidFill>
-          <a:ln>
-            <a:solidFill>
-              <a:srgbClr val="595F56"/>
-            </a:solidFill>
-          </a:ln>
-        </p:spPr>
-        <p:style>
-          <a:lnRef idx="1">
-            <a:schemeClr val="accent1"/>
-          </a:lnRef>
-          <a:fillRef idx="3">
-            <a:schemeClr val="accent1"/>
-          </a:fillRef>
-          <a:effectRef idx="2">
-            <a:schemeClr val="accent1"/>
-          </a:effectRef>
-          <a:fontRef idx="minor">
-            <a:schemeClr val="lt1"/>
-          </a:fontRef>
-        </p:style>
-        <p:txBody>
-          <a:bodyPr rtlCol="0" anchor="ctr"/>
-          <a:lstStyle/>
-          <a:p>
-            <a:pPr algn="ctr"/>
-          </a:p>
-        </p:txBody>
-      </p:sp>
-      <p:sp>
-        <p:nvSpPr>
-          <p:cNvPr id="27" name="Rectangle 26"/>
-          <p:cNvSpPr/>
-          <p:nvPr/>
-        </p:nvSpPr>
-        <p:spPr>
-          <a:xfrm>
-            <a:off x="749808" y="3657600"/>
-            <a:ext cx="10561320" cy="109728"/>
-          </a:xfrm>
-          <a:prstGeom prst="rect">
-            <a:avLst/>
-          </a:prstGeom>
-          <a:solidFill>
-            <a:srgbClr val="48BF8F"/>
-          </a:solidFill>
-          <a:ln>
-            <a:noFill/>
-          </a:ln>
-        </p:spPr>
-        <p:style>
-          <a:lnRef idx="1">
-            <a:schemeClr val="accent1"/>
-          </a:lnRef>
-          <a:fillRef idx="3">
-            <a:schemeClr val="accent1"/>
-          </a:fillRef>
-          <a:effectRef idx="2">
-            <a:schemeClr val="accent1"/>
-          </a:effectRef>
-          <a:fontRef idx="minor">
-            <a:schemeClr val="lt1"/>
-          </a:fontRef>
-        </p:style>
-        <p:txBody>
-          <a:bodyPr rtlCol="0" anchor="ctr"/>
-          <a:lstStyle/>
-          <a:p>
-            <a:pPr algn="ctr"/>
-          </a:p>
-        </p:txBody>
-      </p:sp>
-      <p:sp>
-        <p:nvSpPr>
-          <p:cNvPr id="28" name="TextBox 27"/>
-          <p:cNvSpPr txBox="1"/>
-          <p:nvPr/>
-        </p:nvSpPr>
-        <p:spPr>
-          <a:xfrm>
-            <a:off x="950976" y="3858768"/>
-            <a:ext cx="10158984" cy="310896"/>
-          </a:xfrm>
-          <a:prstGeom prst="rect">
-            <a:avLst/>
-          </a:prstGeom>
-          <a:noFill/>
-        </p:spPr>
-        <p:txBody>
-          <a:bodyPr wrap="square" anchor="t">
-            <a:spAutoFit/>
-          </a:bodyPr>
-          <a:lstStyle/>
-          <a:p>
-            <a:pPr algn="l"/>
-            <a:r>
-              <a:rPr sz="1400" b="1">
-                <a:solidFill>
-                  <a:srgbClr val="48BF8F"/>
-                </a:solidFill>
-                <a:latin typeface="Aptos"/>
-              </a:rPr>
-              <a:t>Request-to-answer flow</a:t>
-            </a:r>
-          </a:p>
-        </p:txBody>
-      </p:sp>
-      <p:sp>
-        <p:nvSpPr>
-          <p:cNvPr id="29" name="TextBox 28"/>
-          <p:cNvSpPr txBox="1"/>
-          <p:nvPr/>
-        </p:nvSpPr>
-        <p:spPr>
-          <a:xfrm>
-            <a:off x="950976" y="4315968"/>
-            <a:ext cx="10158984" cy="1435608"/>
-          </a:xfrm>
-          <a:prstGeom prst="rect">
-            <a:avLst/>
-          </a:prstGeom>
-          <a:noFill/>
-        </p:spPr>
-        <p:txBody>
-          <a:bodyPr wrap="square" anchor="t" lIns="38100" rIns="38100" tIns="25400" bIns="25400">
-            <a:normAutofit/>
-          </a:bodyPr>
-          <a:lstStyle/>
-          <a:p>
-            <a:pPr>
-              <a:spcAft>
-                <a:spcPts val="400"/>
-              </a:spcAft>
-              <a:defRPr sz="1500">
-                <a:solidFill>
-                  <a:srgbClr val="B4BAAE"/>
-                </a:solidFill>
-                <a:latin typeface="Aptos"/>
-              </a:defRPr>
-            </a:pPr>
-            <a:r>
-              <a:t>A browser request flows through Django Channels into the RAG/context layer, the Multi-Turn planner, the tool executor, and back as a synthesized answer.</a:t>
-            </a:r>
-          </a:p>
-          <a:p>
-            <a:pPr>
-              <a:spcAft>
-                <a:spcPts val="400"/>
-              </a:spcAft>
-              <a:defRPr sz="1500">
-                <a:solidFill>
-                  <a:srgbClr val="B4BAAE"/>
-                </a:solidFill>
-                <a:latin typeface="Aptos"/>
-              </a:defRPr>
-            </a:pPr>
-            <a:r>
-              <a:t>The next two pages detail the request path (intake, retrieval, permission gating) and the runtime path (planning, tool execution, agent bridges, packaging).</a:t>
-            </a:r>
-          </a:p>
-        </p:txBody>
-      </p:sp>
-    </p:spTree>
-  </p:cSld>
-  <p:clrMapOvr>
-    <a:masterClrMapping/>
-  </p:clrMapOvr>
-</p:sld>
-</file>
-
-<file path=ppt/slides/slide60.xml><?xml version="1.0" encoding="utf-8"?>
-<p:sld xmlns:a="http://schemas.openxmlformats.org/drawingml/2006/main" xmlns:p="http://schemas.openxmlformats.org/presentationml/2006/main" xmlns:r="http://schemas.openxmlformats.org/officeDocument/2006/relationships">
-  <p:cSld>
-    <p:spTree>
-      <p:nvGrpSpPr>
-        <p:cNvPr id="1" name=""/>
-        <p:cNvGrpSpPr/>
-        <p:nvPr/>
-      </p:nvGrpSpPr>
-      <p:grpSpPr/>
-      <p:sp>
-        <p:nvSpPr>
-          <p:cNvPr id="2" name="Rectangle 1"/>
-          <p:cNvSpPr/>
-          <p:nvPr/>
-        </p:nvSpPr>
-        <p:spPr>
-          <a:xfrm>
-            <a:off x="0" y="0"/>
-            <a:ext cx="12191695" cy="6858000"/>
-          </a:xfrm>
-          <a:prstGeom prst="rect">
-            <a:avLst/>
-          </a:prstGeom>
-          <a:solidFill>
-            <a:srgbClr val="080D0D"/>
-          </a:solidFill>
-          <a:ln>
-            <a:noFill/>
-          </a:ln>
-        </p:spPr>
-        <p:style>
-          <a:lnRef idx="1">
-            <a:schemeClr val="accent1"/>
-          </a:lnRef>
-          <a:fillRef idx="3">
-            <a:schemeClr val="accent1"/>
-          </a:fillRef>
-          <a:effectRef idx="2">
-            <a:schemeClr val="accent1"/>
-          </a:effectRef>
-          <a:fontRef idx="minor">
-            <a:schemeClr val="lt1"/>
-          </a:fontRef>
-        </p:style>
-        <p:txBody>
-          <a:bodyPr rtlCol="0" anchor="ctr"/>
-          <a:lstStyle/>
-          <a:p>
-            <a:pPr algn="ctr"/>
-          </a:p>
-        </p:txBody>
-      </p:sp>
-      <p:sp>
-        <p:nvSpPr>
-          <p:cNvPr id="3" name="Rectangle 2"/>
-          <p:cNvSpPr/>
-          <p:nvPr/>
-        </p:nvSpPr>
-        <p:spPr>
-          <a:xfrm>
-            <a:off x="320040" y="384048"/>
-            <a:ext cx="36576" cy="6080760"/>
-          </a:xfrm>
-          <a:prstGeom prst="rect">
-            <a:avLst/>
-          </a:prstGeom>
-          <a:solidFill>
-            <a:srgbClr val="48BF8F"/>
-          </a:solidFill>
-          <a:ln>
-            <a:noFill/>
-          </a:ln>
-        </p:spPr>
-        <p:style>
-          <a:lnRef idx="1">
-            <a:schemeClr val="accent1"/>
-          </a:lnRef>
-          <a:fillRef idx="3">
-            <a:schemeClr val="accent1"/>
-          </a:fillRef>
-          <a:effectRef idx="2">
-            <a:schemeClr val="accent1"/>
-          </a:effectRef>
-          <a:fontRef idx="minor">
-            <a:schemeClr val="lt1"/>
-          </a:fontRef>
-        </p:style>
-        <p:txBody>
-          <a:bodyPr rtlCol="0" anchor="ctr"/>
-          <a:lstStyle/>
-          <a:p>
-            <a:pPr algn="ctr"/>
-          </a:p>
-        </p:txBody>
-      </p:sp>
-      <p:sp>
-        <p:nvSpPr>
-          <p:cNvPr id="4" name="Rectangle 3"/>
-          <p:cNvSpPr/>
-          <p:nvPr/>
-        </p:nvSpPr>
-        <p:spPr>
-          <a:xfrm>
-            <a:off x="11716207" y="384048"/>
-            <a:ext cx="36576" cy="6080760"/>
-          </a:xfrm>
-          <a:prstGeom prst="rect">
-            <a:avLst/>
-          </a:prstGeom>
-          <a:solidFill>
-            <a:srgbClr val="48BF8F"/>
-          </a:solidFill>
-          <a:ln>
-            <a:noFill/>
-          </a:ln>
-        </p:spPr>
-        <p:style>
-          <a:lnRef idx="1">
-            <a:schemeClr val="accent1"/>
-          </a:lnRef>
-          <a:fillRef idx="3">
-            <a:schemeClr val="accent1"/>
-          </a:fillRef>
-          <a:effectRef idx="2">
-            <a:schemeClr val="accent1"/>
-          </a:effectRef>
-          <a:fontRef idx="minor">
-            <a:schemeClr val="lt1"/>
-          </a:fontRef>
-        </p:style>
-        <p:txBody>
-          <a:bodyPr rtlCol="0" anchor="ctr"/>
-          <a:lstStyle/>
-          <a:p>
-            <a:pPr algn="ctr"/>
-          </a:p>
-        </p:txBody>
-      </p:sp>
-      <p:sp>
-        <p:nvSpPr>
-          <p:cNvPr id="5" name="Rectangle 4"/>
-          <p:cNvSpPr/>
-          <p:nvPr/>
-        </p:nvSpPr>
-        <p:spPr>
-          <a:xfrm>
-            <a:off x="502920" y="384048"/>
-            <a:ext cx="11155680" cy="27432"/>
-          </a:xfrm>
-          <a:prstGeom prst="rect">
-            <a:avLst/>
-          </a:prstGeom>
-          <a:solidFill>
-            <a:srgbClr val="48BF8F"/>
-          </a:solidFill>
-          <a:ln>
-            <a:noFill/>
-          </a:ln>
-        </p:spPr>
-        <p:style>
-          <a:lnRef idx="1">
-            <a:schemeClr val="accent1"/>
-          </a:lnRef>
-          <a:fillRef idx="3">
-            <a:schemeClr val="accent1"/>
-          </a:fillRef>
-          <a:effectRef idx="2">
-            <a:schemeClr val="accent1"/>
-          </a:effectRef>
-          <a:fontRef idx="minor">
-            <a:schemeClr val="lt1"/>
-          </a:fontRef>
-        </p:style>
-        <p:txBody>
-          <a:bodyPr rtlCol="0" anchor="ctr"/>
-          <a:lstStyle/>
-          <a:p>
-            <a:pPr algn="ctr"/>
-          </a:p>
-        </p:txBody>
-      </p:sp>
-      <p:sp>
-        <p:nvSpPr>
-          <p:cNvPr id="6" name="Rectangle 5"/>
-          <p:cNvSpPr/>
-          <p:nvPr/>
-        </p:nvSpPr>
-        <p:spPr>
-          <a:xfrm>
-            <a:off x="502920" y="6437376"/>
-            <a:ext cx="11155680" cy="27432"/>
-          </a:xfrm>
-          <a:prstGeom prst="rect">
-            <a:avLst/>
-          </a:prstGeom>
-          <a:solidFill>
-            <a:srgbClr val="48BF8F"/>
-          </a:solidFill>
-          <a:ln>
-            <a:noFill/>
-          </a:ln>
-        </p:spPr>
-        <p:style>
-          <a:lnRef idx="1">
-            <a:schemeClr val="accent1"/>
-          </a:lnRef>
-          <a:fillRef idx="3">
-            <a:schemeClr val="accent1"/>
-          </a:fillRef>
-          <a:effectRef idx="2">
-            <a:schemeClr val="accent1"/>
-          </a:effectRef>
-          <a:fontRef idx="minor">
-            <a:schemeClr val="lt1"/>
-          </a:fontRef>
-        </p:style>
-        <p:txBody>
-          <a:bodyPr rtlCol="0" anchor="ctr"/>
-          <a:lstStyle/>
-          <a:p>
-            <a:pPr algn="ctr"/>
-          </a:p>
-        </p:txBody>
-      </p:sp>
-      <p:sp>
-        <p:nvSpPr>
-          <p:cNvPr id="7" name="TextBox 6"/>
-          <p:cNvSpPr txBox="1"/>
-          <p:nvPr/>
-        </p:nvSpPr>
-        <p:spPr>
-          <a:xfrm>
-            <a:off x="713232" y="548640"/>
-            <a:ext cx="10698480" cy="301752"/>
-          </a:xfrm>
-          <a:prstGeom prst="rect">
-            <a:avLst/>
-          </a:prstGeom>
-          <a:noFill/>
-        </p:spPr>
-        <p:txBody>
-          <a:bodyPr wrap="square" anchor="t">
-            <a:spAutoFit/>
-          </a:bodyPr>
-          <a:lstStyle/>
-          <a:p>
-            <a:pPr algn="l"/>
-            <a:r>
-              <a:rPr sz="1000" b="1">
-                <a:solidFill>
-                  <a:srgbClr val="48BF8F"/>
-                </a:solidFill>
-                <a:latin typeface="Aptos"/>
-              </a:rPr>
-              <a:t>COMPLETE TRACKED FILE TREE, NO TRACKED FILE OMITTED</a:t>
-            </a:r>
-          </a:p>
-        </p:txBody>
-      </p:sp>
-      <p:sp>
-        <p:nvSpPr>
-          <p:cNvPr id="8" name="TextBox 7"/>
-          <p:cNvSpPr txBox="1"/>
-          <p:nvPr/>
-        </p:nvSpPr>
-        <p:spPr>
-          <a:xfrm>
-            <a:off x="694944" y="850392"/>
-            <a:ext cx="10881360" cy="566928"/>
-          </a:xfrm>
-          <a:prstGeom prst="rect">
-            <a:avLst/>
-          </a:prstGeom>
-          <a:noFill/>
-        </p:spPr>
-        <p:txBody>
-          <a:bodyPr wrap="square" anchor="t">
-            <a:spAutoFit/>
-          </a:bodyPr>
-          <a:lstStyle/>
-          <a:p>
-            <a:pPr algn="l"/>
-            <a:r>
-              <a:rPr sz="2700" b="0">
-                <a:solidFill>
-                  <a:srgbClr val="E8E8DE"/>
-                </a:solidFill>
-                <a:latin typeface="Aptos Display"/>
-              </a:rPr>
-              <a:t>Tracked File Tree Appendix 1/27</a:t>
-            </a:r>
-          </a:p>
-        </p:txBody>
-      </p:sp>
-      <p:sp>
-        <p:nvSpPr>
-          <p:cNvPr id="9" name="TextBox 8"/>
-          <p:cNvSpPr txBox="1"/>
-          <p:nvPr/>
-        </p:nvSpPr>
-        <p:spPr>
-          <a:xfrm>
-            <a:off x="658368" y="1426464"/>
-            <a:ext cx="10927080" cy="4956048"/>
-          </a:xfrm>
-          <a:prstGeom prst="rect">
-            <a:avLst/>
-          </a:prstGeom>
-          <a:noFill/>
-        </p:spPr>
-        <p:txBody>
-          <a:bodyPr wrap="square" anchor="t">
-            <a:spAutoFit/>
-          </a:bodyPr>
-          <a:lstStyle/>
-          <a:p>
-            <a:pPr algn="l"/>
-            <a:r>
               <a:rPr sz="700" b="0">
                 <a:solidFill>
                   <a:srgbClr val="E8E8DE"/>
                 </a:solidFill>
                 <a:latin typeface="Cascadia Mono"/>
               </a:rPr>
-              <a:t>Tlamatini/
-|-- .gitignore
-|-- _acpx_pipeline_demo_report.md
-|-- ACPX.md
-|-- agents_descriptions.md
-|-- BookOfTlamatini.md
-|-- build.py
-|-- build_installer.py
-|-- build_uninstaller.py
-|-- Claude-Desktop-KALI-MCP-Session.md
-|-- CLAUDE.md
-|-- CreateShortcut.json
-|-- CreateShortcut.ps1
-|-- eslint.config.mjs
-|-- example_of_prompt_to_make_de-compresser_agent.txt
-|-- install.py
-|-- KIMI.md
-|-- LICENSE
-|-- OllamaPricing.png
-|-- package.json
-|-- PIVOT_CHANGES.md
-|-- pnpm-lock.yaml
-|-- prompt_example_2_create_agent.txt
-|-- README.md
-|-- regen_secrets.py
-|-- register_flw.ps1
-|-- RemoveShortcut.ps1
-|-- requirements.txt
-|-- Tlamatini-Kali-Setup.md
-|-- Tlamatini.ico
-|-- Tlamatini.jpg</a:t>
-            </a:r>
-          </a:p>
-        </p:txBody>
-      </p:sp>
-    </p:spTree>
-  </p:cSld>
-  <p:clrMapOvr>
-    <a:masterClrMapping/>
-  </p:clrMapOvr>
-</p:sld>
-</file>
-
-<file path=ppt/slides/slide61.xml><?xml version="1.0" encoding="utf-8"?>
-<p:sld xmlns:a="http://schemas.openxmlformats.org/drawingml/2006/main" xmlns:p="http://schemas.openxmlformats.org/presentationml/2006/main" xmlns:r="http://schemas.openxmlformats.org/officeDocument/2006/relationships">
-  <p:cSld>
-    <p:spTree>
-      <p:nvGrpSpPr>
-        <p:cNvPr id="1" name=""/>
-        <p:cNvGrpSpPr/>
-        <p:nvPr/>
-      </p:nvGrpSpPr>
-      <p:grpSpPr/>
-      <p:sp>
-        <p:nvSpPr>
-          <p:cNvPr id="2" name="Rectangle 1"/>
-          <p:cNvSpPr/>
-          <p:nvPr/>
-        </p:nvSpPr>
-        <p:spPr>
-          <a:xfrm>
-            <a:off x="0" y="0"/>
-            <a:ext cx="12191695" cy="6858000"/>
-          </a:xfrm>
-          <a:prstGeom prst="rect">
-            <a:avLst/>
-          </a:prstGeom>
-          <a:solidFill>
-            <a:srgbClr val="080D0D"/>
-          </a:solidFill>
-          <a:ln>
-            <a:noFill/>
-          </a:ln>
-        </p:spPr>
-        <p:style>
-          <a:lnRef idx="1">
-            <a:schemeClr val="accent1"/>
-          </a:lnRef>
-          <a:fillRef idx="3">
-            <a:schemeClr val="accent1"/>
-          </a:fillRef>
-          <a:effectRef idx="2">
-            <a:schemeClr val="accent1"/>
-          </a:effectRef>
-          <a:fontRef idx="minor">
-            <a:schemeClr val="lt1"/>
-          </a:fontRef>
-        </p:style>
-        <p:txBody>
-          <a:bodyPr rtlCol="0" anchor="ctr"/>
-          <a:lstStyle/>
-          <a:p>
-            <a:pPr algn="ctr"/>
-          </a:p>
-        </p:txBody>
-      </p:sp>
-      <p:sp>
-        <p:nvSpPr>
-          <p:cNvPr id="3" name="Rectangle 2"/>
-          <p:cNvSpPr/>
-          <p:nvPr/>
-        </p:nvSpPr>
-        <p:spPr>
-          <a:xfrm>
-            <a:off x="320040" y="384048"/>
-            <a:ext cx="36576" cy="6080760"/>
-          </a:xfrm>
-          <a:prstGeom prst="rect">
-            <a:avLst/>
-          </a:prstGeom>
-          <a:solidFill>
-            <a:srgbClr val="C48052"/>
-          </a:solidFill>
-          <a:ln>
-            <a:noFill/>
-          </a:ln>
-        </p:spPr>
-        <p:style>
-          <a:lnRef idx="1">
-            <a:schemeClr val="accent1"/>
-          </a:lnRef>
-          <a:fillRef idx="3">
-            <a:schemeClr val="accent1"/>
-          </a:fillRef>
-          <a:effectRef idx="2">
-            <a:schemeClr val="accent1"/>
-          </a:effectRef>
-          <a:fontRef idx="minor">
-            <a:schemeClr val="lt1"/>
-          </a:fontRef>
-        </p:style>
-        <p:txBody>
-          <a:bodyPr rtlCol="0" anchor="ctr"/>
-          <a:lstStyle/>
-          <a:p>
-            <a:pPr algn="ctr"/>
-          </a:p>
-        </p:txBody>
-      </p:sp>
-      <p:sp>
-        <p:nvSpPr>
-          <p:cNvPr id="4" name="Rectangle 3"/>
-          <p:cNvSpPr/>
-          <p:nvPr/>
-        </p:nvSpPr>
-        <p:spPr>
-          <a:xfrm>
-            <a:off x="11716207" y="384048"/>
-            <a:ext cx="36576" cy="6080760"/>
-          </a:xfrm>
-          <a:prstGeom prst="rect">
-            <a:avLst/>
-          </a:prstGeom>
-          <a:solidFill>
-            <a:srgbClr val="C48052"/>
-          </a:solidFill>
-          <a:ln>
-            <a:noFill/>
-          </a:ln>
-        </p:spPr>
-        <p:style>
-          <a:lnRef idx="1">
-            <a:schemeClr val="accent1"/>
-          </a:lnRef>
-          <a:fillRef idx="3">
-            <a:schemeClr val="accent1"/>
-          </a:fillRef>
-          <a:effectRef idx="2">
-            <a:schemeClr val="accent1"/>
-          </a:effectRef>
-          <a:fontRef idx="minor">
-            <a:schemeClr val="lt1"/>
-          </a:fontRef>
-        </p:style>
-        <p:txBody>
-          <a:bodyPr rtlCol="0" anchor="ctr"/>
-          <a:lstStyle/>
-          <a:p>
-            <a:pPr algn="ctr"/>
-          </a:p>
-        </p:txBody>
-      </p:sp>
-      <p:sp>
-        <p:nvSpPr>
-          <p:cNvPr id="5" name="Rectangle 4"/>
-          <p:cNvSpPr/>
-          <p:nvPr/>
-        </p:nvSpPr>
-        <p:spPr>
-          <a:xfrm>
-            <a:off x="502920" y="384048"/>
-            <a:ext cx="11155680" cy="27432"/>
-          </a:xfrm>
-          <a:prstGeom prst="rect">
-            <a:avLst/>
-          </a:prstGeom>
-          <a:solidFill>
-            <a:srgbClr val="C48052"/>
-          </a:solidFill>
-          <a:ln>
-            <a:noFill/>
-          </a:ln>
-        </p:spPr>
-        <p:style>
-          <a:lnRef idx="1">
-            <a:schemeClr val="accent1"/>
-          </a:lnRef>
-          <a:fillRef idx="3">
-            <a:schemeClr val="accent1"/>
-          </a:fillRef>
-          <a:effectRef idx="2">
-            <a:schemeClr val="accent1"/>
-          </a:effectRef>
-          <a:fontRef idx="minor">
-            <a:schemeClr val="lt1"/>
-          </a:fontRef>
-        </p:style>
-        <p:txBody>
-          <a:bodyPr rtlCol="0" anchor="ctr"/>
-          <a:lstStyle/>
-          <a:p>
-            <a:pPr algn="ctr"/>
-          </a:p>
-        </p:txBody>
-      </p:sp>
-      <p:sp>
-        <p:nvSpPr>
-          <p:cNvPr id="6" name="Rectangle 5"/>
-          <p:cNvSpPr/>
-          <p:nvPr/>
-        </p:nvSpPr>
-        <p:spPr>
-          <a:xfrm>
-            <a:off x="502920" y="6437376"/>
-            <a:ext cx="11155680" cy="27432"/>
-          </a:xfrm>
-          <a:prstGeom prst="rect">
-            <a:avLst/>
-          </a:prstGeom>
-          <a:solidFill>
-            <a:srgbClr val="C48052"/>
-          </a:solidFill>
-          <a:ln>
-            <a:noFill/>
-          </a:ln>
-        </p:spPr>
-        <p:style>
-          <a:lnRef idx="1">
-            <a:schemeClr val="accent1"/>
-          </a:lnRef>
-          <a:fillRef idx="3">
-            <a:schemeClr val="accent1"/>
-          </a:fillRef>
-          <a:effectRef idx="2">
-            <a:schemeClr val="accent1"/>
-          </a:effectRef>
-          <a:fontRef idx="minor">
-            <a:schemeClr val="lt1"/>
-          </a:fontRef>
-        </p:style>
-        <p:txBody>
-          <a:bodyPr rtlCol="0" anchor="ctr"/>
-          <a:lstStyle/>
-          <a:p>
-            <a:pPr algn="ctr"/>
-          </a:p>
-        </p:txBody>
-      </p:sp>
-      <p:sp>
-        <p:nvSpPr>
-          <p:cNvPr id="7" name="TextBox 6"/>
-          <p:cNvSpPr txBox="1"/>
-          <p:nvPr/>
-        </p:nvSpPr>
-        <p:spPr>
-          <a:xfrm>
-            <a:off x="713232" y="548640"/>
-            <a:ext cx="10698480" cy="301752"/>
-          </a:xfrm>
-          <a:prstGeom prst="rect">
-            <a:avLst/>
-          </a:prstGeom>
-          <a:noFill/>
-        </p:spPr>
-        <p:txBody>
-          <a:bodyPr wrap="square" anchor="t">
-            <a:spAutoFit/>
-          </a:bodyPr>
-          <a:lstStyle/>
-          <a:p>
-            <a:pPr algn="l"/>
-            <a:r>
-              <a:rPr sz="1000" b="1">
-                <a:solidFill>
-                  <a:srgbClr val="C48052"/>
-                </a:solidFill>
-                <a:latin typeface="Aptos"/>
-              </a:rPr>
-              <a:t>COMPLETE TRACKED FILE TREE, NO TRACKED FILE OMITTED</a:t>
-            </a:r>
-          </a:p>
-        </p:txBody>
-      </p:sp>
-      <p:sp>
-        <p:nvSpPr>
-          <p:cNvPr id="8" name="TextBox 7"/>
-          <p:cNvSpPr txBox="1"/>
-          <p:nvPr/>
-        </p:nvSpPr>
-        <p:spPr>
-          <a:xfrm>
-            <a:off x="694944" y="850392"/>
-            <a:ext cx="10881360" cy="566928"/>
-          </a:xfrm>
-          <a:prstGeom prst="rect">
-            <a:avLst/>
-          </a:prstGeom>
-          <a:noFill/>
-        </p:spPr>
-        <p:txBody>
-          <a:bodyPr wrap="square" anchor="t">
-            <a:spAutoFit/>
-          </a:bodyPr>
-          <a:lstStyle/>
-          <a:p>
-            <a:pPr algn="l"/>
-            <a:r>
-              <a:rPr sz="2700" b="0">
-                <a:solidFill>
-                  <a:srgbClr val="E8E8DE"/>
-                </a:solidFill>
-                <a:latin typeface="Aptos Display"/>
-              </a:rPr>
-              <a:t>Tracked File Tree Appendix 2/27</a:t>
-            </a:r>
-          </a:p>
-        </p:txBody>
-      </p:sp>
-      <p:sp>
-        <p:nvSpPr>
-          <p:cNvPr id="9" name="TextBox 8"/>
-          <p:cNvSpPr txBox="1"/>
-          <p:nvPr/>
-        </p:nvSpPr>
-        <p:spPr>
-          <a:xfrm>
-            <a:off x="658368" y="1426464"/>
-            <a:ext cx="10927080" cy="4956048"/>
-          </a:xfrm>
-          <a:prstGeom prst="rect">
-            <a:avLst/>
-          </a:prstGeom>
-          <a:noFill/>
-        </p:spPr>
-        <p:txBody>
-          <a:bodyPr wrap="square" anchor="t">
-            <a:spAutoFit/>
-          </a:bodyPr>
-          <a:lstStyle/>
-          <a:p>
-            <a:pPr algn="l"/>
-            <a:r>
-              <a:rPr sz="700" b="0">
-                <a:solidFill>
-                  <a:srgbClr val="E8E8DE"/>
-                </a:solidFill>
-                <a:latin typeface="Cascadia Mono"/>
-              </a:rPr>
-              <a:t>|-- Tlamatini.ps1
+              <a:t>|-- Tlamatini.ico
+|-- Tlamatini.jpg
+|-- Tlamatini.ps1
 |-- tlamatini_app_summary.pdf
 |-- Tlamatini_eXtended_Artificial_Intelligence_Humanly_Tempered.pptx
+|-- TLAMATINI_MCP.md
+|-- tlamatini_mcp_server.py
 |-- uninstall.py
 |-- unregister_flw.ps1
 |-- VERSIONING.md
@@ -43229,11 +41070,7 @@
 |   |   |-- MEMORY.md
 |   |   |-- project_acpx_oneshot_prompt.md
 |   |   |-- project_acpx_skills_menu.md
-|   |   |-- project_acpx_toggle_skills.md
-|   |   |-- project_acpxer_added.md
-|   |   |-- project_arduiner_agent.md
-|   |   |-- project_ask_execs_feature.md
-|   |   |-- project_audioplayer_agent.md</a:t>
+|   |   |-- project_acpx_toggle_skills.md</a:t>
             </a:r>
           </a:p>
         </p:txBody>
@@ -43246,7 +41083,7 @@
 </p:sld>
 </file>
 
-<file path=ppt/slides/slide62.xml><?xml version="1.0" encoding="utf-8"?>
+<file path=ppt/slides/slide6.xml><?xml version="1.0" encoding="utf-8"?>
 <p:sld xmlns:a="http://schemas.openxmlformats.org/drawingml/2006/main" xmlns:p="http://schemas.openxmlformats.org/presentationml/2006/main" xmlns:r="http://schemas.openxmlformats.org/officeDocument/2006/relationships">
   <p:cSld>
     <p:spTree>
@@ -43501,7 +41338,7 @@
                 </a:solidFill>
                 <a:latin typeface="Aptos"/>
               </a:rPr>
-              <a:t>COMPLETE TRACKED FILE TREE, NO TRACKED FILE OMITTED</a:t>
+              <a:t>EXECUTION PIPELINE</a:t>
             </a:r>
           </a:p>
         </p:txBody>
@@ -43536,21 +41373,66 @@
                 </a:solidFill>
                 <a:latin typeface="Aptos Display"/>
               </a:rPr>
-              <a:t>Tracked File Tree Appendix 3/27</a:t>
-            </a:r>
-          </a:p>
-        </p:txBody>
-      </p:sp>
-      <p:sp>
-        <p:nvSpPr>
-          <p:cNvPr id="9" name="TextBox 8"/>
+              <a:t>How It Works</a:t>
+            </a:r>
+          </a:p>
+        </p:txBody>
+      </p:sp>
+      <p:sp>
+        <p:nvSpPr>
+          <p:cNvPr id="9" name="Rounded Rectangle 8"/>
+          <p:cNvSpPr/>
+          <p:nvPr/>
+        </p:nvSpPr>
+        <p:spPr>
+          <a:xfrm>
+            <a:off x="868680" y="2377440"/>
+            <a:ext cx="1591056" cy="685800"/>
+          </a:xfrm>
+          <a:prstGeom prst="roundRect">
+            <a:avLst/>
+          </a:prstGeom>
+          <a:solidFill>
+            <a:srgbClr val="202322"/>
+          </a:solidFill>
+          <a:ln>
+            <a:solidFill>
+              <a:srgbClr val="48BF8F"/>
+            </a:solidFill>
+          </a:ln>
+        </p:spPr>
+        <p:style>
+          <a:lnRef idx="1">
+            <a:schemeClr val="accent1"/>
+          </a:lnRef>
+          <a:fillRef idx="3">
+            <a:schemeClr val="accent1"/>
+          </a:fillRef>
+          <a:effectRef idx="2">
+            <a:schemeClr val="accent1"/>
+          </a:effectRef>
+          <a:fontRef idx="minor">
+            <a:schemeClr val="lt1"/>
+          </a:fontRef>
+        </p:style>
+        <p:txBody>
+          <a:bodyPr rtlCol="0" anchor="ctr"/>
+          <a:lstStyle/>
+          <a:p>
+            <a:pPr algn="ctr"/>
+          </a:p>
+        </p:txBody>
+      </p:sp>
+      <p:sp>
+        <p:nvSpPr>
+          <p:cNvPr id="10" name="TextBox 9"/>
           <p:cNvSpPr txBox="1"/>
           <p:nvPr/>
         </p:nvSpPr>
         <p:spPr>
           <a:xfrm>
-            <a:off x="658368" y="1426464"/>
-            <a:ext cx="10927080" cy="4956048"/>
+            <a:off x="941832" y="2542032"/>
+            <a:ext cx="1444752" cy="256032"/>
           </a:xfrm>
           <a:prstGeom prst="rect">
             <a:avLst/>
@@ -43563,6 +41445,1097 @@
           </a:bodyPr>
           <a:lstStyle/>
           <a:p>
+            <a:pPr algn="ctr"/>
+            <a:r>
+              <a:rPr sz="1000" b="1">
+                <a:solidFill>
+                  <a:srgbClr val="E8E8DE"/>
+                </a:solidFill>
+                <a:latin typeface="Aptos"/>
+              </a:rPr>
+              <a:t>Browser</a:t>
+            </a:r>
+          </a:p>
+        </p:txBody>
+      </p:sp>
+      <p:sp>
+        <p:nvSpPr>
+          <p:cNvPr id="11" name="TextBox 10"/>
+          <p:cNvSpPr txBox="1"/>
+          <p:nvPr/>
+        </p:nvSpPr>
+        <p:spPr>
+          <a:xfrm>
+            <a:off x="2459736" y="2551176"/>
+            <a:ext cx="246888" cy="182880"/>
+          </a:xfrm>
+          <a:prstGeom prst="rect">
+            <a:avLst/>
+          </a:prstGeom>
+          <a:noFill/>
+        </p:spPr>
+        <p:txBody>
+          <a:bodyPr wrap="square" anchor="t">
+            <a:spAutoFit/>
+          </a:bodyPr>
+          <a:lstStyle/>
+          <a:p>
+            <a:pPr algn="ctr"/>
+            <a:r>
+              <a:rPr sz="1200" b="1">
+                <a:solidFill>
+                  <a:srgbClr val="48BF8F"/>
+                </a:solidFill>
+                <a:latin typeface="Aptos"/>
+              </a:rPr>
+              <a:t>&gt;</a:t>
+            </a:r>
+          </a:p>
+        </p:txBody>
+      </p:sp>
+      <p:sp>
+        <p:nvSpPr>
+          <p:cNvPr id="12" name="Rounded Rectangle 11"/>
+          <p:cNvSpPr/>
+          <p:nvPr/>
+        </p:nvSpPr>
+        <p:spPr>
+          <a:xfrm>
+            <a:off x="2706624" y="2377440"/>
+            <a:ext cx="1591056" cy="685800"/>
+          </a:xfrm>
+          <a:prstGeom prst="roundRect">
+            <a:avLst/>
+          </a:prstGeom>
+          <a:solidFill>
+            <a:srgbClr val="202322"/>
+          </a:solidFill>
+          <a:ln>
+            <a:solidFill>
+              <a:srgbClr val="48BF8F"/>
+            </a:solidFill>
+          </a:ln>
+        </p:spPr>
+        <p:style>
+          <a:lnRef idx="1">
+            <a:schemeClr val="accent1"/>
+          </a:lnRef>
+          <a:fillRef idx="3">
+            <a:schemeClr val="accent1"/>
+          </a:fillRef>
+          <a:effectRef idx="2">
+            <a:schemeClr val="accent1"/>
+          </a:effectRef>
+          <a:fontRef idx="minor">
+            <a:schemeClr val="lt1"/>
+          </a:fontRef>
+        </p:style>
+        <p:txBody>
+          <a:bodyPr rtlCol="0" anchor="ctr"/>
+          <a:lstStyle/>
+          <a:p>
+            <a:pPr algn="ctr"/>
+          </a:p>
+        </p:txBody>
+      </p:sp>
+      <p:sp>
+        <p:nvSpPr>
+          <p:cNvPr id="13" name="TextBox 12"/>
+          <p:cNvSpPr txBox="1"/>
+          <p:nvPr/>
+        </p:nvSpPr>
+        <p:spPr>
+          <a:xfrm>
+            <a:off x="2779776" y="2542032"/>
+            <a:ext cx="1444752" cy="256032"/>
+          </a:xfrm>
+          <a:prstGeom prst="rect">
+            <a:avLst/>
+          </a:prstGeom>
+          <a:noFill/>
+        </p:spPr>
+        <p:txBody>
+          <a:bodyPr wrap="square" anchor="t">
+            <a:spAutoFit/>
+          </a:bodyPr>
+          <a:lstStyle/>
+          <a:p>
+            <a:pPr algn="ctr"/>
+            <a:r>
+              <a:rPr sz="1000" b="1">
+                <a:solidFill>
+                  <a:srgbClr val="E8E8DE"/>
+                </a:solidFill>
+                <a:latin typeface="Aptos"/>
+              </a:rPr>
+              <a:t>Channels</a:t>
+            </a:r>
+          </a:p>
+        </p:txBody>
+      </p:sp>
+      <p:sp>
+        <p:nvSpPr>
+          <p:cNvPr id="14" name="TextBox 13"/>
+          <p:cNvSpPr txBox="1"/>
+          <p:nvPr/>
+        </p:nvSpPr>
+        <p:spPr>
+          <a:xfrm>
+            <a:off x="4297680" y="2551176"/>
+            <a:ext cx="246888" cy="182880"/>
+          </a:xfrm>
+          <a:prstGeom prst="rect">
+            <a:avLst/>
+          </a:prstGeom>
+          <a:noFill/>
+        </p:spPr>
+        <p:txBody>
+          <a:bodyPr wrap="square" anchor="t">
+            <a:spAutoFit/>
+          </a:bodyPr>
+          <a:lstStyle/>
+          <a:p>
+            <a:pPr algn="ctr"/>
+            <a:r>
+              <a:rPr sz="1200" b="1">
+                <a:solidFill>
+                  <a:srgbClr val="48BF8F"/>
+                </a:solidFill>
+                <a:latin typeface="Aptos"/>
+              </a:rPr>
+              <a:t>&gt;</a:t>
+            </a:r>
+          </a:p>
+        </p:txBody>
+      </p:sp>
+      <p:sp>
+        <p:nvSpPr>
+          <p:cNvPr id="15" name="Rounded Rectangle 14"/>
+          <p:cNvSpPr/>
+          <p:nvPr/>
+        </p:nvSpPr>
+        <p:spPr>
+          <a:xfrm>
+            <a:off x="4544568" y="2377440"/>
+            <a:ext cx="1591056" cy="685800"/>
+          </a:xfrm>
+          <a:prstGeom prst="roundRect">
+            <a:avLst/>
+          </a:prstGeom>
+          <a:solidFill>
+            <a:srgbClr val="202322"/>
+          </a:solidFill>
+          <a:ln>
+            <a:solidFill>
+              <a:srgbClr val="48BF8F"/>
+            </a:solidFill>
+          </a:ln>
+        </p:spPr>
+        <p:style>
+          <a:lnRef idx="1">
+            <a:schemeClr val="accent1"/>
+          </a:lnRef>
+          <a:fillRef idx="3">
+            <a:schemeClr val="accent1"/>
+          </a:fillRef>
+          <a:effectRef idx="2">
+            <a:schemeClr val="accent1"/>
+          </a:effectRef>
+          <a:fontRef idx="minor">
+            <a:schemeClr val="lt1"/>
+          </a:fontRef>
+        </p:style>
+        <p:txBody>
+          <a:bodyPr rtlCol="0" anchor="ctr"/>
+          <a:lstStyle/>
+          <a:p>
+            <a:pPr algn="ctr"/>
+          </a:p>
+        </p:txBody>
+      </p:sp>
+      <p:sp>
+        <p:nvSpPr>
+          <p:cNvPr id="16" name="TextBox 15"/>
+          <p:cNvSpPr txBox="1"/>
+          <p:nvPr/>
+        </p:nvSpPr>
+        <p:spPr>
+          <a:xfrm>
+            <a:off x="4617720" y="2542032"/>
+            <a:ext cx="1444752" cy="256032"/>
+          </a:xfrm>
+          <a:prstGeom prst="rect">
+            <a:avLst/>
+          </a:prstGeom>
+          <a:noFill/>
+        </p:spPr>
+        <p:txBody>
+          <a:bodyPr wrap="square" anchor="t">
+            <a:spAutoFit/>
+          </a:bodyPr>
+          <a:lstStyle/>
+          <a:p>
+            <a:pPr algn="ctr"/>
+            <a:r>
+              <a:rPr sz="1000" b="1">
+                <a:solidFill>
+                  <a:srgbClr val="E8E8DE"/>
+                </a:solidFill>
+                <a:latin typeface="Aptos"/>
+              </a:rPr>
+              <a:t>RAG</a:t>
+            </a:r>
+          </a:p>
+        </p:txBody>
+      </p:sp>
+      <p:sp>
+        <p:nvSpPr>
+          <p:cNvPr id="17" name="TextBox 16"/>
+          <p:cNvSpPr txBox="1"/>
+          <p:nvPr/>
+        </p:nvSpPr>
+        <p:spPr>
+          <a:xfrm>
+            <a:off x="6135624" y="2551176"/>
+            <a:ext cx="246888" cy="182880"/>
+          </a:xfrm>
+          <a:prstGeom prst="rect">
+            <a:avLst/>
+          </a:prstGeom>
+          <a:noFill/>
+        </p:spPr>
+        <p:txBody>
+          <a:bodyPr wrap="square" anchor="t">
+            <a:spAutoFit/>
+          </a:bodyPr>
+          <a:lstStyle/>
+          <a:p>
+            <a:pPr algn="ctr"/>
+            <a:r>
+              <a:rPr sz="1200" b="1">
+                <a:solidFill>
+                  <a:srgbClr val="48BF8F"/>
+                </a:solidFill>
+                <a:latin typeface="Aptos"/>
+              </a:rPr>
+              <a:t>&gt;</a:t>
+            </a:r>
+          </a:p>
+        </p:txBody>
+      </p:sp>
+      <p:sp>
+        <p:nvSpPr>
+          <p:cNvPr id="18" name="Rounded Rectangle 17"/>
+          <p:cNvSpPr/>
+          <p:nvPr/>
+        </p:nvSpPr>
+        <p:spPr>
+          <a:xfrm>
+            <a:off x="6382512" y="2377440"/>
+            <a:ext cx="1591056" cy="685800"/>
+          </a:xfrm>
+          <a:prstGeom prst="roundRect">
+            <a:avLst/>
+          </a:prstGeom>
+          <a:solidFill>
+            <a:srgbClr val="202322"/>
+          </a:solidFill>
+          <a:ln>
+            <a:solidFill>
+              <a:srgbClr val="48BF8F"/>
+            </a:solidFill>
+          </a:ln>
+        </p:spPr>
+        <p:style>
+          <a:lnRef idx="1">
+            <a:schemeClr val="accent1"/>
+          </a:lnRef>
+          <a:fillRef idx="3">
+            <a:schemeClr val="accent1"/>
+          </a:fillRef>
+          <a:effectRef idx="2">
+            <a:schemeClr val="accent1"/>
+          </a:effectRef>
+          <a:fontRef idx="minor">
+            <a:schemeClr val="lt1"/>
+          </a:fontRef>
+        </p:style>
+        <p:txBody>
+          <a:bodyPr rtlCol="0" anchor="ctr"/>
+          <a:lstStyle/>
+          <a:p>
+            <a:pPr algn="ctr"/>
+          </a:p>
+        </p:txBody>
+      </p:sp>
+      <p:sp>
+        <p:nvSpPr>
+          <p:cNvPr id="19" name="TextBox 18"/>
+          <p:cNvSpPr txBox="1"/>
+          <p:nvPr/>
+        </p:nvSpPr>
+        <p:spPr>
+          <a:xfrm>
+            <a:off x="6455664" y="2542032"/>
+            <a:ext cx="1444752" cy="256032"/>
+          </a:xfrm>
+          <a:prstGeom prst="rect">
+            <a:avLst/>
+          </a:prstGeom>
+          <a:noFill/>
+        </p:spPr>
+        <p:txBody>
+          <a:bodyPr wrap="square" anchor="t">
+            <a:spAutoFit/>
+          </a:bodyPr>
+          <a:lstStyle/>
+          <a:p>
+            <a:pPr algn="ctr"/>
+            <a:r>
+              <a:rPr sz="1000" b="1">
+                <a:solidFill>
+                  <a:srgbClr val="E8E8DE"/>
+                </a:solidFill>
+                <a:latin typeface="Aptos"/>
+              </a:rPr>
+              <a:t>Planner</a:t>
+            </a:r>
+          </a:p>
+        </p:txBody>
+      </p:sp>
+      <p:sp>
+        <p:nvSpPr>
+          <p:cNvPr id="20" name="TextBox 19"/>
+          <p:cNvSpPr txBox="1"/>
+          <p:nvPr/>
+        </p:nvSpPr>
+        <p:spPr>
+          <a:xfrm>
+            <a:off x="7973567" y="2551176"/>
+            <a:ext cx="246888" cy="182880"/>
+          </a:xfrm>
+          <a:prstGeom prst="rect">
+            <a:avLst/>
+          </a:prstGeom>
+          <a:noFill/>
+        </p:spPr>
+        <p:txBody>
+          <a:bodyPr wrap="square" anchor="t">
+            <a:spAutoFit/>
+          </a:bodyPr>
+          <a:lstStyle/>
+          <a:p>
+            <a:pPr algn="ctr"/>
+            <a:r>
+              <a:rPr sz="1200" b="1">
+                <a:solidFill>
+                  <a:srgbClr val="48BF8F"/>
+                </a:solidFill>
+                <a:latin typeface="Aptos"/>
+              </a:rPr>
+              <a:t>&gt;</a:t>
+            </a:r>
+          </a:p>
+        </p:txBody>
+      </p:sp>
+      <p:sp>
+        <p:nvSpPr>
+          <p:cNvPr id="21" name="Rounded Rectangle 20"/>
+          <p:cNvSpPr/>
+          <p:nvPr/>
+        </p:nvSpPr>
+        <p:spPr>
+          <a:xfrm>
+            <a:off x="8220455" y="2377440"/>
+            <a:ext cx="1591056" cy="685800"/>
+          </a:xfrm>
+          <a:prstGeom prst="roundRect">
+            <a:avLst/>
+          </a:prstGeom>
+          <a:solidFill>
+            <a:srgbClr val="202322"/>
+          </a:solidFill>
+          <a:ln>
+            <a:solidFill>
+              <a:srgbClr val="48BF8F"/>
+            </a:solidFill>
+          </a:ln>
+        </p:spPr>
+        <p:style>
+          <a:lnRef idx="1">
+            <a:schemeClr val="accent1"/>
+          </a:lnRef>
+          <a:fillRef idx="3">
+            <a:schemeClr val="accent1"/>
+          </a:fillRef>
+          <a:effectRef idx="2">
+            <a:schemeClr val="accent1"/>
+          </a:effectRef>
+          <a:fontRef idx="minor">
+            <a:schemeClr val="lt1"/>
+          </a:fontRef>
+        </p:style>
+        <p:txBody>
+          <a:bodyPr rtlCol="0" anchor="ctr"/>
+          <a:lstStyle/>
+          <a:p>
+            <a:pPr algn="ctr"/>
+          </a:p>
+        </p:txBody>
+      </p:sp>
+      <p:sp>
+        <p:nvSpPr>
+          <p:cNvPr id="22" name="TextBox 21"/>
+          <p:cNvSpPr txBox="1"/>
+          <p:nvPr/>
+        </p:nvSpPr>
+        <p:spPr>
+          <a:xfrm>
+            <a:off x="8293607" y="2542032"/>
+            <a:ext cx="1444752" cy="256032"/>
+          </a:xfrm>
+          <a:prstGeom prst="rect">
+            <a:avLst/>
+          </a:prstGeom>
+          <a:noFill/>
+        </p:spPr>
+        <p:txBody>
+          <a:bodyPr wrap="square" anchor="t">
+            <a:spAutoFit/>
+          </a:bodyPr>
+          <a:lstStyle/>
+          <a:p>
+            <a:pPr algn="ctr"/>
+            <a:r>
+              <a:rPr sz="1000" b="1">
+                <a:solidFill>
+                  <a:srgbClr val="E8E8DE"/>
+                </a:solidFill>
+                <a:latin typeface="Aptos"/>
+              </a:rPr>
+              <a:t>Tools</a:t>
+            </a:r>
+          </a:p>
+        </p:txBody>
+      </p:sp>
+      <p:sp>
+        <p:nvSpPr>
+          <p:cNvPr id="23" name="TextBox 22"/>
+          <p:cNvSpPr txBox="1"/>
+          <p:nvPr/>
+        </p:nvSpPr>
+        <p:spPr>
+          <a:xfrm>
+            <a:off x="9811511" y="2551176"/>
+            <a:ext cx="246888" cy="182880"/>
+          </a:xfrm>
+          <a:prstGeom prst="rect">
+            <a:avLst/>
+          </a:prstGeom>
+          <a:noFill/>
+        </p:spPr>
+        <p:txBody>
+          <a:bodyPr wrap="square" anchor="t">
+            <a:spAutoFit/>
+          </a:bodyPr>
+          <a:lstStyle/>
+          <a:p>
+            <a:pPr algn="ctr"/>
+            <a:r>
+              <a:rPr sz="1200" b="1">
+                <a:solidFill>
+                  <a:srgbClr val="48BF8F"/>
+                </a:solidFill>
+                <a:latin typeface="Aptos"/>
+              </a:rPr>
+              <a:t>&gt;</a:t>
+            </a:r>
+          </a:p>
+        </p:txBody>
+      </p:sp>
+      <p:sp>
+        <p:nvSpPr>
+          <p:cNvPr id="24" name="Rounded Rectangle 23"/>
+          <p:cNvSpPr/>
+          <p:nvPr/>
+        </p:nvSpPr>
+        <p:spPr>
+          <a:xfrm>
+            <a:off x="10058399" y="2377440"/>
+            <a:ext cx="1591056" cy="685800"/>
+          </a:xfrm>
+          <a:prstGeom prst="roundRect">
+            <a:avLst/>
+          </a:prstGeom>
+          <a:solidFill>
+            <a:srgbClr val="202322"/>
+          </a:solidFill>
+          <a:ln>
+            <a:solidFill>
+              <a:srgbClr val="48BF8F"/>
+            </a:solidFill>
+          </a:ln>
+        </p:spPr>
+        <p:style>
+          <a:lnRef idx="1">
+            <a:schemeClr val="accent1"/>
+          </a:lnRef>
+          <a:fillRef idx="3">
+            <a:schemeClr val="accent1"/>
+          </a:fillRef>
+          <a:effectRef idx="2">
+            <a:schemeClr val="accent1"/>
+          </a:effectRef>
+          <a:fontRef idx="minor">
+            <a:schemeClr val="lt1"/>
+          </a:fontRef>
+        </p:style>
+        <p:txBody>
+          <a:bodyPr rtlCol="0" anchor="ctr"/>
+          <a:lstStyle/>
+          <a:p>
+            <a:pPr algn="ctr"/>
+          </a:p>
+        </p:txBody>
+      </p:sp>
+      <p:sp>
+        <p:nvSpPr>
+          <p:cNvPr id="25" name="TextBox 24"/>
+          <p:cNvSpPr txBox="1"/>
+          <p:nvPr/>
+        </p:nvSpPr>
+        <p:spPr>
+          <a:xfrm>
+            <a:off x="10131551" y="2542032"/>
+            <a:ext cx="1444752" cy="256032"/>
+          </a:xfrm>
+          <a:prstGeom prst="rect">
+            <a:avLst/>
+          </a:prstGeom>
+          <a:noFill/>
+        </p:spPr>
+        <p:txBody>
+          <a:bodyPr wrap="square" anchor="t">
+            <a:spAutoFit/>
+          </a:bodyPr>
+          <a:lstStyle/>
+          <a:p>
+            <a:pPr algn="ctr"/>
+            <a:r>
+              <a:rPr sz="1000" b="1">
+                <a:solidFill>
+                  <a:srgbClr val="E8E8DE"/>
+                </a:solidFill>
+                <a:latin typeface="Aptos"/>
+              </a:rPr>
+              <a:t>Answer</a:t>
+            </a:r>
+          </a:p>
+        </p:txBody>
+      </p:sp>
+      <p:sp>
+        <p:nvSpPr>
+          <p:cNvPr id="26" name="Rounded Rectangle 25"/>
+          <p:cNvSpPr/>
+          <p:nvPr/>
+        </p:nvSpPr>
+        <p:spPr>
+          <a:xfrm>
+            <a:off x="749808" y="3657600"/>
+            <a:ext cx="10561320" cy="2240280"/>
+          </a:xfrm>
+          <a:prstGeom prst="roundRect">
+            <a:avLst/>
+          </a:prstGeom>
+          <a:solidFill>
+            <a:srgbClr val="161A19"/>
+          </a:solidFill>
+          <a:ln>
+            <a:solidFill>
+              <a:srgbClr val="595F56"/>
+            </a:solidFill>
+          </a:ln>
+        </p:spPr>
+        <p:style>
+          <a:lnRef idx="1">
+            <a:schemeClr val="accent1"/>
+          </a:lnRef>
+          <a:fillRef idx="3">
+            <a:schemeClr val="accent1"/>
+          </a:fillRef>
+          <a:effectRef idx="2">
+            <a:schemeClr val="accent1"/>
+          </a:effectRef>
+          <a:fontRef idx="minor">
+            <a:schemeClr val="lt1"/>
+          </a:fontRef>
+        </p:style>
+        <p:txBody>
+          <a:bodyPr rtlCol="0" anchor="ctr"/>
+          <a:lstStyle/>
+          <a:p>
+            <a:pPr algn="ctr"/>
+          </a:p>
+        </p:txBody>
+      </p:sp>
+      <p:sp>
+        <p:nvSpPr>
+          <p:cNvPr id="27" name="Rectangle 26"/>
+          <p:cNvSpPr/>
+          <p:nvPr/>
+        </p:nvSpPr>
+        <p:spPr>
+          <a:xfrm>
+            <a:off x="749808" y="3657600"/>
+            <a:ext cx="10561320" cy="109728"/>
+          </a:xfrm>
+          <a:prstGeom prst="rect">
+            <a:avLst/>
+          </a:prstGeom>
+          <a:solidFill>
+            <a:srgbClr val="48BF8F"/>
+          </a:solidFill>
+          <a:ln>
+            <a:noFill/>
+          </a:ln>
+        </p:spPr>
+        <p:style>
+          <a:lnRef idx="1">
+            <a:schemeClr val="accent1"/>
+          </a:lnRef>
+          <a:fillRef idx="3">
+            <a:schemeClr val="accent1"/>
+          </a:fillRef>
+          <a:effectRef idx="2">
+            <a:schemeClr val="accent1"/>
+          </a:effectRef>
+          <a:fontRef idx="minor">
+            <a:schemeClr val="lt1"/>
+          </a:fontRef>
+        </p:style>
+        <p:txBody>
+          <a:bodyPr rtlCol="0" anchor="ctr"/>
+          <a:lstStyle/>
+          <a:p>
+            <a:pPr algn="ctr"/>
+          </a:p>
+        </p:txBody>
+      </p:sp>
+      <p:sp>
+        <p:nvSpPr>
+          <p:cNvPr id="28" name="TextBox 27"/>
+          <p:cNvSpPr txBox="1"/>
+          <p:nvPr/>
+        </p:nvSpPr>
+        <p:spPr>
+          <a:xfrm>
+            <a:off x="950976" y="3858768"/>
+            <a:ext cx="10158984" cy="310896"/>
+          </a:xfrm>
+          <a:prstGeom prst="rect">
+            <a:avLst/>
+          </a:prstGeom>
+          <a:noFill/>
+        </p:spPr>
+        <p:txBody>
+          <a:bodyPr wrap="square" anchor="t">
+            <a:spAutoFit/>
+          </a:bodyPr>
+          <a:lstStyle/>
+          <a:p>
+            <a:pPr algn="l"/>
+            <a:r>
+              <a:rPr sz="1400" b="1">
+                <a:solidFill>
+                  <a:srgbClr val="48BF8F"/>
+                </a:solidFill>
+                <a:latin typeface="Aptos"/>
+              </a:rPr>
+              <a:t>Request-to-answer flow</a:t>
+            </a:r>
+          </a:p>
+        </p:txBody>
+      </p:sp>
+      <p:sp>
+        <p:nvSpPr>
+          <p:cNvPr id="29" name="TextBox 28"/>
+          <p:cNvSpPr txBox="1"/>
+          <p:nvPr/>
+        </p:nvSpPr>
+        <p:spPr>
+          <a:xfrm>
+            <a:off x="950976" y="4315968"/>
+            <a:ext cx="10158984" cy="1435608"/>
+          </a:xfrm>
+          <a:prstGeom prst="rect">
+            <a:avLst/>
+          </a:prstGeom>
+          <a:noFill/>
+        </p:spPr>
+        <p:txBody>
+          <a:bodyPr wrap="square" anchor="t" lIns="38100" rIns="38100" tIns="25400" bIns="25400">
+            <a:normAutofit/>
+          </a:bodyPr>
+          <a:lstStyle/>
+          <a:p>
+            <a:pPr>
+              <a:spcAft>
+                <a:spcPts val="400"/>
+              </a:spcAft>
+              <a:defRPr sz="1500">
+                <a:solidFill>
+                  <a:srgbClr val="B4BAAE"/>
+                </a:solidFill>
+                <a:latin typeface="Aptos"/>
+              </a:defRPr>
+            </a:pPr>
+            <a:r>
+              <a:t>A browser request flows through Django Channels into the RAG/context layer, the Multi-Turn planner, the tool executor, and back as a synthesized answer.</a:t>
+            </a:r>
+          </a:p>
+          <a:p>
+            <a:pPr>
+              <a:spcAft>
+                <a:spcPts val="400"/>
+              </a:spcAft>
+              <a:defRPr sz="1500">
+                <a:solidFill>
+                  <a:srgbClr val="B4BAAE"/>
+                </a:solidFill>
+                <a:latin typeface="Aptos"/>
+              </a:defRPr>
+            </a:pPr>
+            <a:r>
+              <a:t>The next two pages detail the request path (intake, retrieval, permission gating) and the runtime path (planning, tool execution, agent bridges, packaging).</a:t>
+            </a:r>
+          </a:p>
+        </p:txBody>
+      </p:sp>
+    </p:spTree>
+  </p:cSld>
+  <p:clrMapOvr>
+    <a:masterClrMapping/>
+  </p:clrMapOvr>
+</p:sld>
+</file>
+
+<file path=ppt/slides/slide60.xml><?xml version="1.0" encoding="utf-8"?>
+<p:sld xmlns:a="http://schemas.openxmlformats.org/drawingml/2006/main" xmlns:p="http://schemas.openxmlformats.org/presentationml/2006/main" xmlns:r="http://schemas.openxmlformats.org/officeDocument/2006/relationships">
+  <p:cSld>
+    <p:spTree>
+      <p:nvGrpSpPr>
+        <p:cNvPr id="1" name=""/>
+        <p:cNvGrpSpPr/>
+        <p:nvPr/>
+      </p:nvGrpSpPr>
+      <p:grpSpPr/>
+      <p:sp>
+        <p:nvSpPr>
+          <p:cNvPr id="2" name="Rectangle 1"/>
+          <p:cNvSpPr/>
+          <p:nvPr/>
+        </p:nvSpPr>
+        <p:spPr>
+          <a:xfrm>
+            <a:off x="0" y="0"/>
+            <a:ext cx="12191695" cy="6858000"/>
+          </a:xfrm>
+          <a:prstGeom prst="rect">
+            <a:avLst/>
+          </a:prstGeom>
+          <a:solidFill>
+            <a:srgbClr val="080D0D"/>
+          </a:solidFill>
+          <a:ln>
+            <a:noFill/>
+          </a:ln>
+        </p:spPr>
+        <p:style>
+          <a:lnRef idx="1">
+            <a:schemeClr val="accent1"/>
+          </a:lnRef>
+          <a:fillRef idx="3">
+            <a:schemeClr val="accent1"/>
+          </a:fillRef>
+          <a:effectRef idx="2">
+            <a:schemeClr val="accent1"/>
+          </a:effectRef>
+          <a:fontRef idx="minor">
+            <a:schemeClr val="lt1"/>
+          </a:fontRef>
+        </p:style>
+        <p:txBody>
+          <a:bodyPr rtlCol="0" anchor="ctr"/>
+          <a:lstStyle/>
+          <a:p>
+            <a:pPr algn="ctr"/>
+          </a:p>
+        </p:txBody>
+      </p:sp>
+      <p:sp>
+        <p:nvSpPr>
+          <p:cNvPr id="3" name="Rectangle 2"/>
+          <p:cNvSpPr/>
+          <p:nvPr/>
+        </p:nvSpPr>
+        <p:spPr>
+          <a:xfrm>
+            <a:off x="320040" y="384048"/>
+            <a:ext cx="36576" cy="6080760"/>
+          </a:xfrm>
+          <a:prstGeom prst="rect">
+            <a:avLst/>
+          </a:prstGeom>
+          <a:solidFill>
+            <a:srgbClr val="48BF8F"/>
+          </a:solidFill>
+          <a:ln>
+            <a:noFill/>
+          </a:ln>
+        </p:spPr>
+        <p:style>
+          <a:lnRef idx="1">
+            <a:schemeClr val="accent1"/>
+          </a:lnRef>
+          <a:fillRef idx="3">
+            <a:schemeClr val="accent1"/>
+          </a:fillRef>
+          <a:effectRef idx="2">
+            <a:schemeClr val="accent1"/>
+          </a:effectRef>
+          <a:fontRef idx="minor">
+            <a:schemeClr val="lt1"/>
+          </a:fontRef>
+        </p:style>
+        <p:txBody>
+          <a:bodyPr rtlCol="0" anchor="ctr"/>
+          <a:lstStyle/>
+          <a:p>
+            <a:pPr algn="ctr"/>
+          </a:p>
+        </p:txBody>
+      </p:sp>
+      <p:sp>
+        <p:nvSpPr>
+          <p:cNvPr id="4" name="Rectangle 3"/>
+          <p:cNvSpPr/>
+          <p:nvPr/>
+        </p:nvSpPr>
+        <p:spPr>
+          <a:xfrm>
+            <a:off x="11716207" y="384048"/>
+            <a:ext cx="36576" cy="6080760"/>
+          </a:xfrm>
+          <a:prstGeom prst="rect">
+            <a:avLst/>
+          </a:prstGeom>
+          <a:solidFill>
+            <a:srgbClr val="48BF8F"/>
+          </a:solidFill>
+          <a:ln>
+            <a:noFill/>
+          </a:ln>
+        </p:spPr>
+        <p:style>
+          <a:lnRef idx="1">
+            <a:schemeClr val="accent1"/>
+          </a:lnRef>
+          <a:fillRef idx="3">
+            <a:schemeClr val="accent1"/>
+          </a:fillRef>
+          <a:effectRef idx="2">
+            <a:schemeClr val="accent1"/>
+          </a:effectRef>
+          <a:fontRef idx="minor">
+            <a:schemeClr val="lt1"/>
+          </a:fontRef>
+        </p:style>
+        <p:txBody>
+          <a:bodyPr rtlCol="0" anchor="ctr"/>
+          <a:lstStyle/>
+          <a:p>
+            <a:pPr algn="ctr"/>
+          </a:p>
+        </p:txBody>
+      </p:sp>
+      <p:sp>
+        <p:nvSpPr>
+          <p:cNvPr id="5" name="Rectangle 4"/>
+          <p:cNvSpPr/>
+          <p:nvPr/>
+        </p:nvSpPr>
+        <p:spPr>
+          <a:xfrm>
+            <a:off x="502920" y="384048"/>
+            <a:ext cx="11155680" cy="27432"/>
+          </a:xfrm>
+          <a:prstGeom prst="rect">
+            <a:avLst/>
+          </a:prstGeom>
+          <a:solidFill>
+            <a:srgbClr val="48BF8F"/>
+          </a:solidFill>
+          <a:ln>
+            <a:noFill/>
+          </a:ln>
+        </p:spPr>
+        <p:style>
+          <a:lnRef idx="1">
+            <a:schemeClr val="accent1"/>
+          </a:lnRef>
+          <a:fillRef idx="3">
+            <a:schemeClr val="accent1"/>
+          </a:fillRef>
+          <a:effectRef idx="2">
+            <a:schemeClr val="accent1"/>
+          </a:effectRef>
+          <a:fontRef idx="minor">
+            <a:schemeClr val="lt1"/>
+          </a:fontRef>
+        </p:style>
+        <p:txBody>
+          <a:bodyPr rtlCol="0" anchor="ctr"/>
+          <a:lstStyle/>
+          <a:p>
+            <a:pPr algn="ctr"/>
+          </a:p>
+        </p:txBody>
+      </p:sp>
+      <p:sp>
+        <p:nvSpPr>
+          <p:cNvPr id="6" name="Rectangle 5"/>
+          <p:cNvSpPr/>
+          <p:nvPr/>
+        </p:nvSpPr>
+        <p:spPr>
+          <a:xfrm>
+            <a:off x="502920" y="6437376"/>
+            <a:ext cx="11155680" cy="27432"/>
+          </a:xfrm>
+          <a:prstGeom prst="rect">
+            <a:avLst/>
+          </a:prstGeom>
+          <a:solidFill>
+            <a:srgbClr val="48BF8F"/>
+          </a:solidFill>
+          <a:ln>
+            <a:noFill/>
+          </a:ln>
+        </p:spPr>
+        <p:style>
+          <a:lnRef idx="1">
+            <a:schemeClr val="accent1"/>
+          </a:lnRef>
+          <a:fillRef idx="3">
+            <a:schemeClr val="accent1"/>
+          </a:fillRef>
+          <a:effectRef idx="2">
+            <a:schemeClr val="accent1"/>
+          </a:effectRef>
+          <a:fontRef idx="minor">
+            <a:schemeClr val="lt1"/>
+          </a:fontRef>
+        </p:style>
+        <p:txBody>
+          <a:bodyPr rtlCol="0" anchor="ctr"/>
+          <a:lstStyle/>
+          <a:p>
+            <a:pPr algn="ctr"/>
+          </a:p>
+        </p:txBody>
+      </p:sp>
+      <p:sp>
+        <p:nvSpPr>
+          <p:cNvPr id="7" name="TextBox 6"/>
+          <p:cNvSpPr txBox="1"/>
+          <p:nvPr/>
+        </p:nvSpPr>
+        <p:spPr>
+          <a:xfrm>
+            <a:off x="713232" y="548640"/>
+            <a:ext cx="10698480" cy="301752"/>
+          </a:xfrm>
+          <a:prstGeom prst="rect">
+            <a:avLst/>
+          </a:prstGeom>
+          <a:noFill/>
+        </p:spPr>
+        <p:txBody>
+          <a:bodyPr wrap="square" anchor="t">
+            <a:spAutoFit/>
+          </a:bodyPr>
+          <a:lstStyle/>
+          <a:p>
+            <a:pPr algn="l"/>
+            <a:r>
+              <a:rPr sz="1000" b="1">
+                <a:solidFill>
+                  <a:srgbClr val="48BF8F"/>
+                </a:solidFill>
+                <a:latin typeface="Aptos"/>
+              </a:rPr>
+              <a:t>COMPLETE TRACKED FILE TREE, NO TRACKED FILE OMITTED</a:t>
+            </a:r>
+          </a:p>
+        </p:txBody>
+      </p:sp>
+      <p:sp>
+        <p:nvSpPr>
+          <p:cNvPr id="8" name="TextBox 7"/>
+          <p:cNvSpPr txBox="1"/>
+          <p:nvPr/>
+        </p:nvSpPr>
+        <p:spPr>
+          <a:xfrm>
+            <a:off x="694944" y="850392"/>
+            <a:ext cx="10881360" cy="566928"/>
+          </a:xfrm>
+          <a:prstGeom prst="rect">
+            <a:avLst/>
+          </a:prstGeom>
+          <a:noFill/>
+        </p:spPr>
+        <p:txBody>
+          <a:bodyPr wrap="square" anchor="t">
+            <a:spAutoFit/>
+          </a:bodyPr>
+          <a:lstStyle/>
+          <a:p>
+            <a:pPr algn="l"/>
+            <a:r>
+              <a:rPr sz="2700" b="0">
+                <a:solidFill>
+                  <a:srgbClr val="E8E8DE"/>
+                </a:solidFill>
+                <a:latin typeface="Aptos Display"/>
+              </a:rPr>
+              <a:t>Tracked File Tree Appendix 3/28</a:t>
+            </a:r>
+          </a:p>
+        </p:txBody>
+      </p:sp>
+      <p:sp>
+        <p:nvSpPr>
+          <p:cNvPr id="9" name="TextBox 8"/>
+          <p:cNvSpPr txBox="1"/>
+          <p:nvPr/>
+        </p:nvSpPr>
+        <p:spPr>
+          <a:xfrm>
+            <a:off x="658368" y="1426464"/>
+            <a:ext cx="10927080" cy="4956048"/>
+          </a:xfrm>
+          <a:prstGeom prst="rect">
+            <a:avLst/>
+          </a:prstGeom>
+          <a:noFill/>
+        </p:spPr>
+        <p:txBody>
+          <a:bodyPr wrap="square" anchor="t">
+            <a:spAutoFit/>
+          </a:bodyPr>
+          <a:lstStyle/>
+          <a:p>
             <a:pPr algn="l"/>
             <a:r>
               <a:rPr sz="700" b="0">
@@ -43571,7 +42544,11 @@
                 </a:solidFill>
                 <a:latin typeface="Cascadia Mono"/>
               </a:rPr>
-              <a:t>|   |   |-- project_build_concurrency_guard.md
+              <a:t>|   |   |-- project_acpxer_added.md
+|   |   |-- project_arduiner_agent.md
+|   |   |-- project_ask_execs_feature.md
+|   |   |-- project_audioplayer_agent.md
+|   |   |-- project_build_concurrency_guard.md
 |   |   |-- project_build_tests_and_installer_enterkey.md
 |   |   |-- project_camcorder_agent.md
 |   |   |-- project_carried_python_for_agents.md
@@ -43597,11 +42574,7 @@
 |   |   |-- project_native_picker_tcltk_fix.md
 |   |   |-- project_native_toast.md
 |   |   |-- project_numpy_pyinstaller.md
-|   |   |-- project_ollama_source_build_breaks_embeddings.md
-|   |   |-- project_planner_followup.md
-|   |   |-- project_playwrighter_agent.md
-|   |   |-- project_playwrighter_hold_open.md
-|   |   |-- project_prompt_catalog_mode_badges.md</a:t>
+|   |   |-- project_ollama_source_build_breaks_embeddings.md</a:t>
             </a:r>
           </a:p>
         </p:txBody>
@@ -43614,7 +42587,7 @@
 </p:sld>
 </file>
 
-<file path=ppt/slides/slide63.xml><?xml version="1.0" encoding="utf-8"?>
+<file path=ppt/slides/slide61.xml><?xml version="1.0" encoding="utf-8"?>
 <p:sld xmlns:a="http://schemas.openxmlformats.org/drawingml/2006/main" xmlns:p="http://schemas.openxmlformats.org/presentationml/2006/main" xmlns:r="http://schemas.openxmlformats.org/officeDocument/2006/relationships">
   <p:cSld>
     <p:spTree>
@@ -43904,7 +42877,7 @@
                 </a:solidFill>
                 <a:latin typeface="Aptos Display"/>
               </a:rPr>
-              <a:t>Tracked File Tree Appendix 4/27</a:t>
+              <a:t>Tracked File Tree Appendix 4/28</a:t>
             </a:r>
           </a:p>
         </p:txBody>
@@ -43939,7 +42912,11 @@
                 </a:solidFill>
                 <a:latin typeface="Cascadia Mono"/>
               </a:rPr>
-              <a:t>|   |   |-- project_pythonxer_forkbomb_fix.md
+              <a:t>|   |   |-- project_planner_followup.md
+|   |   |-- project_playwrighter_agent.md
+|   |   |-- project_playwrighter_hold_open.md
+|   |   |-- project_prompt_catalog_mode_badges.md
+|   |   |-- project_pythonxer_forkbomb_fix.md
 |   |   |-- project_pythonxer_strict_ruff_gate.md
 |   |   |-- project_quote_apostrophe_fix_2026_05_07.md
 |   |   |-- project_reaper_console_window_fix.md
@@ -43965,11 +42942,7 @@
 |   |   |-- project_windower_agent.md
 |   |   `-- user_profile.md
 |   `-- skills/
-|       |-- tlamatini-agent-naming/
-|       |   `-- SKILL.md
-|       `-- tlamatini-daily-chat-test/
-|           |-- .gitignore
-|           |-- SKILL.md</a:t>
+|       |-- tlamatini-agent-creation/</a:t>
             </a:r>
           </a:p>
         </p:txBody>
@@ -43982,7 +42955,7 @@
 </p:sld>
 </file>
 
-<file path=ppt/slides/slide64.xml><?xml version="1.0" encoding="utf-8"?>
+<file path=ppt/slides/slide62.xml><?xml version="1.0" encoding="utf-8"?>
 <p:sld xmlns:a="http://schemas.openxmlformats.org/drawingml/2006/main" xmlns:p="http://schemas.openxmlformats.org/presentationml/2006/main" xmlns:r="http://schemas.openxmlformats.org/officeDocument/2006/relationships">
   <p:cSld>
     <p:spTree>
@@ -44272,7 +43245,7 @@
                 </a:solidFill>
                 <a:latin typeface="Aptos Display"/>
               </a:rPr>
-              <a:t>Tracked File Tree Appendix 5/27</a:t>
+              <a:t>Tracked File Tree Appendix 5/28</a:t>
             </a:r>
           </a:p>
         </p:txBody>
@@ -44307,7 +43280,13 @@
                 </a:solidFill>
                 <a:latin typeface="Cascadia Mono"/>
               </a:rPr>
-              <a:t>|           `-- harness/
+              <a:t>|       |   `-- SKILL.md
+|       |-- tlamatini-agent-naming/
+|       |   `-- SKILL.md
+|       `-- tlamatini-daily-chat-test/
+|           |-- .gitignore
+|           |-- SKILL.md
+|           `-- harness/
 |               |-- config.py
 |               |-- cyber_watchdog_test.py
 |               |-- qualify.py
@@ -44315,6 +43294,7 @@
 |               |-- README.md
 |               |-- requirements.txt
 |               |-- run_test.py
+|               |-- talk_test.py
 |               `-- wrapped_questions.py
 |-- .codex/
 |   `-- skills/
@@ -44325,19 +43305,12 @@
 |-- .github/
 |   `-- workflows/
 |       `-- name-guard.yml
+|-- AuxTests/
+|   `-- mypdf2.py
 |-- docs/
 |   `-- claude/
 |       |-- acpx.md
-|       |-- agents.md
-|       |-- architecture.md
-|       |-- exec-report.md
-|       |-- frontend.md
-|       |-- gotchas.md
-|       |-- INDEX.md
-|       |-- mcp-tools.md
-|       |-- multi-turn.md
-|       `-- recent-fixes.md
-|-- pyinstaller_hooks/</a:t>
+|       |-- agents.md</a:t>
             </a:r>
           </a:p>
         </p:txBody>
@@ -44350,7 +43323,7 @@
 </p:sld>
 </file>
 
-<file path=ppt/slides/slide65.xml><?xml version="1.0" encoding="utf-8"?>
+<file path=ppt/slides/slide63.xml><?xml version="1.0" encoding="utf-8"?>
 <p:sld xmlns:a="http://schemas.openxmlformats.org/drawingml/2006/main" xmlns:p="http://schemas.openxmlformats.org/presentationml/2006/main" xmlns:r="http://schemas.openxmlformats.org/officeDocument/2006/relationships">
   <p:cSld>
     <p:spTree>
@@ -44640,7 +43613,7 @@
                 </a:solidFill>
                 <a:latin typeface="Aptos Display"/>
               </a:rPr>
-              <a:t>Tracked File Tree Appendix 6/27</a:t>
+              <a:t>Tracked File Tree Appendix 6/28</a:t>
             </a:r>
           </a:p>
         </p:txBody>
@@ -44675,7 +43648,16 @@
                 </a:solidFill>
                 <a:latin typeface="Cascadia Mono"/>
               </a:rPr>
-              <a:t>|   `-- hook-numpy.py
+              <a:t>|       |-- architecture.md
+|       |-- exec-report.md
+|       |-- frontend.md
+|       |-- gotchas.md
+|       |-- INDEX.md
+|       |-- mcp-tools.md
+|       |-- multi-turn.md
+|       `-- recent-fixes.md
+|-- pyinstaller_hooks/
+|   `-- hook-numpy.py
 `-- Tlamatini/
     |-- cat_art.py
     |-- manage.py
@@ -44696,16 +43678,7 @@
     |   |-- chat_agent_registry.py
     |   |-- chat_agent_runtime.py
     |   |-- chat_history_loader.py
-    |   |-- command_togen_pb2.txt
-    |   |-- command_watchdog.py
-    |   |-- config.json
-    |   |-- config_loader.py
-    |   |-- constants.py
-    |   |-- consumers.py
-    |   |-- embedding_memory_guard.py
-    |   |-- exec_permission.py
-    |   |-- filesearch.proto
-    |   |-- filesearch_pb2.py</a:t>
+    |   |-- command_togen_pb2.txt</a:t>
             </a:r>
           </a:p>
         </p:txBody>
@@ -44718,7 +43691,7 @@
 </p:sld>
 </file>
 
-<file path=ppt/slides/slide66.xml><?xml version="1.0" encoding="utf-8"?>
+<file path=ppt/slides/slide64.xml><?xml version="1.0" encoding="utf-8"?>
 <p:sld xmlns:a="http://schemas.openxmlformats.org/drawingml/2006/main" xmlns:p="http://schemas.openxmlformats.org/presentationml/2006/main" xmlns:r="http://schemas.openxmlformats.org/officeDocument/2006/relationships">
   <p:cSld>
     <p:spTree>
@@ -45008,7 +43981,7 @@
                 </a:solidFill>
                 <a:latin typeface="Aptos Display"/>
               </a:rPr>
-              <a:t>Tracked File Tree Appendix 7/27</a:t>
+              <a:t>Tracked File Tree Appendix 7/28</a:t>
             </a:r>
           </a:p>
         </p:txBody>
@@ -45043,7 +44016,16 @@
                 </a:solidFill>
                 <a:latin typeface="Cascadia Mono"/>
               </a:rPr>
-              <a:t>    |   |-- filesearch_pb2_grpc.py
+              <a:t>    |   |-- command_watchdog.py
+    |   |-- config.json
+    |   |-- config_loader.py
+    |   |-- constants.py
+    |   |-- consumers.py
+    |   |-- embedding_memory_guard.py
+    |   |-- exec_permission.py
+    |   |-- filesearch.proto
+    |   |-- filesearch_pb2.py
+    |   |-- filesearch_pb2_grpc.py
     |   |-- global_execution_planner.py
     |   |-- global_state.py
     |   |-- gpu_perf.py
@@ -45064,16 +44046,743 @@
     |   |-- test_audioplayer_agent.py
     |   |-- test_build_scripts.py
     |   |-- test_camcorder_agent.py
-    |   |-- test_chat_bridge_bots.py
-    |   |-- test_command_watchdog.py
+    |   |-- test_chat_bridge_bots.py</a:t>
+            </a:r>
+          </a:p>
+        </p:txBody>
+      </p:sp>
+    </p:spTree>
+  </p:cSld>
+  <p:clrMapOvr>
+    <a:masterClrMapping/>
+  </p:clrMapOvr>
+</p:sld>
+</file>
+
+<file path=ppt/slides/slide65.xml><?xml version="1.0" encoding="utf-8"?>
+<p:sld xmlns:a="http://schemas.openxmlformats.org/drawingml/2006/main" xmlns:p="http://schemas.openxmlformats.org/presentationml/2006/main" xmlns:r="http://schemas.openxmlformats.org/officeDocument/2006/relationships">
+  <p:cSld>
+    <p:spTree>
+      <p:nvGrpSpPr>
+        <p:cNvPr id="1" name=""/>
+        <p:cNvGrpSpPr/>
+        <p:nvPr/>
+      </p:nvGrpSpPr>
+      <p:grpSpPr/>
+      <p:sp>
+        <p:nvSpPr>
+          <p:cNvPr id="2" name="Rectangle 1"/>
+          <p:cNvSpPr/>
+          <p:nvPr/>
+        </p:nvSpPr>
+        <p:spPr>
+          <a:xfrm>
+            <a:off x="0" y="0"/>
+            <a:ext cx="12191695" cy="6858000"/>
+          </a:xfrm>
+          <a:prstGeom prst="rect">
+            <a:avLst/>
+          </a:prstGeom>
+          <a:solidFill>
+            <a:srgbClr val="080D0D"/>
+          </a:solidFill>
+          <a:ln>
+            <a:noFill/>
+          </a:ln>
+        </p:spPr>
+        <p:style>
+          <a:lnRef idx="1">
+            <a:schemeClr val="accent1"/>
+          </a:lnRef>
+          <a:fillRef idx="3">
+            <a:schemeClr val="accent1"/>
+          </a:fillRef>
+          <a:effectRef idx="2">
+            <a:schemeClr val="accent1"/>
+          </a:effectRef>
+          <a:fontRef idx="minor">
+            <a:schemeClr val="lt1"/>
+          </a:fontRef>
+        </p:style>
+        <p:txBody>
+          <a:bodyPr rtlCol="0" anchor="ctr"/>
+          <a:lstStyle/>
+          <a:p>
+            <a:pPr algn="ctr"/>
+          </a:p>
+        </p:txBody>
+      </p:sp>
+      <p:sp>
+        <p:nvSpPr>
+          <p:cNvPr id="3" name="Rectangle 2"/>
+          <p:cNvSpPr/>
+          <p:nvPr/>
+        </p:nvSpPr>
+        <p:spPr>
+          <a:xfrm>
+            <a:off x="320040" y="384048"/>
+            <a:ext cx="36576" cy="6080760"/>
+          </a:xfrm>
+          <a:prstGeom prst="rect">
+            <a:avLst/>
+          </a:prstGeom>
+          <a:solidFill>
+            <a:srgbClr val="C48052"/>
+          </a:solidFill>
+          <a:ln>
+            <a:noFill/>
+          </a:ln>
+        </p:spPr>
+        <p:style>
+          <a:lnRef idx="1">
+            <a:schemeClr val="accent1"/>
+          </a:lnRef>
+          <a:fillRef idx="3">
+            <a:schemeClr val="accent1"/>
+          </a:fillRef>
+          <a:effectRef idx="2">
+            <a:schemeClr val="accent1"/>
+          </a:effectRef>
+          <a:fontRef idx="minor">
+            <a:schemeClr val="lt1"/>
+          </a:fontRef>
+        </p:style>
+        <p:txBody>
+          <a:bodyPr rtlCol="0" anchor="ctr"/>
+          <a:lstStyle/>
+          <a:p>
+            <a:pPr algn="ctr"/>
+          </a:p>
+        </p:txBody>
+      </p:sp>
+      <p:sp>
+        <p:nvSpPr>
+          <p:cNvPr id="4" name="Rectangle 3"/>
+          <p:cNvSpPr/>
+          <p:nvPr/>
+        </p:nvSpPr>
+        <p:spPr>
+          <a:xfrm>
+            <a:off x="11716207" y="384048"/>
+            <a:ext cx="36576" cy="6080760"/>
+          </a:xfrm>
+          <a:prstGeom prst="rect">
+            <a:avLst/>
+          </a:prstGeom>
+          <a:solidFill>
+            <a:srgbClr val="C48052"/>
+          </a:solidFill>
+          <a:ln>
+            <a:noFill/>
+          </a:ln>
+        </p:spPr>
+        <p:style>
+          <a:lnRef idx="1">
+            <a:schemeClr val="accent1"/>
+          </a:lnRef>
+          <a:fillRef idx="3">
+            <a:schemeClr val="accent1"/>
+          </a:fillRef>
+          <a:effectRef idx="2">
+            <a:schemeClr val="accent1"/>
+          </a:effectRef>
+          <a:fontRef idx="minor">
+            <a:schemeClr val="lt1"/>
+          </a:fontRef>
+        </p:style>
+        <p:txBody>
+          <a:bodyPr rtlCol="0" anchor="ctr"/>
+          <a:lstStyle/>
+          <a:p>
+            <a:pPr algn="ctr"/>
+          </a:p>
+        </p:txBody>
+      </p:sp>
+      <p:sp>
+        <p:nvSpPr>
+          <p:cNvPr id="5" name="Rectangle 4"/>
+          <p:cNvSpPr/>
+          <p:nvPr/>
+        </p:nvSpPr>
+        <p:spPr>
+          <a:xfrm>
+            <a:off x="502920" y="384048"/>
+            <a:ext cx="11155680" cy="27432"/>
+          </a:xfrm>
+          <a:prstGeom prst="rect">
+            <a:avLst/>
+          </a:prstGeom>
+          <a:solidFill>
+            <a:srgbClr val="C48052"/>
+          </a:solidFill>
+          <a:ln>
+            <a:noFill/>
+          </a:ln>
+        </p:spPr>
+        <p:style>
+          <a:lnRef idx="1">
+            <a:schemeClr val="accent1"/>
+          </a:lnRef>
+          <a:fillRef idx="3">
+            <a:schemeClr val="accent1"/>
+          </a:fillRef>
+          <a:effectRef idx="2">
+            <a:schemeClr val="accent1"/>
+          </a:effectRef>
+          <a:fontRef idx="minor">
+            <a:schemeClr val="lt1"/>
+          </a:fontRef>
+        </p:style>
+        <p:txBody>
+          <a:bodyPr rtlCol="0" anchor="ctr"/>
+          <a:lstStyle/>
+          <a:p>
+            <a:pPr algn="ctr"/>
+          </a:p>
+        </p:txBody>
+      </p:sp>
+      <p:sp>
+        <p:nvSpPr>
+          <p:cNvPr id="6" name="Rectangle 5"/>
+          <p:cNvSpPr/>
+          <p:nvPr/>
+        </p:nvSpPr>
+        <p:spPr>
+          <a:xfrm>
+            <a:off x="502920" y="6437376"/>
+            <a:ext cx="11155680" cy="27432"/>
+          </a:xfrm>
+          <a:prstGeom prst="rect">
+            <a:avLst/>
+          </a:prstGeom>
+          <a:solidFill>
+            <a:srgbClr val="C48052"/>
+          </a:solidFill>
+          <a:ln>
+            <a:noFill/>
+          </a:ln>
+        </p:spPr>
+        <p:style>
+          <a:lnRef idx="1">
+            <a:schemeClr val="accent1"/>
+          </a:lnRef>
+          <a:fillRef idx="3">
+            <a:schemeClr val="accent1"/>
+          </a:fillRef>
+          <a:effectRef idx="2">
+            <a:schemeClr val="accent1"/>
+          </a:effectRef>
+          <a:fontRef idx="minor">
+            <a:schemeClr val="lt1"/>
+          </a:fontRef>
+        </p:style>
+        <p:txBody>
+          <a:bodyPr rtlCol="0" anchor="ctr"/>
+          <a:lstStyle/>
+          <a:p>
+            <a:pPr algn="ctr"/>
+          </a:p>
+        </p:txBody>
+      </p:sp>
+      <p:sp>
+        <p:nvSpPr>
+          <p:cNvPr id="7" name="TextBox 6"/>
+          <p:cNvSpPr txBox="1"/>
+          <p:nvPr/>
+        </p:nvSpPr>
+        <p:spPr>
+          <a:xfrm>
+            <a:off x="713232" y="548640"/>
+            <a:ext cx="10698480" cy="301752"/>
+          </a:xfrm>
+          <a:prstGeom prst="rect">
+            <a:avLst/>
+          </a:prstGeom>
+          <a:noFill/>
+        </p:spPr>
+        <p:txBody>
+          <a:bodyPr wrap="square" anchor="t">
+            <a:spAutoFit/>
+          </a:bodyPr>
+          <a:lstStyle/>
+          <a:p>
+            <a:pPr algn="l"/>
+            <a:r>
+              <a:rPr sz="1000" b="1">
+                <a:solidFill>
+                  <a:srgbClr val="C48052"/>
+                </a:solidFill>
+                <a:latin typeface="Aptos"/>
+              </a:rPr>
+              <a:t>COMPLETE TRACKED FILE TREE, NO TRACKED FILE OMITTED</a:t>
+            </a:r>
+          </a:p>
+        </p:txBody>
+      </p:sp>
+      <p:sp>
+        <p:nvSpPr>
+          <p:cNvPr id="8" name="TextBox 7"/>
+          <p:cNvSpPr txBox="1"/>
+          <p:nvPr/>
+        </p:nvSpPr>
+        <p:spPr>
+          <a:xfrm>
+            <a:off x="694944" y="850392"/>
+            <a:ext cx="10881360" cy="566928"/>
+          </a:xfrm>
+          <a:prstGeom prst="rect">
+            <a:avLst/>
+          </a:prstGeom>
+          <a:noFill/>
+        </p:spPr>
+        <p:txBody>
+          <a:bodyPr wrap="square" anchor="t">
+            <a:spAutoFit/>
+          </a:bodyPr>
+          <a:lstStyle/>
+          <a:p>
+            <a:pPr algn="l"/>
+            <a:r>
+              <a:rPr sz="2700" b="0">
+                <a:solidFill>
+                  <a:srgbClr val="E8E8DE"/>
+                </a:solidFill>
+                <a:latin typeface="Aptos Display"/>
+              </a:rPr>
+              <a:t>Tracked File Tree Appendix 8/28</a:t>
+            </a:r>
+          </a:p>
+        </p:txBody>
+      </p:sp>
+      <p:sp>
+        <p:nvSpPr>
+          <p:cNvPr id="9" name="TextBox 8"/>
+          <p:cNvSpPr txBox="1"/>
+          <p:nvPr/>
+        </p:nvSpPr>
+        <p:spPr>
+          <a:xfrm>
+            <a:off x="658368" y="1426464"/>
+            <a:ext cx="10927080" cy="4956048"/>
+          </a:xfrm>
+          <a:prstGeom prst="rect">
+            <a:avLst/>
+          </a:prstGeom>
+          <a:noFill/>
+        </p:spPr>
+        <p:txBody>
+          <a:bodyPr wrap="square" anchor="t">
+            <a:spAutoFit/>
+          </a:bodyPr>
+          <a:lstStyle/>
+          <a:p>
+            <a:pPr algn="l"/>
+            <a:r>
+              <a:rPr sz="700" b="0">
+                <a:solidFill>
+                  <a:srgbClr val="E8E8DE"/>
+                </a:solidFill>
+                <a:latin typeface="Cascadia Mono"/>
+              </a:rPr>
+              <a:t>    |   |-- test_command_watchdog.py
+    |   |-- test_crawler_agent.py
     |   |-- test_de_compresser.py
     |   |-- test_embedding_memory_guard.py
     |   |-- test_esp32er_agent.py
     |   |-- test_execute_command_bounded.py
     |   |-- test_flow_contracts.py
+    |   |-- test_googler_agent.py
+    |   |-- test_j_decompiler_agent.py
     |   |-- test_kalier_agent.py
     |   |-- test_native_dialogs.py
-    |   |-- test_orphan_reaper.py</a:t>
+    |   |-- test_orphan_reaper.py
+    |   |-- test_password_quoting.py
+    |   |-- test_playwrighter_agent.py
+    |   |-- test_recorder_agent.py
+    |   |-- test_stm32er_agent.py
+    |   |-- test_talker_agent.py
+    |   |-- test_temp_dir_policy.py
+    |   |-- test_unrealer_agent.py
+    |   |-- test_videoplayer_agent.py
+    |   |-- test_whisperer_agent.py
+    |   |-- test_windower_agent.py
+    |   |-- test_windows_app_registration.py
+    |   |-- tests.py
+    |   |-- Tlamatini.md
+    |   |-- tools.py
+    |   |-- urls.py
+    |   |-- version.py
+    |   |-- views.py
+    |   |-- web_search_llm.py
+    |   |-- window_flash.py</a:t>
+            </a:r>
+          </a:p>
+        </p:txBody>
+      </p:sp>
+    </p:spTree>
+  </p:cSld>
+  <p:clrMapOvr>
+    <a:masterClrMapping/>
+  </p:clrMapOvr>
+</p:sld>
+</file>
+
+<file path=ppt/slides/slide66.xml><?xml version="1.0" encoding="utf-8"?>
+<p:sld xmlns:a="http://schemas.openxmlformats.org/drawingml/2006/main" xmlns:p="http://schemas.openxmlformats.org/presentationml/2006/main" xmlns:r="http://schemas.openxmlformats.org/officeDocument/2006/relationships">
+  <p:cSld>
+    <p:spTree>
+      <p:nvGrpSpPr>
+        <p:cNvPr id="1" name=""/>
+        <p:cNvGrpSpPr/>
+        <p:nvPr/>
+      </p:nvGrpSpPr>
+      <p:grpSpPr/>
+      <p:sp>
+        <p:nvSpPr>
+          <p:cNvPr id="2" name="Rectangle 1"/>
+          <p:cNvSpPr/>
+          <p:nvPr/>
+        </p:nvSpPr>
+        <p:spPr>
+          <a:xfrm>
+            <a:off x="0" y="0"/>
+            <a:ext cx="12191695" cy="6858000"/>
+          </a:xfrm>
+          <a:prstGeom prst="rect">
+            <a:avLst/>
+          </a:prstGeom>
+          <a:solidFill>
+            <a:srgbClr val="080D0D"/>
+          </a:solidFill>
+          <a:ln>
+            <a:noFill/>
+          </a:ln>
+        </p:spPr>
+        <p:style>
+          <a:lnRef idx="1">
+            <a:schemeClr val="accent1"/>
+          </a:lnRef>
+          <a:fillRef idx="3">
+            <a:schemeClr val="accent1"/>
+          </a:fillRef>
+          <a:effectRef idx="2">
+            <a:schemeClr val="accent1"/>
+          </a:effectRef>
+          <a:fontRef idx="minor">
+            <a:schemeClr val="lt1"/>
+          </a:fontRef>
+        </p:style>
+        <p:txBody>
+          <a:bodyPr rtlCol="0" anchor="ctr"/>
+          <a:lstStyle/>
+          <a:p>
+            <a:pPr algn="ctr"/>
+          </a:p>
+        </p:txBody>
+      </p:sp>
+      <p:sp>
+        <p:nvSpPr>
+          <p:cNvPr id="3" name="Rectangle 2"/>
+          <p:cNvSpPr/>
+          <p:nvPr/>
+        </p:nvSpPr>
+        <p:spPr>
+          <a:xfrm>
+            <a:off x="320040" y="384048"/>
+            <a:ext cx="36576" cy="6080760"/>
+          </a:xfrm>
+          <a:prstGeom prst="rect">
+            <a:avLst/>
+          </a:prstGeom>
+          <a:solidFill>
+            <a:srgbClr val="48BF8F"/>
+          </a:solidFill>
+          <a:ln>
+            <a:noFill/>
+          </a:ln>
+        </p:spPr>
+        <p:style>
+          <a:lnRef idx="1">
+            <a:schemeClr val="accent1"/>
+          </a:lnRef>
+          <a:fillRef idx="3">
+            <a:schemeClr val="accent1"/>
+          </a:fillRef>
+          <a:effectRef idx="2">
+            <a:schemeClr val="accent1"/>
+          </a:effectRef>
+          <a:fontRef idx="minor">
+            <a:schemeClr val="lt1"/>
+          </a:fontRef>
+        </p:style>
+        <p:txBody>
+          <a:bodyPr rtlCol="0" anchor="ctr"/>
+          <a:lstStyle/>
+          <a:p>
+            <a:pPr algn="ctr"/>
+          </a:p>
+        </p:txBody>
+      </p:sp>
+      <p:sp>
+        <p:nvSpPr>
+          <p:cNvPr id="4" name="Rectangle 3"/>
+          <p:cNvSpPr/>
+          <p:nvPr/>
+        </p:nvSpPr>
+        <p:spPr>
+          <a:xfrm>
+            <a:off x="11716207" y="384048"/>
+            <a:ext cx="36576" cy="6080760"/>
+          </a:xfrm>
+          <a:prstGeom prst="rect">
+            <a:avLst/>
+          </a:prstGeom>
+          <a:solidFill>
+            <a:srgbClr val="48BF8F"/>
+          </a:solidFill>
+          <a:ln>
+            <a:noFill/>
+          </a:ln>
+        </p:spPr>
+        <p:style>
+          <a:lnRef idx="1">
+            <a:schemeClr val="accent1"/>
+          </a:lnRef>
+          <a:fillRef idx="3">
+            <a:schemeClr val="accent1"/>
+          </a:fillRef>
+          <a:effectRef idx="2">
+            <a:schemeClr val="accent1"/>
+          </a:effectRef>
+          <a:fontRef idx="minor">
+            <a:schemeClr val="lt1"/>
+          </a:fontRef>
+        </p:style>
+        <p:txBody>
+          <a:bodyPr rtlCol="0" anchor="ctr"/>
+          <a:lstStyle/>
+          <a:p>
+            <a:pPr algn="ctr"/>
+          </a:p>
+        </p:txBody>
+      </p:sp>
+      <p:sp>
+        <p:nvSpPr>
+          <p:cNvPr id="5" name="Rectangle 4"/>
+          <p:cNvSpPr/>
+          <p:nvPr/>
+        </p:nvSpPr>
+        <p:spPr>
+          <a:xfrm>
+            <a:off x="502920" y="384048"/>
+            <a:ext cx="11155680" cy="27432"/>
+          </a:xfrm>
+          <a:prstGeom prst="rect">
+            <a:avLst/>
+          </a:prstGeom>
+          <a:solidFill>
+            <a:srgbClr val="48BF8F"/>
+          </a:solidFill>
+          <a:ln>
+            <a:noFill/>
+          </a:ln>
+        </p:spPr>
+        <p:style>
+          <a:lnRef idx="1">
+            <a:schemeClr val="accent1"/>
+          </a:lnRef>
+          <a:fillRef idx="3">
+            <a:schemeClr val="accent1"/>
+          </a:fillRef>
+          <a:effectRef idx="2">
+            <a:schemeClr val="accent1"/>
+          </a:effectRef>
+          <a:fontRef idx="minor">
+            <a:schemeClr val="lt1"/>
+          </a:fontRef>
+        </p:style>
+        <p:txBody>
+          <a:bodyPr rtlCol="0" anchor="ctr"/>
+          <a:lstStyle/>
+          <a:p>
+            <a:pPr algn="ctr"/>
+          </a:p>
+        </p:txBody>
+      </p:sp>
+      <p:sp>
+        <p:nvSpPr>
+          <p:cNvPr id="6" name="Rectangle 5"/>
+          <p:cNvSpPr/>
+          <p:nvPr/>
+        </p:nvSpPr>
+        <p:spPr>
+          <a:xfrm>
+            <a:off x="502920" y="6437376"/>
+            <a:ext cx="11155680" cy="27432"/>
+          </a:xfrm>
+          <a:prstGeom prst="rect">
+            <a:avLst/>
+          </a:prstGeom>
+          <a:solidFill>
+            <a:srgbClr val="48BF8F"/>
+          </a:solidFill>
+          <a:ln>
+            <a:noFill/>
+          </a:ln>
+        </p:spPr>
+        <p:style>
+          <a:lnRef idx="1">
+            <a:schemeClr val="accent1"/>
+          </a:lnRef>
+          <a:fillRef idx="3">
+            <a:schemeClr val="accent1"/>
+          </a:fillRef>
+          <a:effectRef idx="2">
+            <a:schemeClr val="accent1"/>
+          </a:effectRef>
+          <a:fontRef idx="minor">
+            <a:schemeClr val="lt1"/>
+          </a:fontRef>
+        </p:style>
+        <p:txBody>
+          <a:bodyPr rtlCol="0" anchor="ctr"/>
+          <a:lstStyle/>
+          <a:p>
+            <a:pPr algn="ctr"/>
+          </a:p>
+        </p:txBody>
+      </p:sp>
+      <p:sp>
+        <p:nvSpPr>
+          <p:cNvPr id="7" name="TextBox 6"/>
+          <p:cNvSpPr txBox="1"/>
+          <p:nvPr/>
+        </p:nvSpPr>
+        <p:spPr>
+          <a:xfrm>
+            <a:off x="713232" y="548640"/>
+            <a:ext cx="10698480" cy="301752"/>
+          </a:xfrm>
+          <a:prstGeom prst="rect">
+            <a:avLst/>
+          </a:prstGeom>
+          <a:noFill/>
+        </p:spPr>
+        <p:txBody>
+          <a:bodyPr wrap="square" anchor="t">
+            <a:spAutoFit/>
+          </a:bodyPr>
+          <a:lstStyle/>
+          <a:p>
+            <a:pPr algn="l"/>
+            <a:r>
+              <a:rPr sz="1000" b="1">
+                <a:solidFill>
+                  <a:srgbClr val="48BF8F"/>
+                </a:solidFill>
+                <a:latin typeface="Aptos"/>
+              </a:rPr>
+              <a:t>COMPLETE TRACKED FILE TREE, NO TRACKED FILE OMITTED</a:t>
+            </a:r>
+          </a:p>
+        </p:txBody>
+      </p:sp>
+      <p:sp>
+        <p:nvSpPr>
+          <p:cNvPr id="8" name="TextBox 7"/>
+          <p:cNvSpPr txBox="1"/>
+          <p:nvPr/>
+        </p:nvSpPr>
+        <p:spPr>
+          <a:xfrm>
+            <a:off x="694944" y="850392"/>
+            <a:ext cx="10881360" cy="566928"/>
+          </a:xfrm>
+          <a:prstGeom prst="rect">
+            <a:avLst/>
+          </a:prstGeom>
+          <a:noFill/>
+        </p:spPr>
+        <p:txBody>
+          <a:bodyPr wrap="square" anchor="t">
+            <a:spAutoFit/>
+          </a:bodyPr>
+          <a:lstStyle/>
+          <a:p>
+            <a:pPr algn="l"/>
+            <a:r>
+              <a:rPr sz="2700" b="0">
+                <a:solidFill>
+                  <a:srgbClr val="E8E8DE"/>
+                </a:solidFill>
+                <a:latin typeface="Aptos Display"/>
+              </a:rPr>
+              <a:t>Tracked File Tree Appendix 9/28</a:t>
+            </a:r>
+          </a:p>
+        </p:txBody>
+      </p:sp>
+      <p:sp>
+        <p:nvSpPr>
+          <p:cNvPr id="9" name="TextBox 8"/>
+          <p:cNvSpPr txBox="1"/>
+          <p:nvPr/>
+        </p:nvSpPr>
+        <p:spPr>
+          <a:xfrm>
+            <a:off x="658368" y="1426464"/>
+            <a:ext cx="10927080" cy="4956048"/>
+          </a:xfrm>
+          <a:prstGeom prst="rect">
+            <a:avLst/>
+          </a:prstGeom>
+          <a:noFill/>
+        </p:spPr>
+        <p:txBody>
+          <a:bodyPr wrap="square" anchor="t">
+            <a:spAutoFit/>
+          </a:bodyPr>
+          <a:lstStyle/>
+          <a:p>
+            <a:pPr algn="l"/>
+            <a:r>
+              <a:rPr sz="700" b="0">
+                <a:solidFill>
+                  <a:srgbClr val="E8E8DE"/>
+                </a:solidFill>
+                <a:latin typeface="Cascadia Mono"/>
+              </a:rPr>
+              <a:t>    |   |-- windows_app_registration.py
+    |   |-- acpx/
+    |   |   |-- __init__.py
+    |   |   |-- agent_registry.py
+    |   |   |-- config.py
+    |   |   |-- permissions.py
+    |   |   |-- runtime.py
+    |   |   |-- service.py
+    |   |   |-- session_store.py
+    |   |   |-- tests.py
+    |   |   |-- tools.py
+    |   |   `-- windows_spawn.py
+    |   |-- agents/
+    |   |   |-- acpxer/
+    |   |   |   |-- acpxer.py
+    |   |   |   `-- config.yaml
+    |   |   |-- analyzer/
+    |   |   |   |-- analyzer.py
+    |   |   |   `-- config.yaml
+    |   |   |-- and/
+    |   |   |   |-- and.py
+    |   |   |   `-- config.yaml
+    |   |   |-- apirer/
+    |   |   |   |-- apirer.py
+    |   |   |   `-- config.yaml
+    |   |   |-- arduiner/
+    |   |   |   |-- arduiner.py
+    |   |   |   |-- config.yaml
+    |   |   |   `-- ArduinoTemplateProject/
+    |   |   |       |-- ArduinoTemplateProject.ino
+    |   |   |       |-- README.md</a:t>
             </a:r>
           </a:p>
         </p:txBody>
@@ -45376,7 +45085,7 @@
                 </a:solidFill>
                 <a:latin typeface="Aptos Display"/>
               </a:rPr>
-              <a:t>Tracked File Tree Appendix 8/27</a:t>
+              <a:t>Tracked File Tree Appendix 10/28</a:t>
             </a:r>
           </a:p>
         </p:txBody>
@@ -45411,37 +45120,37 @@
                 </a:solidFill>
                 <a:latin typeface="Cascadia Mono"/>
               </a:rPr>
-              <a:t>    |   |-- test_password_quoting.py
-    |   |-- test_playwrighter_agent.py
-    |   |-- test_recorder_agent.py
-    |   |-- test_stm32er_agent.py
-    |   |-- test_temp_dir_policy.py
-    |   |-- test_unrealer_agent.py
-    |   |-- test_videoplayer_agent.py
-    |   |-- test_windower_agent.py
-    |   |-- test_windows_app_registration.py
-    |   |-- tests.py
-    |   |-- Tlamatini.md
-    |   |-- tools.py
-    |   |-- urls.py
-    |   |-- version.py
-    |   |-- views.py
-    |   |-- web_search_llm.py
-    |   |-- window_flash.py
-    |   |-- windows_app_registration.py
-    |   |-- acpx/
-    |   |   |-- __init__.py
-    |   |   |-- agent_registry.py
-    |   |   |-- config.py
-    |   |   |-- permissions.py
-    |   |   |-- runtime.py
-    |   |   |-- service.py
-    |   |   |-- session_store.py
-    |   |   |-- tests.py
-    |   |   |-- tools.py
-    |   |   `-- windows_spawn.py
-    |   |-- agents/
-    |   |   |-- acpxer/</a:t>
+              <a:t>    |   |   |       |-- sketch.yaml
+    |   |   |       `-- src/
+    |   |   |           |-- Heartbeat.cpp
+    |   |   |           `-- Heartbeat.h
+    |   |   |-- asker/
+    |   |   |   |-- asker.py
+    |   |   |   `-- config.yaml
+    |   |   |-- audioplayer/
+    |   |   |   |-- audioplayer.py
+    |   |   |   `-- config.yaml
+    |   |   |-- barrier/
+    |   |   |   |-- barrier.py
+    |   |   |   |-- config.yaml
+    |   |   |   `-- test_barrier.py
+    |   |   |-- camcorder/
+    |   |   |   |-- camcorder.py
+    |   |   |   `-- config.yaml
+    |   |   |-- cleaner/
+    |   |   |   |-- __init__.py
+    |   |   |   |-- cleaner.py
+    |   |   |   `-- config.yaml
+    |   |   |-- counter/
+    |   |   |   |-- config.yaml
+    |   |   |   `-- counter.py
+    |   |   |-- crawler/
+    |   |   |   |-- config.yaml
+    |   |   |   `-- crawler.py
+    |   |   |-- croner/
+    |   |   |   |-- config.yaml
+    |   |   |   `-- croner.py
+    |   |   |-- de_compresser/</a:t>
             </a:r>
           </a:p>
         </p:txBody>
@@ -45744,7 +45453,7 @@
                 </a:solidFill>
                 <a:latin typeface="Aptos Display"/>
               </a:rPr>
-              <a:t>Tracked File Tree Appendix 9/27</a:t>
+              <a:t>Tracked File Tree Appendix 11/28</a:t>
             </a:r>
           </a:p>
         </p:txBody>
@@ -45779,37 +45488,37 @@
                 </a:solidFill>
                 <a:latin typeface="Cascadia Mono"/>
               </a:rPr>
-              <a:t>    |   |   |   |-- acpxer.py
-    |   |   |   `-- config.yaml
-    |   |   |-- analyzer/
-    |   |   |   |-- analyzer.py
-    |   |   |   `-- config.yaml
-    |   |   |-- and/
-    |   |   |   |-- and.py
-    |   |   |   `-- config.yaml
-    |   |   |-- apirer/
-    |   |   |   |-- apirer.py
-    |   |   |   `-- config.yaml
-    |   |   |-- arduiner/
-    |   |   |   |-- arduiner.py
+              <a:t>    |   |   |   |-- config.yaml
+    |   |   |   `-- de_compresser.py
+    |   |   |-- deleter/
     |   |   |   |-- config.yaml
-    |   |   |   `-- ArduinoTemplateProject/
-    |   |   |       |-- ArduinoTemplateProject.ino
-    |   |   |       |-- README.md
-    |   |   |       |-- sketch.yaml
-    |   |   |       `-- src/
-    |   |   |           |-- Heartbeat.cpp
-    |   |   |           `-- Heartbeat.h
-    |   |   |-- asker/
-    |   |   |   |-- asker.py
-    |   |   |   `-- config.yaml
-    |   |   |-- audioplayer/
-    |   |   |   |-- audioplayer.py
-    |   |   |   `-- config.yaml
-    |   |   |-- barrier/
-    |   |   |   |-- barrier.py
+    |   |   |   `-- deleter.py
+    |   |   |-- dockerer/
     |   |   |   |-- config.yaml
-    |   |   |   `-- test_barrier.py</a:t>
+    |   |   |   `-- dockerer.py
+    |   |   |-- emailer/
+    |   |   |   |-- config.yaml
+    |   |   |   `-- emailer.py
+    |   |   |-- ender/
+    |   |   |   |-- config.yaml
+    |   |   |   `-- ender.py
+    |   |   |-- esp32er/
+    |   |   |   |-- config.yaml
+    |   |   |   `-- esp32er.py
+    |   |   |-- executer/
+    |   |   |   |-- config.yaml
+    |   |   |   `-- executer.py
+    |   |   |-- file_creator/
+    |   |   |   |-- config.yaml
+    |   |   |   `-- file_creator.py
+    |   |   |-- file_extractor/
+    |   |   |   |-- config.yaml
+    |   |   |   `-- file_extractor.py
+    |   |   |-- file_interpreter/
+    |   |   |   |-- config.yaml
+    |   |   |   `-- file_interpreter.py
+    |   |   |-- flowbacker/
+    |   |   |   |-- config.yaml</a:t>
             </a:r>
           </a:p>
         </p:txBody>
@@ -46112,7 +45821,7 @@
                 </a:solidFill>
                 <a:latin typeface="Aptos Display"/>
               </a:rPr>
-              <a:t>Tracked File Tree Appendix 10/27</a:t>
+              <a:t>Tracked File Tree Appendix 12/28</a:t>
             </a:r>
           </a:p>
         </p:txBody>
@@ -46147,37 +45856,37 @@
                 </a:solidFill>
                 <a:latin typeface="Cascadia Mono"/>
               </a:rPr>
-              <a:t>    |   |   |-- camcorder/
-    |   |   |   |-- camcorder.py
-    |   |   |   `-- config.yaml
-    |   |   |-- cleaner/
-    |   |   |   |-- __init__.py
-    |   |   |   |-- cleaner.py
-    |   |   |   `-- config.yaml
-    |   |   |-- counter/
+              <a:t>    |   |   |   `-- flowbacker.py
+    |   |   |-- flowcreator/
+    |   |   |   |-- agentic_skill.md
     |   |   |   |-- config.yaml
-    |   |   |   `-- counter.py
-    |   |   |-- crawler/
+    |   |   |   `-- flowcreator.py
+    |   |   |-- flowhypervisor/
     |   |   |   |-- config.yaml
-    |   |   |   `-- crawler.py
-    |   |   |-- croner/
+    |   |   |   |-- flowhypervisor.py
+    |   |   |   |-- hypervisor_alert.wav
+    |   |   |   `-- monitoring-prompt.pmt
+    |   |   |-- forker/
     |   |   |   |-- config.yaml
-    |   |   |   `-- croner.py
-    |   |   |-- de_compresser/
+    |   |   |   `-- forker.py
+    |   |   |-- gateway_relayer/
     |   |   |   |-- config.yaml
-    |   |   |   `-- de_compresser.py
-    |   |   |-- deleter/
+    |   |   |   |-- gateway_relayer.md
+    |   |   |   `-- gateway_relayer.py
+    |   |   |-- gatewayer/
     |   |   |   |-- config.yaml
-    |   |   |   `-- deleter.py
-    |   |   |-- dockerer/
+    |   |   |   |-- gatewayer.md
+    |   |   |   |-- gatewayer.py
+    |   |   |   `-- gatewayer_explanation.md
+    |   |   |-- gitter/
     |   |   |   |-- config.yaml
-    |   |   |   `-- dockerer.py
-    |   |   |-- emailer/
+    |   |   |   `-- gitter.py
+    |   |   |-- googler/
     |   |   |   |-- config.yaml
-    |   |   |   `-- emailer.py
-    |   |   |-- ender/
+    |   |   |   `-- googler.py
+    |   |   |-- image_interpreter/
     |   |   |   |-- config.yaml
-    |   |   |   `-- ender.py</a:t>
+    |   |   |   `-- image_interpreter.py</a:t>
             </a:r>
           </a:p>
         </p:txBody>
@@ -47267,7 +46976,7 @@
                 </a:solidFill>
                 <a:latin typeface="Aptos Display"/>
               </a:rPr>
-              <a:t>Tracked File Tree Appendix 11/27</a:t>
+              <a:t>Tracked File Tree Appendix 13/28</a:t>
             </a:r>
           </a:p>
         </p:txBody>
@@ -47302,37 +47011,37 @@
                 </a:solidFill>
                 <a:latin typeface="Cascadia Mono"/>
               </a:rPr>
-              <a:t>    |   |   |-- esp32er/
+              <a:t>    |   |   |-- j_decompiler/
     |   |   |   |-- config.yaml
-    |   |   |   `-- esp32er.py
-    |   |   |-- executer/
+    |   |   |   `-- j_decompiler.py
+    |   |   |-- jenkinser/
     |   |   |   |-- config.yaml
-    |   |   |   `-- executer.py
-    |   |   |-- file_creator/
+    |   |   |   `-- jenkinser.py
+    |   |   |-- kalier/
     |   |   |   |-- config.yaml
-    |   |   |   `-- file_creator.py
-    |   |   |-- file_extractor/
+    |   |   |   `-- kalier.py
+    |   |   |-- keyboarder/
     |   |   |   |-- config.yaml
-    |   |   |   `-- file_extractor.py
-    |   |   |-- file_interpreter/
+    |   |   |   `-- keyboarder.py
+    |   |   |-- kuberneter/
     |   |   |   |-- config.yaml
-    |   |   |   `-- file_interpreter.py
-    |   |   |-- flowbacker/
+    |   |   |   `-- kuberneter.py
+    |   |   |-- kyber_cipher/
     |   |   |   |-- config.yaml
-    |   |   |   `-- flowbacker.py
-    |   |   |-- flowcreator/
-    |   |   |   |-- agentic_skill.md
+    |   |   |   `-- kyber_cipher.py
+    |   |   |-- kyber_decipher/
     |   |   |   |-- config.yaml
-    |   |   |   `-- flowcreator.py
-    |   |   |-- flowhypervisor/
+    |   |   |   `-- kyber_decipher.py
+    |   |   |-- kyber_keygen/
     |   |   |   |-- config.yaml
-    |   |   |   |-- flowhypervisor.py
-    |   |   |   |-- hypervisor_alert.wav
-    |   |   |   `-- monitoring-prompt.pmt
-    |   |   |-- forker/
+    |   |   |   `-- kyber_keygen.py
+    |   |   |-- mongoxer/
     |   |   |   |-- config.yaml
-    |   |   |   `-- forker.py
-    |   |   |-- gateway_relayer/</a:t>
+    |   |   |   `-- mongoxer.py
+    |   |   |-- monitor_log/
+    |   |   |   |-- config.yaml
+    |   |   |   `-- monitor_log.py
+    |   |   |-- monitor_netstat/</a:t>
             </a:r>
           </a:p>
         </p:txBody>
@@ -47635,7 +47344,7 @@
                 </a:solidFill>
                 <a:latin typeface="Aptos Display"/>
               </a:rPr>
-              <a:t>Tracked File Tree Appendix 12/27</a:t>
+              <a:t>Tracked File Tree Appendix 14/28</a:t>
             </a:r>
           </a:p>
         </p:txBody>
@@ -47671,35 +47380,35 @@
                 <a:latin typeface="Cascadia Mono"/>
               </a:rPr>
               <a:t>    |   |   |   |-- config.yaml
-    |   |   |   |-- gateway_relayer.md
-    |   |   |   `-- gateway_relayer.py
-    |   |   |-- gatewayer/
+    |   |   |   `-- monitor_netstat.py
+    |   |   |-- mouser/
     |   |   |   |-- config.yaml
-    |   |   |   |-- gatewayer.md
-    |   |   |   |-- gatewayer.py
-    |   |   |   `-- gatewayer_explanation.md
-    |   |   |-- gitter/
+    |   |   |   `-- mouser.py
+    |   |   |-- mover/
     |   |   |   |-- config.yaml
-    |   |   |   `-- gitter.py
-    |   |   |-- googler/
+    |   |   |   `-- mover.py
+    |   |   |-- node_manager/
     |   |   |   |-- config.yaml
-    |   |   |   `-- googler.py
-    |   |   |-- image_interpreter/
+    |   |   |   |-- node_manager.md
+    |   |   |   |-- node_manager.py
+    |   |   |   |-- nodes_example.json
+    |   |   |   `-- nodes_example.yaml
+    |   |   |-- notifier/
     |   |   |   |-- config.yaml
-    |   |   |   `-- image_interpreter.py
-    |   |   |-- j_decompiler/
+    |   |   |   `-- notifier.py
+    |   |   |-- or/
     |   |   |   |-- config.yaml
-    |   |   |   `-- j_decompiler.py
-    |   |   |-- jenkinser/
+    |   |   |   `-- or.py
+    |   |   |-- parametrizer/
     |   |   |   |-- config.yaml
-    |   |   |   `-- jenkinser.py
-    |   |   |-- kalier/
+    |   |   |   `-- parametrizer.py
+    |   |   |-- playwrighter/
     |   |   |   |-- config.yaml
-    |   |   |   `-- kalier.py
-    |   |   |-- keyboarder/
+    |   |   |   `-- playwrighter.py
+    |   |   |-- prompter/
     |   |   |   |-- config.yaml
-    |   |   |   `-- keyboarder.py
-    |   |   |-- kuberneter/
+    |   |   |   `-- prompter.py
+    |   |   |-- pser/
     |   |   |   |-- config.yaml</a:t>
             </a:r>
           </a:p>
@@ -48003,7 +47712,7 @@
                 </a:solidFill>
                 <a:latin typeface="Aptos Display"/>
               </a:rPr>
-              <a:t>Tracked File Tree Appendix 13/27</a:t>
+              <a:t>Tracked File Tree Appendix 15/28</a:t>
             </a:r>
           </a:p>
         </p:txBody>
@@ -48038,37 +47747,37 @@
                 </a:solidFill>
                 <a:latin typeface="Cascadia Mono"/>
               </a:rPr>
-              <a:t>    |   |   |   `-- kuberneter.py
-    |   |   |-- kyber_cipher/
+              <a:t>    |   |   |   `-- pser.py
+    |   |   |-- pythonxer/
     |   |   |   |-- config.yaml
-    |   |   |   `-- kyber_cipher.py
-    |   |   |-- kyber_decipher/
+    |   |   |   `-- pythonxer.py
+    |   |   |-- raiser/
     |   |   |   |-- config.yaml
-    |   |   |   `-- kyber_decipher.py
-    |   |   |-- kyber_keygen/
+    |   |   |   `-- raiser.py
+    |   |   |-- recmailer/
     |   |   |   |-- config.yaml
-    |   |   |   `-- kyber_keygen.py
-    |   |   |-- mongoxer/
+    |   |   |   `-- recmailer.py
+    |   |   |-- recorder/
     |   |   |   |-- config.yaml
-    |   |   |   `-- mongoxer.py
-    |   |   |-- monitor_log/
+    |   |   |   `-- recorder.py
+    |   |   |-- reviewer/
     |   |   |   |-- config.yaml
-    |   |   |   `-- monitor_log.py
-    |   |   |-- monitor_netstat/
+    |   |   |   `-- reviewer.py
+    |   |   |-- scper/
     |   |   |   |-- config.yaml
-    |   |   |   `-- monitor_netstat.py
-    |   |   |-- mouser/
+    |   |   |   `-- scper.py
+    |   |   |-- shoter/
     |   |   |   |-- config.yaml
-    |   |   |   `-- mouser.py
-    |   |   |-- mover/
+    |   |   |   `-- shoter.py
+    |   |   |-- sleeper/
     |   |   |   |-- config.yaml
-    |   |   |   `-- mover.py
-    |   |   |-- node_manager/
+    |   |   |   `-- sleeper.py
+    |   |   |-- sqler/
     |   |   |   |-- config.yaml
-    |   |   |   |-- node_manager.md
-    |   |   |   |-- node_manager.py
-    |   |   |   |-- nodes_example.json
-    |   |   |   `-- nodes_example.yaml</a:t>
+    |   |   |   `-- sqler.py
+    |   |   |-- ssher/
+    |   |   |   |-- config.yaml
+    |   |   |   `-- ssher.py</a:t>
             </a:r>
           </a:p>
         </p:txBody>
@@ -48371,7 +48080,7 @@
                 </a:solidFill>
                 <a:latin typeface="Aptos Display"/>
               </a:rPr>
-              <a:t>Tracked File Tree Appendix 14/27</a:t>
+              <a:t>Tracked File Tree Appendix 16/28</a:t>
             </a:r>
           </a:p>
         </p:txBody>
@@ -48406,37 +48115,37 @@
                 </a:solidFill>
                 <a:latin typeface="Cascadia Mono"/>
               </a:rPr>
-              <a:t>    |   |   |-- notifier/
+              <a:t>    |   |   |-- starter/
     |   |   |   |-- config.yaml
-    |   |   |   `-- notifier.py
-    |   |   |-- or/
+    |   |   |   `-- starter.py
+    |   |   |-- stm32er/
     |   |   |   |-- config.yaml
-    |   |   |   `-- or.py
-    |   |   |-- parametrizer/
+    |   |   |   `-- stm32er.py
+    |   |   |-- stopper/
     |   |   |   |-- config.yaml
-    |   |   |   `-- parametrizer.py
-    |   |   |-- playwrighter/
+    |   |   |   `-- stopper.py
+    |   |   |-- summarizer/
     |   |   |   |-- config.yaml
-    |   |   |   `-- playwrighter.py
-    |   |   |-- prompter/
+    |   |   |   `-- summarizer.py
+    |   |   |-- talker/
     |   |   |   |-- config.yaml
-    |   |   |   `-- prompter.py
-    |   |   |-- pser/
+    |   |   |   `-- talker.py
+    |   |   |-- telegramer/
     |   |   |   |-- config.yaml
-    |   |   |   `-- pser.py
-    |   |   |-- pythonxer/
+    |   |   |   `-- telegramer.py
+    |   |   |-- telegramrx/
     |   |   |   |-- config.yaml
-    |   |   |   `-- pythonxer.py
-    |   |   |-- raiser/
+    |   |   |   `-- telegramrx.py
+    |   |   |-- teletlamatini/
     |   |   |   |-- config.yaml
-    |   |   |   `-- raiser.py
-    |   |   |-- recmailer/
+    |   |   |   `-- teletlamatini.py
+    |   |   |-- unrealer/
     |   |   |   |-- config.yaml
-    |   |   |   `-- recmailer.py
-    |   |   |-- recorder/
+    |   |   |   `-- unrealer.py
+    |   |   |-- videoplayer/
     |   |   |   |-- config.yaml
-    |   |   |   `-- recorder.py
-    |   |   |-- reviewer/</a:t>
+    |   |   |   `-- videoplayer.py
+    |   |   |-- whatsapper/</a:t>
             </a:r>
           </a:p>
         </p:txBody>
@@ -48739,7 +48448,7 @@
                 </a:solidFill>
                 <a:latin typeface="Aptos Display"/>
               </a:rPr>
-              <a:t>Tracked File Tree Appendix 15/27</a:t>
+              <a:t>Tracked File Tree Appendix 17/28</a:t>
             </a:r>
           </a:p>
         </p:txBody>
@@ -48775,36 +48484,36 @@
                 <a:latin typeface="Cascadia Mono"/>
               </a:rPr>
               <a:t>    |   |   |   |-- config.yaml
-    |   |   |   `-- reviewer.py
-    |   |   |-- scper/
+    |   |   |   `-- whatsapper.py
+    |   |   |-- whatstlamatini/
     |   |   |   |-- config.yaml
-    |   |   |   `-- scper.py
-    |   |   |-- shoter/
+    |   |   |   `-- whatstlamatini.py
+    |   |   |-- whisperer/
     |   |   |   |-- config.yaml
-    |   |   |   `-- shoter.py
-    |   |   |-- sleeper/
-    |   |   |   |-- config.yaml
-    |   |   |   `-- sleeper.py
-    |   |   |-- sqler/
-    |   |   |   |-- config.yaml
-    |   |   |   `-- sqler.py
-    |   |   |-- ssher/
-    |   |   |   |-- config.yaml
-    |   |   |   `-- ssher.py
-    |   |   |-- starter/
-    |   |   |   |-- config.yaml
-    |   |   |   `-- starter.py
-    |   |   |-- stm32er/
-    |   |   |   |-- config.yaml
-    |   |   |   `-- stm32er.py
-    |   |   |-- stopper/
-    |   |   |   |-- config.yaml
-    |   |   |   `-- stopper.py
-    |   |   |-- summarizer/
-    |   |   |   |-- config.yaml
-    |   |   |   `-- summarizer.py
-    |   |   |-- telegramer/
-    |   |   |   |-- config.yaml</a:t>
+    |   |   |   `-- whisperer.py
+    |   |   `-- windower/
+    |   |       |-- config.yaml
+    |   |       `-- windower.py
+    |   |-- doc_generation/
+    |   |   |-- complete_project_docs.py
+    |   |   |-- mardown_to_pdf.py
+    |   |   |-- refresh_project_docs.py
+    |   |   `-- test_output.pdf
+    |   |-- images/
+    |   |   |-- HiIamTlamatini.png
+    |   |   |-- mockup.jpg
+    |   |   |-- RealisticTlamatini.png
+    |   |   |-- ShouldersUoTlamatini.png
+    |   |   |-- Tlamatini AI Agentic Advisor Video.mp4
+    |   |   |-- TlamatiniAbout.jpg
+    |   |   |-- TlamatiniDrawings.png
+    |   |   |-- TlammatiniLetsMakeSomeMagic.mp4
+    |   |   |-- TorsoTlamatini.png
+    |   |   `-- XAIHT-Tlamatini.mp4
+    |   |-- imaging/
+    |   |   |-- converter.py
+    |   |   |-- image_interpreter.py
+    |   |   `-- screenshot.py</a:t>
             </a:r>
           </a:p>
         </p:txBody>
@@ -49107,7 +48816,7 @@
                 </a:solidFill>
                 <a:latin typeface="Aptos Display"/>
               </a:rPr>
-              <a:t>Tracked File Tree Appendix 16/27</a:t>
+              <a:t>Tracked File Tree Appendix 18/28</a:t>
             </a:r>
           </a:p>
         </p:txBody>
@@ -49142,37 +48851,37 @@
                 </a:solidFill>
                 <a:latin typeface="Cascadia Mono"/>
               </a:rPr>
-              <a:t>    |   |   |   `-- telegramer.py
-    |   |   |-- telegramrx/
-    |   |   |   |-- config.yaml
-    |   |   |   `-- telegramrx.py
-    |   |   |-- teletlamatini/
-    |   |   |   |-- config.yaml
-    |   |   |   `-- teletlamatini.py
-    |   |   |-- unrealer/
-    |   |   |   |-- config.yaml
-    |   |   |   `-- unrealer.py
-    |   |   |-- videoplayer/
-    |   |   |   |-- config.yaml
-    |   |   |   `-- videoplayer.py
-    |   |   |-- whatsapper/
-    |   |   |   |-- config.yaml
-    |   |   |   `-- whatsapper.py
-    |   |   |-- whatstlamatini/
-    |   |   |   |-- config.yaml
-    |   |   |   `-- whatstlamatini.py
-    |   |   `-- windower/
-    |   |       |-- config.yaml
-    |   |       `-- windower.py
-    |   |-- doc_generation/
-    |   |   |-- complete_project_docs.py
-    |   |   |-- mardown_to_pdf.py
-    |   |   |-- refresh_project_docs.py
-    |   |   `-- test_output.pdf
-    |   |-- images/
-    |   |   |-- HiIamTlamatini.png
-    |   |   |-- mockup.jpg
-    |   |   |-- RealisticTlamatini.png</a:t>
+              <a:t>    |   |-- management/
+    |   |   |-- __init__.py
+    |   |   `-- commands/
+    |   |       |-- acpx_lint.py
+    |   |       `-- startserver.py
+    |   |-- migrations/
+    |   |   |-- 0001_initial.py
+    |   |   |-- 0002_populate_db.py
+    |   |   |-- 0003_add_cleaner.py
+    |   |   |-- 0004_add_deleter.py
+    |   |   |-- 0005_add_executer.py
+    |   |   |-- 0006_add_notifier.py
+    |   |   |-- 0007_add_stopper.py
+    |   |   |-- 0008_add_recmailer.py
+    |   |   |-- 0009_add_whatsapper.py
+    |   |   |-- 0010_add_pythonxer.py
+    |   |   |-- 0011_add_asker.py
+    |   |   |-- 0012_repopulate_all_agents.py
+    |   |   |-- 0013_add_forker.py
+    |   |   |-- 0014_repopulate_all_agents.py
+    |   |   |-- 0015_add_shoter.py
+    |   |   |-- 0016_repopulate_all_agents.py
+    |   |   |-- 0017_add_ssher.py
+    |   |   |-- 0018_repopulate_all_agents.py
+    |   |   |-- 0019_add_scper.py
+    |   |   |-- 0020_repopulate_all_agents.py
+    |   |   |-- 0021_add_telegramrx.py
+    |   |   |-- 0022_repopulate_all_agents.py
+    |   |   |-- 0023_add_mongoxer.py
+    |   |   |-- 0024_repopulate_all_agents.py
+    |   |   |-- 0025_add_telegramer.py</a:t>
             </a:r>
           </a:p>
         </p:txBody>
@@ -49475,7 +49184,7 @@
                 </a:solidFill>
                 <a:latin typeface="Aptos Display"/>
               </a:rPr>
-              <a:t>Tracked File Tree Appendix 17/27</a:t>
+              <a:t>Tracked File Tree Appendix 19/28</a:t>
             </a:r>
           </a:p>
         </p:txBody>
@@ -49510,37 +49219,37 @@
                 </a:solidFill>
                 <a:latin typeface="Cascadia Mono"/>
               </a:rPr>
-              <a:t>    |   |   |-- ShouldersUoTlamatini.png
-    |   |   |-- Tlamatini AI Agentic Advisor Video.mp4
-    |   |   |-- TlamatiniAbout.jpg
-    |   |   |-- TlamatiniDrawings.png
-    |   |   |-- TlammatiniLetsMakeSomeMagic.mp4
-    |   |   |-- TorsoTlamatini.png
-    |   |   `-- XAIHT-Tlamatini.mp4
-    |   |-- imaging/
-    |   |   |-- converter.py
-    |   |   |-- image_interpreter.py
-    |   |   `-- screenshot.py
-    |   |-- management/
-    |   |   |-- __init__.py
-    |   |   `-- commands/
-    |   |       |-- acpx_lint.py
-    |   |       `-- startserver.py
-    |   |-- migrations/
-    |   |   |-- 0001_initial.py
-    |   |   |-- 0002_populate_db.py
-    |   |   |-- 0003_add_cleaner.py
-    |   |   |-- 0004_add_deleter.py
-    |   |   |-- 0005_add_executer.py
-    |   |   |-- 0006_add_notifier.py
-    |   |   |-- 0007_add_stopper.py
-    |   |   |-- 0008_add_recmailer.py
-    |   |   |-- 0009_add_whatsapper.py
-    |   |   |-- 0010_add_pythonxer.py
-    |   |   |-- 0011_add_asker.py
-    |   |   |-- 0012_repopulate_all_agents.py
-    |   |   |-- 0013_add_forker.py
-    |   |   |-- 0014_repopulate_all_agents.py</a:t>
+              <a:t>    |   |   |-- 0026_repopulate_all_agents.py
+    |   |   |-- 0027_add_sqler.py
+    |   |   |-- 0028_repopulate_all_agents.py
+    |   |   |-- 0029_add_prompter.py
+    |   |   |-- 0030_repopulate_all_agents.py
+    |   |   |-- 0031_add_flowcreator.py
+    |   |   |-- 0032_repopulate_all_agents.py
+    |   |   |-- 0033_add_gitter.py
+    |   |   |-- 0034_add_dockerer.py
+    |   |   |-- 0035_add_pser.py
+    |   |   |-- 0036_add_kuberneter.py
+    |   |   |-- 0037_add_apirer.py
+    |   |   |-- 0038_add_jenkinser.py
+    |   |   |-- 0039_add_crawler.py
+    |   |   |-- 0040_add_summarizer.py
+    |   |   |-- 0041_add_flowhypervisor.py
+    |   |   |-- 0042_add_mouser.py
+    |   |   |-- 0043_agentmessage_conversation_user.py
+    |   |   |-- 0044_add_counter.py
+    |   |   |-- 0045_add_file_interpreter.py
+    |   |   |-- 0046_add_image_interpreter.py
+    |   |   |-- 0047_add_gatewayer.py
+    |   |   |-- 0048_add_gateway_relayer.py
+    |   |   |-- 0049_add_node_manager.py
+    |   |   |-- 0050_add_file_creator.py
+    |   |   |-- 0051_add_file_extractor.py
+    |   |   |-- 0052_add_kyber_keygen.py
+    |   |   |-- 0053_add_kyber_cipher.py
+    |   |   |-- 0054_add_kyber_decipher.py
+    |   |   |-- 0055_fix_kyber_cipher_names.py
+    |   |   |-- 0056_add_parametrizer.py</a:t>
             </a:r>
           </a:p>
         </p:txBody>
@@ -49843,7 +49552,7 @@
                 </a:solidFill>
                 <a:latin typeface="Aptos Display"/>
               </a:rPr>
-              <a:t>Tracked File Tree Appendix 18/27</a:t>
+              <a:t>Tracked File Tree Appendix 20/28</a:t>
             </a:r>
           </a:p>
         </p:txBody>
@@ -49878,37 +49587,37 @@
                 </a:solidFill>
                 <a:latin typeface="Cascadia Mono"/>
               </a:rPr>
-              <a:t>    |   |   |-- 0015_add_shoter.py
-    |   |   |-- 0016_repopulate_all_agents.py
-    |   |   |-- 0017_add_ssher.py
-    |   |   |-- 0018_repopulate_all_agents.py
-    |   |   |-- 0019_add_scper.py
-    |   |   |-- 0020_repopulate_all_agents.py
-    |   |   |-- 0021_add_telegramrx.py
-    |   |   |-- 0022_repopulate_all_agents.py
-    |   |   |-- 0023_add_mongoxer.py
-    |   |   |-- 0024_repopulate_all_agents.py
-    |   |   |-- 0025_add_telegramer.py
-    |   |   |-- 0026_repopulate_all_agents.py
-    |   |   |-- 0027_add_sqler.py
-    |   |   |-- 0028_repopulate_all_agents.py
-    |   |   |-- 0029_add_prompter.py
-    |   |   |-- 0030_repopulate_all_agents.py
-    |   |   |-- 0031_add_flowcreator.py
-    |   |   |-- 0032_repopulate_all_agents.py
-    |   |   |-- 0033_add_gitter.py
-    |   |   |-- 0034_add_dockerer.py
-    |   |   |-- 0035_add_pser.py
-    |   |   |-- 0036_add_kuberneter.py
-    |   |   |-- 0037_add_apirer.py
-    |   |   |-- 0038_add_jenkinser.py
-    |   |   |-- 0039_add_crawler.py
-    |   |   |-- 0040_add_summarizer.py
-    |   |   |-- 0041_add_flowhypervisor.py
-    |   |   |-- 0042_add_mouser.py
-    |   |   |-- 0043_agentmessage_conversation_user.py
-    |   |   |-- 0044_add_counter.py
-    |   |   |-- 0045_add_file_interpreter.py</a:t>
+              <a:t>    |   |   |-- 0057_add_flowbacker.py
+    |   |   |-- 0058_add_barrier.py
+    |   |   |-- 0059_add_j_decompiler.py
+    |   |   |-- 0060_add_agent_parametrizer_tool.py
+    |   |   |-- 0061_add_agent_starter_tool.py
+    |   |   |-- 0062_sync_agent_control_tools_and_prompts.py
+    |   |   |-- 0063_add_agent_parametrizer_prompt.py
+    |   |   |-- 0064_add_chat_agent_run_model.py
+    |   |   |-- 0065_add_chat_wrapped_agent_tools.py
+    |   |   |-- 0066_add_keyboarder.py
+    |   |   |-- 0067_add_multi_turn_demo_prompts.py
+    |   |   |-- 0068_add_googler_tool.py
+    |   |   |-- 0069_add_googler_agent.py
+    |   |   |-- 0070_add_teletlamatini.py
+    |   |   |-- 0071_acpx_skills.py
+    |   |   |-- 0072_add_acpx_demo_prompts.py
+    |   |   |-- 0073_acpx_demo_gemini_uplift.py
+    |   |   |-- 0074_simplify_demo_prompts.py
+    |   |   |-- 0075_add_acpx_tool_surface.py
+    |   |   |-- 0076_add_acpxer.py
+    |   |   |-- 0077_add_whatstlamatini.py
+    |   |   |-- 0078_add_chat_agent_keyboarder_tool.py
+    |   |   |-- 0079_add_chat_agent_mouser_tool.py
+    |   |   |-- 0080_add_chat_agent_sleeper_tool.py
+    |   |   |-- 0081_add_window_present_and_run_wait_tools.py
+    |   |   |-- 0082_add_chat_agent_j_decompiler_tool.py
+    |   |   |-- 0083_add_de_compresser.py
+    |   |   |-- 0084_add_chat_agent_de_compresser_tool.py
+    |   |   |-- 0085_add_unrealer.py
+    |   |   |-- 0086_add_chat_agent_unrealer_tool.py
+    |   |   |-- 0087_add_unrealer_demo_prompt.py</a:t>
             </a:r>
           </a:p>
         </p:txBody>
@@ -50211,7 +49920,7 @@
                 </a:solidFill>
                 <a:latin typeface="Aptos Display"/>
               </a:rPr>
-              <a:t>Tracked File Tree Appendix 19/27</a:t>
+              <a:t>Tracked File Tree Appendix 21/28</a:t>
             </a:r>
           </a:p>
         </p:txBody>
@@ -50246,37 +49955,37 @@
                 </a:solidFill>
                 <a:latin typeface="Cascadia Mono"/>
               </a:rPr>
-              <a:t>    |   |   |-- 0046_add_image_interpreter.py
-    |   |   |-- 0047_add_gatewayer.py
-    |   |   |-- 0048_add_gateway_relayer.py
-    |   |   |-- 0049_add_node_manager.py
-    |   |   |-- 0050_add_file_creator.py
-    |   |   |-- 0051_add_file_extractor.py
-    |   |   |-- 0052_add_kyber_keygen.py
-    |   |   |-- 0053_add_kyber_cipher.py
-    |   |   |-- 0054_add_kyber_decipher.py
-    |   |   |-- 0055_fix_kyber_cipher_names.py
-    |   |   |-- 0056_add_parametrizer.py
-    |   |   |-- 0057_add_flowbacker.py
-    |   |   |-- 0058_add_barrier.py
-    |   |   |-- 0059_add_j_decompiler.py
-    |   |   |-- 0060_add_agent_parametrizer_tool.py
-    |   |   |-- 0061_add_agent_starter_tool.py
-    |   |   |-- 0062_sync_agent_control_tools_and_prompts.py
-    |   |   |-- 0063_add_agent_parametrizer_prompt.py
-    |   |   |-- 0064_add_chat_agent_run_model.py
-    |   |   |-- 0065_add_chat_wrapped_agent_tools.py
-    |   |   |-- 0066_add_keyboarder.py
-    |   |   |-- 0067_add_multi_turn_demo_prompts.py
-    |   |   |-- 0068_add_googler_tool.py
-    |   |   |-- 0069_add_googler_agent.py
-    |   |   |-- 0070_add_teletlamatini.py
-    |   |   |-- 0071_acpx_skills.py
-    |   |   |-- 0072_add_acpx_demo_prompts.py
-    |   |   |-- 0073_acpx_demo_gemini_uplift.py
-    |   |   |-- 0074_simplify_demo_prompts.py
-    |   |   |-- 0075_add_acpx_tool_surface.py
-    |   |   |-- 0076_add_acpxer.py</a:t>
+              <a:t>    |   |   |-- 0088_add_reviewer.py
+    |   |   |-- 0089_add_analyzer.py
+    |   |   |-- 0090_add_reviewer_analyzer_demo_prompts.py
+    |   |   |-- 0091_add_playwrighter.py
+    |   |   |-- 0092_add_chat_agent_playwrighter_tool.py
+    |   |   |-- 0093_add_windower.py
+    |   |   |-- 0094_add_chat_agent_windower_tool.py
+    |   |   |-- 0095_add_windower_playwrighter_demo_prompts.py
+    |   |   |-- 0096_add_director_virtuoso_demo_prompts.py
+    |   |   |-- 0097_add_kalier.py
+    |   |   |-- 0098_add_chat_agent_kalier_tool.py
+    |   |   |-- 0099_add_kalier_demo_prompts.py
+    |   |   |-- 0100_add_unrealer_extended_demo_prompts.py
+    |   |   |-- 0101_add_stm32er.py
+    |   |   |-- 0102_add_chat_agent_stm32er_tool.py
+    |   |   |-- 0103_add_stm32er_demo_prompts.py
+    |   |   |-- 0104_fix_stm32er_hil_serial_proof.py
+    |   |   |-- 0105_add_esp32er.py
+    |   |   |-- 0106_add_chat_agent_esp32er_tool.py
+    |   |   |-- 0107_add_esp32er_demo_prompts.py
+    |   |   |-- 0108_add_flow_making_demo_prompt.py
+    |   |   |-- 0109_add_arduiner.py
+    |   |   |-- 0110_add_chat_agent_arduiner_tool.py
+    |   |   |-- 0111_add_arduiner_demo_prompts.py
+    |   |   |-- 0112_add_camcorder.py
+    |   |   |-- 0113_add_chat_agent_camcorder_tool.py
+    |   |   |-- 0114_add_recorder.py
+    |   |   |-- 0115_add_chat_agent_recorder_tool.py
+    |   |   |-- 0116_add_audioplayer.py
+    |   |   |-- 0117_add_chat_agent_audioplayer_tool.py
+    |   |   |-- 0118_add_videoplayer.py</a:t>
             </a:r>
           </a:p>
         </p:txBody>
@@ -50579,7 +50288,7 @@
                 </a:solidFill>
                 <a:latin typeface="Aptos Display"/>
               </a:rPr>
-              <a:t>Tracked File Tree Appendix 20/27</a:t>
+              <a:t>Tracked File Tree Appendix 22/28</a:t>
             </a:r>
           </a:p>
         </p:txBody>
@@ -50614,37 +50323,37 @@
                 </a:solidFill>
                 <a:latin typeface="Cascadia Mono"/>
               </a:rPr>
-              <a:t>    |   |   |-- 0077_add_whatstlamatini.py
-    |   |   |-- 0078_add_chat_agent_keyboarder_tool.py
-    |   |   |-- 0079_add_chat_agent_mouser_tool.py
-    |   |   |-- 0080_add_chat_agent_sleeper_tool.py
-    |   |   |-- 0081_add_window_present_and_run_wait_tools.py
-    |   |   |-- 0082_add_chat_agent_j_decompiler_tool.py
-    |   |   |-- 0083_add_de_compresser.py
-    |   |   |-- 0084_add_chat_agent_de_compresser_tool.py
-    |   |   |-- 0085_add_unrealer.py
-    |   |   |-- 0086_add_chat_agent_unrealer_tool.py
-    |   |   |-- 0087_add_unrealer_demo_prompt.py
-    |   |   |-- 0088_add_reviewer.py
-    |   |   |-- 0089_add_analyzer.py
-    |   |   |-- 0090_add_reviewer_analyzer_demo_prompts.py
-    |   |   |-- 0091_add_playwrighter.py
-    |   |   |-- 0092_add_chat_agent_playwrighter_tool.py
-    |   |   |-- 0093_add_windower.py
-    |   |   |-- 0094_add_chat_agent_windower_tool.py
-    |   |   |-- 0095_add_windower_playwrighter_demo_prompts.py
-    |   |   |-- 0096_add_director_virtuoso_demo_prompts.py
-    |   |   |-- 0097_add_kalier.py
-    |   |   |-- 0098_add_chat_agent_kalier_tool.py
-    |   |   |-- 0099_add_kalier_demo_prompts.py
-    |   |   |-- 0100_add_unrealer_extended_demo_prompts.py
-    |   |   |-- 0101_add_stm32er.py
-    |   |   |-- 0102_add_chat_agent_stm32er_tool.py
-    |   |   |-- 0103_add_stm32er_demo_prompts.py
-    |   |   |-- 0104_fix_stm32er_hil_serial_proof.py
-    |   |   |-- 0105_add_esp32er.py
-    |   |   |-- 0106_add_chat_agent_esp32er_tool.py
-    |   |   |-- 0107_add_esp32er_demo_prompts.py</a:t>
+              <a:t>    |   |   |-- 0119_add_chat_agent_videoplayer_tool.py
+    |   |   |-- 0120_add_talker.py
+    |   |   |-- 0121_add_chat_agent_talker_tool.py
+    |   |   |-- 0122_add_talker_demo_prompt.py
+    |   |   |-- 0123_add_whisperer.py
+    |   |   |-- 0124_add_chat_agent_whisperer_tool.py
+    |   |   |-- 0125_add_whisperer_demo_prompt.py
+    |   |   `-- __init__.py
+    |   |-- monitors/
+    |   |   `-- monitor_sql.py
+    |   |-- opus_client/
+    |   |   |-- claude_opus_client.py
+    |   |   |-- examples.py
+    |   |   `-- README.md
+    |   |-- rag/
+    |   |   |-- __init__.py
+    |   |   |-- config.py
+    |   |   |-- factory.py
+    |   |   |-- interaction.py
+    |   |   |-- interface.py
+    |   |   |-- loaders.py
+    |   |   |-- prompts.py
+    |   |   |-- retrieval.py
+    |   |   |-- splitters.py
+    |   |   |-- utils.py
+    |   |   `-- chains/
+    |   |       |-- base.py
+    |   |       |-- basic.py
+    |   |       |-- history_aware.py
+    |   |       `-- unified.py
+    |   |-- services/</a:t>
             </a:r>
           </a:p>
         </p:txBody>
@@ -51718,7 +51427,7 @@
                 </a:solidFill>
                 <a:latin typeface="Aptos Display"/>
               </a:rPr>
-              <a:t>Tracked File Tree Appendix 21/27</a:t>
+              <a:t>Tracked File Tree Appendix 23/28</a:t>
             </a:r>
           </a:p>
         </p:txBody>
@@ -51753,380 +51462,7 @@
                 </a:solidFill>
                 <a:latin typeface="Cascadia Mono"/>
               </a:rPr>
-              <a:t>    |   |   |-- 0108_add_flow_making_demo_prompt.py
-    |   |   |-- 0109_add_arduiner.py
-    |   |   |-- 0110_add_chat_agent_arduiner_tool.py
-    |   |   |-- 0111_add_arduiner_demo_prompts.py
-    |   |   |-- 0112_add_camcorder.py
-    |   |   |-- 0113_add_chat_agent_camcorder_tool.py
-    |   |   |-- 0114_add_recorder.py
-    |   |   |-- 0115_add_chat_agent_recorder_tool.py
-    |   |   |-- 0116_add_audioplayer.py
-    |   |   |-- 0117_add_chat_agent_audioplayer_tool.py
-    |   |   |-- 0118_add_videoplayer.py
-    |   |   |-- 0119_add_chat_agent_videoplayer_tool.py
-    |   |   `-- __init__.py
-    |   |-- monitors/
-    |   |   `-- monitor_sql.py
-    |   |-- opus_client/
-    |   |   |-- claude_opus_client.py
-    |   |   |-- examples.py
-    |   |   `-- README.md
-    |   |-- rag/
-    |   |   |-- __init__.py
-    |   |   |-- config.py
-    |   |   |-- factory.py
-    |   |   |-- interaction.py
-    |   |   |-- interface.py
-    |   |   |-- loaders.py
-    |   |   |-- prompts.py
-    |   |   |-- retrieval.py
-    |   |   |-- splitters.py
-    |   |   |-- utils.py
-    |   |   `-- chains/</a:t>
-            </a:r>
-          </a:p>
-        </p:txBody>
-      </p:sp>
-    </p:spTree>
-  </p:cSld>
-  <p:clrMapOvr>
-    <a:masterClrMapping/>
-  </p:clrMapOvr>
-</p:sld>
-</file>
-
-<file path=ppt/slides/slide81.xml><?xml version="1.0" encoding="utf-8"?>
-<p:sld xmlns:a="http://schemas.openxmlformats.org/drawingml/2006/main" xmlns:p="http://schemas.openxmlformats.org/presentationml/2006/main" xmlns:r="http://schemas.openxmlformats.org/officeDocument/2006/relationships">
-  <p:cSld>
-    <p:spTree>
-      <p:nvGrpSpPr>
-        <p:cNvPr id="1" name=""/>
-        <p:cNvGrpSpPr/>
-        <p:nvPr/>
-      </p:nvGrpSpPr>
-      <p:grpSpPr/>
-      <p:sp>
-        <p:nvSpPr>
-          <p:cNvPr id="2" name="Rectangle 1"/>
-          <p:cNvSpPr/>
-          <p:nvPr/>
-        </p:nvSpPr>
-        <p:spPr>
-          <a:xfrm>
-            <a:off x="0" y="0"/>
-            <a:ext cx="12191695" cy="6858000"/>
-          </a:xfrm>
-          <a:prstGeom prst="rect">
-            <a:avLst/>
-          </a:prstGeom>
-          <a:solidFill>
-            <a:srgbClr val="080D0D"/>
-          </a:solidFill>
-          <a:ln>
-            <a:noFill/>
-          </a:ln>
-        </p:spPr>
-        <p:style>
-          <a:lnRef idx="1">
-            <a:schemeClr val="accent1"/>
-          </a:lnRef>
-          <a:fillRef idx="3">
-            <a:schemeClr val="accent1"/>
-          </a:fillRef>
-          <a:effectRef idx="2">
-            <a:schemeClr val="accent1"/>
-          </a:effectRef>
-          <a:fontRef idx="minor">
-            <a:schemeClr val="lt1"/>
-          </a:fontRef>
-        </p:style>
-        <p:txBody>
-          <a:bodyPr rtlCol="0" anchor="ctr"/>
-          <a:lstStyle/>
-          <a:p>
-            <a:pPr algn="ctr"/>
-          </a:p>
-        </p:txBody>
-      </p:sp>
-      <p:sp>
-        <p:nvSpPr>
-          <p:cNvPr id="3" name="Rectangle 2"/>
-          <p:cNvSpPr/>
-          <p:nvPr/>
-        </p:nvSpPr>
-        <p:spPr>
-          <a:xfrm>
-            <a:off x="320040" y="384048"/>
-            <a:ext cx="36576" cy="6080760"/>
-          </a:xfrm>
-          <a:prstGeom prst="rect">
-            <a:avLst/>
-          </a:prstGeom>
-          <a:solidFill>
-            <a:srgbClr val="C48052"/>
-          </a:solidFill>
-          <a:ln>
-            <a:noFill/>
-          </a:ln>
-        </p:spPr>
-        <p:style>
-          <a:lnRef idx="1">
-            <a:schemeClr val="accent1"/>
-          </a:lnRef>
-          <a:fillRef idx="3">
-            <a:schemeClr val="accent1"/>
-          </a:fillRef>
-          <a:effectRef idx="2">
-            <a:schemeClr val="accent1"/>
-          </a:effectRef>
-          <a:fontRef idx="minor">
-            <a:schemeClr val="lt1"/>
-          </a:fontRef>
-        </p:style>
-        <p:txBody>
-          <a:bodyPr rtlCol="0" anchor="ctr"/>
-          <a:lstStyle/>
-          <a:p>
-            <a:pPr algn="ctr"/>
-          </a:p>
-        </p:txBody>
-      </p:sp>
-      <p:sp>
-        <p:nvSpPr>
-          <p:cNvPr id="4" name="Rectangle 3"/>
-          <p:cNvSpPr/>
-          <p:nvPr/>
-        </p:nvSpPr>
-        <p:spPr>
-          <a:xfrm>
-            <a:off x="11716207" y="384048"/>
-            <a:ext cx="36576" cy="6080760"/>
-          </a:xfrm>
-          <a:prstGeom prst="rect">
-            <a:avLst/>
-          </a:prstGeom>
-          <a:solidFill>
-            <a:srgbClr val="C48052"/>
-          </a:solidFill>
-          <a:ln>
-            <a:noFill/>
-          </a:ln>
-        </p:spPr>
-        <p:style>
-          <a:lnRef idx="1">
-            <a:schemeClr val="accent1"/>
-          </a:lnRef>
-          <a:fillRef idx="3">
-            <a:schemeClr val="accent1"/>
-          </a:fillRef>
-          <a:effectRef idx="2">
-            <a:schemeClr val="accent1"/>
-          </a:effectRef>
-          <a:fontRef idx="minor">
-            <a:schemeClr val="lt1"/>
-          </a:fontRef>
-        </p:style>
-        <p:txBody>
-          <a:bodyPr rtlCol="0" anchor="ctr"/>
-          <a:lstStyle/>
-          <a:p>
-            <a:pPr algn="ctr"/>
-          </a:p>
-        </p:txBody>
-      </p:sp>
-      <p:sp>
-        <p:nvSpPr>
-          <p:cNvPr id="5" name="Rectangle 4"/>
-          <p:cNvSpPr/>
-          <p:nvPr/>
-        </p:nvSpPr>
-        <p:spPr>
-          <a:xfrm>
-            <a:off x="502920" y="384048"/>
-            <a:ext cx="11155680" cy="27432"/>
-          </a:xfrm>
-          <a:prstGeom prst="rect">
-            <a:avLst/>
-          </a:prstGeom>
-          <a:solidFill>
-            <a:srgbClr val="C48052"/>
-          </a:solidFill>
-          <a:ln>
-            <a:noFill/>
-          </a:ln>
-        </p:spPr>
-        <p:style>
-          <a:lnRef idx="1">
-            <a:schemeClr val="accent1"/>
-          </a:lnRef>
-          <a:fillRef idx="3">
-            <a:schemeClr val="accent1"/>
-          </a:fillRef>
-          <a:effectRef idx="2">
-            <a:schemeClr val="accent1"/>
-          </a:effectRef>
-          <a:fontRef idx="minor">
-            <a:schemeClr val="lt1"/>
-          </a:fontRef>
-        </p:style>
-        <p:txBody>
-          <a:bodyPr rtlCol="0" anchor="ctr"/>
-          <a:lstStyle/>
-          <a:p>
-            <a:pPr algn="ctr"/>
-          </a:p>
-        </p:txBody>
-      </p:sp>
-      <p:sp>
-        <p:nvSpPr>
-          <p:cNvPr id="6" name="Rectangle 5"/>
-          <p:cNvSpPr/>
-          <p:nvPr/>
-        </p:nvSpPr>
-        <p:spPr>
-          <a:xfrm>
-            <a:off x="502920" y="6437376"/>
-            <a:ext cx="11155680" cy="27432"/>
-          </a:xfrm>
-          <a:prstGeom prst="rect">
-            <a:avLst/>
-          </a:prstGeom>
-          <a:solidFill>
-            <a:srgbClr val="C48052"/>
-          </a:solidFill>
-          <a:ln>
-            <a:noFill/>
-          </a:ln>
-        </p:spPr>
-        <p:style>
-          <a:lnRef idx="1">
-            <a:schemeClr val="accent1"/>
-          </a:lnRef>
-          <a:fillRef idx="3">
-            <a:schemeClr val="accent1"/>
-          </a:fillRef>
-          <a:effectRef idx="2">
-            <a:schemeClr val="accent1"/>
-          </a:effectRef>
-          <a:fontRef idx="minor">
-            <a:schemeClr val="lt1"/>
-          </a:fontRef>
-        </p:style>
-        <p:txBody>
-          <a:bodyPr rtlCol="0" anchor="ctr"/>
-          <a:lstStyle/>
-          <a:p>
-            <a:pPr algn="ctr"/>
-          </a:p>
-        </p:txBody>
-      </p:sp>
-      <p:sp>
-        <p:nvSpPr>
-          <p:cNvPr id="7" name="TextBox 6"/>
-          <p:cNvSpPr txBox="1"/>
-          <p:nvPr/>
-        </p:nvSpPr>
-        <p:spPr>
-          <a:xfrm>
-            <a:off x="713232" y="548640"/>
-            <a:ext cx="10698480" cy="301752"/>
-          </a:xfrm>
-          <a:prstGeom prst="rect">
-            <a:avLst/>
-          </a:prstGeom>
-          <a:noFill/>
-        </p:spPr>
-        <p:txBody>
-          <a:bodyPr wrap="square" anchor="t">
-            <a:spAutoFit/>
-          </a:bodyPr>
-          <a:lstStyle/>
-          <a:p>
-            <a:pPr algn="l"/>
-            <a:r>
-              <a:rPr sz="1000" b="1">
-                <a:solidFill>
-                  <a:srgbClr val="C48052"/>
-                </a:solidFill>
-                <a:latin typeface="Aptos"/>
-              </a:rPr>
-              <a:t>COMPLETE TRACKED FILE TREE, NO TRACKED FILE OMITTED</a:t>
-            </a:r>
-          </a:p>
-        </p:txBody>
-      </p:sp>
-      <p:sp>
-        <p:nvSpPr>
-          <p:cNvPr id="8" name="TextBox 7"/>
-          <p:cNvSpPr txBox="1"/>
-          <p:nvPr/>
-        </p:nvSpPr>
-        <p:spPr>
-          <a:xfrm>
-            <a:off x="694944" y="850392"/>
-            <a:ext cx="10881360" cy="566928"/>
-          </a:xfrm>
-          <a:prstGeom prst="rect">
-            <a:avLst/>
-          </a:prstGeom>
-          <a:noFill/>
-        </p:spPr>
-        <p:txBody>
-          <a:bodyPr wrap="square" anchor="t">
-            <a:spAutoFit/>
-          </a:bodyPr>
-          <a:lstStyle/>
-          <a:p>
-            <a:pPr algn="l"/>
-            <a:r>
-              <a:rPr sz="2700" b="0">
-                <a:solidFill>
-                  <a:srgbClr val="E8E8DE"/>
-                </a:solidFill>
-                <a:latin typeface="Aptos Display"/>
-              </a:rPr>
-              <a:t>Tracked File Tree Appendix 22/27</a:t>
-            </a:r>
-          </a:p>
-        </p:txBody>
-      </p:sp>
-      <p:sp>
-        <p:nvSpPr>
-          <p:cNvPr id="9" name="TextBox 8"/>
-          <p:cNvSpPr txBox="1"/>
-          <p:nvPr/>
-        </p:nvSpPr>
-        <p:spPr>
-          <a:xfrm>
-            <a:off x="658368" y="1426464"/>
-            <a:ext cx="10927080" cy="4956048"/>
-          </a:xfrm>
-          <a:prstGeom prst="rect">
-            <a:avLst/>
-          </a:prstGeom>
-          <a:noFill/>
-        </p:spPr>
-        <p:txBody>
-          <a:bodyPr wrap="square" anchor="t">
-            <a:spAutoFit/>
-          </a:bodyPr>
-          <a:lstStyle/>
-          <a:p>
-            <a:pPr algn="l"/>
-            <a:r>
-              <a:rPr sz="700" b="0">
-                <a:solidFill>
-                  <a:srgbClr val="E8E8DE"/>
-                </a:solidFill>
-                <a:latin typeface="Cascadia Mono"/>
-              </a:rPr>
-              <a:t>    |   |       |-- base.py
-    |   |       |-- basic.py
-    |   |       |-- history_aware.py
-    |   |       `-- unified.py
-    |   |-- services/
-    |   |   |-- __init__.py
+              <a:t>    |   |   |-- __init__.py
     |   |   |-- agent_contracts.py
     |   |   |-- agent_paths.py
     |   |   |-- answer_analizer.py
@@ -52151,7 +51487,12 @@
     |   |   |-- create_new_agent/
     |   |   |   `-- SKILL.md
     |   |   |-- create_new_mcp/
-    |   |   |   `-- SKILL.md</a:t>
+    |   |   |   `-- SKILL.md
+    |   |   |-- flow_making/
+    |   |   |   |-- SKILL.md
+    |   |   |   |-- references/
+    |   |   |   |   `-- flw_schema.md
+    |   |   |   `-- scripts/</a:t>
             </a:r>
           </a:p>
         </p:txBody>
@@ -52164,7 +51505,7 @@
 </p:sld>
 </file>
 
-<file path=ppt/slides/slide82.xml><?xml version="1.0" encoding="utf-8"?>
+<file path=ppt/slides/slide81.xml><?xml version="1.0" encoding="utf-8"?>
 <p:sld xmlns:a="http://schemas.openxmlformats.org/drawingml/2006/main" xmlns:p="http://schemas.openxmlformats.org/presentationml/2006/main" xmlns:r="http://schemas.openxmlformats.org/officeDocument/2006/relationships">
   <p:cSld>
     <p:spTree>
@@ -52232,7 +51573,7 @@
             <a:avLst/>
           </a:prstGeom>
           <a:solidFill>
-            <a:srgbClr val="48BF8F"/>
+            <a:srgbClr val="C48052"/>
           </a:solidFill>
           <a:ln>
             <a:noFill/>
@@ -52275,7 +51616,7 @@
             <a:avLst/>
           </a:prstGeom>
           <a:solidFill>
-            <a:srgbClr val="48BF8F"/>
+            <a:srgbClr val="C48052"/>
           </a:solidFill>
           <a:ln>
             <a:noFill/>
@@ -52318,7 +51659,7 @@
             <a:avLst/>
           </a:prstGeom>
           <a:solidFill>
-            <a:srgbClr val="48BF8F"/>
+            <a:srgbClr val="C48052"/>
           </a:solidFill>
           <a:ln>
             <a:noFill/>
@@ -52361,7 +51702,7 @@
             <a:avLst/>
           </a:prstGeom>
           <a:solidFill>
-            <a:srgbClr val="48BF8F"/>
+            <a:srgbClr val="C48052"/>
           </a:solidFill>
           <a:ln>
             <a:noFill/>
@@ -52415,7 +51756,7 @@
             <a:r>
               <a:rPr sz="1000" b="1">
                 <a:solidFill>
-                  <a:srgbClr val="48BF8F"/>
+                  <a:srgbClr val="C48052"/>
                 </a:solidFill>
                 <a:latin typeface="Aptos"/>
               </a:rPr>
@@ -52454,7 +51795,7 @@
                 </a:solidFill>
                 <a:latin typeface="Aptos Display"/>
               </a:rPr>
-              <a:t>Tracked File Tree Appendix 23/27</a:t>
+              <a:t>Tracked File Tree Appendix 24/28</a:t>
             </a:r>
           </a:p>
         </p:txBody>
@@ -52489,12 +51830,7 @@
                 </a:solidFill>
                 <a:latin typeface="Cascadia Mono"/>
               </a:rPr>
-              <a:t>    |   |   |-- flow_making/
-    |   |   |   |-- SKILL.md
-    |   |   |   |-- references/
-    |   |   |   |   `-- flw_schema.md
-    |   |   |   `-- scripts/
-    |   |   |       |-- make_flow.py
+              <a:t>    |   |   |       |-- make_flow.py
     |   |   |       `-- result_to_flw.py
     |   |   |-- github/
     |   |   |   `-- SKILL.md
@@ -52519,7 +51855,12 @@
     |   |   |-- slack/
     |   |   |   `-- SKILL.md
     |   |   |-- summarize/
-    |   |   |   `-- SKILL.md</a:t>
+    |   |   |   `-- SKILL.md
+    |   |   |-- tlamatini_allowed_hosts_tighten/
+    |   |   |   `-- SKILL.md
+    |   |   |-- tlamatini_csrf_exempt_audit/
+    |   |   |   `-- SKILL.md
+    |   |   |-- tlamatini_exec_report_row_adder/</a:t>
             </a:r>
           </a:p>
         </p:txBody>
@@ -52532,7 +51873,7 @@
 </p:sld>
 </file>
 
-<file path=ppt/slides/slide83.xml><?xml version="1.0" encoding="utf-8"?>
+<file path=ppt/slides/slide82.xml><?xml version="1.0" encoding="utf-8"?>
 <p:sld xmlns:a="http://schemas.openxmlformats.org/drawingml/2006/main" xmlns:p="http://schemas.openxmlformats.org/presentationml/2006/main" xmlns:r="http://schemas.openxmlformats.org/officeDocument/2006/relationships">
   <p:cSld>
     <p:spTree>
@@ -52600,7 +51941,7 @@
             <a:avLst/>
           </a:prstGeom>
           <a:solidFill>
-            <a:srgbClr val="C48052"/>
+            <a:srgbClr val="48BF8F"/>
           </a:solidFill>
           <a:ln>
             <a:noFill/>
@@ -52643,7 +51984,7 @@
             <a:avLst/>
           </a:prstGeom>
           <a:solidFill>
-            <a:srgbClr val="C48052"/>
+            <a:srgbClr val="48BF8F"/>
           </a:solidFill>
           <a:ln>
             <a:noFill/>
@@ -52686,7 +52027,7 @@
             <a:avLst/>
           </a:prstGeom>
           <a:solidFill>
-            <a:srgbClr val="C48052"/>
+            <a:srgbClr val="48BF8F"/>
           </a:solidFill>
           <a:ln>
             <a:noFill/>
@@ -52729,7 +52070,7 @@
             <a:avLst/>
           </a:prstGeom>
           <a:solidFill>
-            <a:srgbClr val="C48052"/>
+            <a:srgbClr val="48BF8F"/>
           </a:solidFill>
           <a:ln>
             <a:noFill/>
@@ -52783,7 +52124,7 @@
             <a:r>
               <a:rPr sz="1000" b="1">
                 <a:solidFill>
-                  <a:srgbClr val="C48052"/>
+                  <a:srgbClr val="48BF8F"/>
                 </a:solidFill>
                 <a:latin typeface="Aptos"/>
               </a:rPr>
@@ -52822,7 +52163,7 @@
                 </a:solidFill>
                 <a:latin typeface="Aptos Display"/>
               </a:rPr>
-              <a:t>Tracked File Tree Appendix 24/27</a:t>
+              <a:t>Tracked File Tree Appendix 25/28</a:t>
             </a:r>
           </a:p>
         </p:txBody>
@@ -52857,12 +52198,7 @@
                 </a:solidFill>
                 <a:latin typeface="Cascadia Mono"/>
               </a:rPr>
-              <a:t>    |   |   |-- tlamatini_allowed_hosts_tighten/
-    |   |   |   `-- SKILL.md
-    |   |   |-- tlamatini_csrf_exempt_audit/
-    |   |   |   `-- SKILL.md
-    |   |   |-- tlamatini_exec_report_row_adder/
-    |   |   |   `-- SKILL.md
+              <a:t>    |   |   |   `-- SKILL.md
     |   |   |-- tlamatini_flow_from_objective/
     |   |   |   `-- SKILL.md
     |   |   |-- tlamatini_flw_doctor/
@@ -52887,7 +52223,12 @@
     |   |       |   |-- login.css
     |   |       |   |-- skills_dialog.css
     |   |       |   |-- tools_dialog.css
-    |   |       |   `-- welcome.css</a:t>
+    |   |       |   `-- welcome.css
+    |   |       |-- img/
+    |   |       |   |-- spinner.svg
+    |   |       |   `-- Tlamatini.ico
+    |   |       |-- js/
+    |   |       |   |-- acp-agent-connectors.js</a:t>
             </a:r>
           </a:p>
         </p:txBody>
@@ -52900,7 +52241,7 @@
 </p:sld>
 </file>
 
-<file path=ppt/slides/slide84.xml><?xml version="1.0" encoding="utf-8"?>
+<file path=ppt/slides/slide83.xml><?xml version="1.0" encoding="utf-8"?>
 <p:sld xmlns:a="http://schemas.openxmlformats.org/drawingml/2006/main" xmlns:p="http://schemas.openxmlformats.org/presentationml/2006/main" xmlns:r="http://schemas.openxmlformats.org/officeDocument/2006/relationships">
   <p:cSld>
     <p:spTree>
@@ -52968,7 +52309,7 @@
             <a:avLst/>
           </a:prstGeom>
           <a:solidFill>
-            <a:srgbClr val="48BF8F"/>
+            <a:srgbClr val="C48052"/>
           </a:solidFill>
           <a:ln>
             <a:noFill/>
@@ -53011,7 +52352,7 @@
             <a:avLst/>
           </a:prstGeom>
           <a:solidFill>
-            <a:srgbClr val="48BF8F"/>
+            <a:srgbClr val="C48052"/>
           </a:solidFill>
           <a:ln>
             <a:noFill/>
@@ -53054,7 +52395,7 @@
             <a:avLst/>
           </a:prstGeom>
           <a:solidFill>
-            <a:srgbClr val="48BF8F"/>
+            <a:srgbClr val="C48052"/>
           </a:solidFill>
           <a:ln>
             <a:noFill/>
@@ -53097,7 +52438,7 @@
             <a:avLst/>
           </a:prstGeom>
           <a:solidFill>
-            <a:srgbClr val="48BF8F"/>
+            <a:srgbClr val="C48052"/>
           </a:solidFill>
           <a:ln>
             <a:noFill/>
@@ -53151,7 +52492,7 @@
             <a:r>
               <a:rPr sz="1000" b="1">
                 <a:solidFill>
-                  <a:srgbClr val="48BF8F"/>
+                  <a:srgbClr val="C48052"/>
                 </a:solidFill>
                 <a:latin typeface="Aptos"/>
               </a:rPr>
@@ -53190,7 +52531,7 @@
                 </a:solidFill>
                 <a:latin typeface="Aptos Display"/>
               </a:rPr>
-              <a:t>Tracked File Tree Appendix 25/27</a:t>
+              <a:t>Tracked File Tree Appendix 26/28</a:t>
             </a:r>
           </a:p>
         </p:txBody>
@@ -53225,12 +52566,7 @@
                 </a:solidFill>
                 <a:latin typeface="Cascadia Mono"/>
               </a:rPr>
-              <a:t>    |   |       |-- img/
-    |   |       |   |-- spinner.svg
-    |   |       |   `-- Tlamatini.ico
-    |   |       |-- js/
-    |   |       |   |-- acp-agent-connectors.js
-    |   |       |   |-- acp-canvas-core.js
+              <a:t>    |   |       |   |-- acp-canvas-core.js
     |   |       |   |-- acp-canvas-undo.js
     |   |       |   |-- acp-control-buttons.js
     |   |       |   |-- acp-file-io.js
@@ -53255,7 +52591,380 @@
     |   |       |   |-- chat_page_runtime_poller.js
     |   |       |   |-- contextual_menus.js
     |   |       |   |-- shared-runtime-dialogs.js
-    |   |       |   |-- skills_dialog.js</a:t>
+    |   |       |   |-- skills_dialog.js
+    |   |       |   `-- tools_dialog.js
+    |   |       |-- sounds/
+    |   |       |   |-- hypervisor_alert.wav
+    |   |       |   `-- notification.wav
+    |   |       `-- video/</a:t>
+            </a:r>
+          </a:p>
+        </p:txBody>
+      </p:sp>
+    </p:spTree>
+  </p:cSld>
+  <p:clrMapOvr>
+    <a:masterClrMapping/>
+  </p:clrMapOvr>
+</p:sld>
+</file>
+
+<file path=ppt/slides/slide84.xml><?xml version="1.0" encoding="utf-8"?>
+<p:sld xmlns:a="http://schemas.openxmlformats.org/drawingml/2006/main" xmlns:p="http://schemas.openxmlformats.org/presentationml/2006/main" xmlns:r="http://schemas.openxmlformats.org/officeDocument/2006/relationships">
+  <p:cSld>
+    <p:spTree>
+      <p:nvGrpSpPr>
+        <p:cNvPr id="1" name=""/>
+        <p:cNvGrpSpPr/>
+        <p:nvPr/>
+      </p:nvGrpSpPr>
+      <p:grpSpPr/>
+      <p:sp>
+        <p:nvSpPr>
+          <p:cNvPr id="2" name="Rectangle 1"/>
+          <p:cNvSpPr/>
+          <p:nvPr/>
+        </p:nvSpPr>
+        <p:spPr>
+          <a:xfrm>
+            <a:off x="0" y="0"/>
+            <a:ext cx="12191695" cy="6858000"/>
+          </a:xfrm>
+          <a:prstGeom prst="rect">
+            <a:avLst/>
+          </a:prstGeom>
+          <a:solidFill>
+            <a:srgbClr val="080D0D"/>
+          </a:solidFill>
+          <a:ln>
+            <a:noFill/>
+          </a:ln>
+        </p:spPr>
+        <p:style>
+          <a:lnRef idx="1">
+            <a:schemeClr val="accent1"/>
+          </a:lnRef>
+          <a:fillRef idx="3">
+            <a:schemeClr val="accent1"/>
+          </a:fillRef>
+          <a:effectRef idx="2">
+            <a:schemeClr val="accent1"/>
+          </a:effectRef>
+          <a:fontRef idx="minor">
+            <a:schemeClr val="lt1"/>
+          </a:fontRef>
+        </p:style>
+        <p:txBody>
+          <a:bodyPr rtlCol="0" anchor="ctr"/>
+          <a:lstStyle/>
+          <a:p>
+            <a:pPr algn="ctr"/>
+          </a:p>
+        </p:txBody>
+      </p:sp>
+      <p:sp>
+        <p:nvSpPr>
+          <p:cNvPr id="3" name="Rectangle 2"/>
+          <p:cNvSpPr/>
+          <p:nvPr/>
+        </p:nvSpPr>
+        <p:spPr>
+          <a:xfrm>
+            <a:off x="320040" y="384048"/>
+            <a:ext cx="36576" cy="6080760"/>
+          </a:xfrm>
+          <a:prstGeom prst="rect">
+            <a:avLst/>
+          </a:prstGeom>
+          <a:solidFill>
+            <a:srgbClr val="48BF8F"/>
+          </a:solidFill>
+          <a:ln>
+            <a:noFill/>
+          </a:ln>
+        </p:spPr>
+        <p:style>
+          <a:lnRef idx="1">
+            <a:schemeClr val="accent1"/>
+          </a:lnRef>
+          <a:fillRef idx="3">
+            <a:schemeClr val="accent1"/>
+          </a:fillRef>
+          <a:effectRef idx="2">
+            <a:schemeClr val="accent1"/>
+          </a:effectRef>
+          <a:fontRef idx="minor">
+            <a:schemeClr val="lt1"/>
+          </a:fontRef>
+        </p:style>
+        <p:txBody>
+          <a:bodyPr rtlCol="0" anchor="ctr"/>
+          <a:lstStyle/>
+          <a:p>
+            <a:pPr algn="ctr"/>
+          </a:p>
+        </p:txBody>
+      </p:sp>
+      <p:sp>
+        <p:nvSpPr>
+          <p:cNvPr id="4" name="Rectangle 3"/>
+          <p:cNvSpPr/>
+          <p:nvPr/>
+        </p:nvSpPr>
+        <p:spPr>
+          <a:xfrm>
+            <a:off x="11716207" y="384048"/>
+            <a:ext cx="36576" cy="6080760"/>
+          </a:xfrm>
+          <a:prstGeom prst="rect">
+            <a:avLst/>
+          </a:prstGeom>
+          <a:solidFill>
+            <a:srgbClr val="48BF8F"/>
+          </a:solidFill>
+          <a:ln>
+            <a:noFill/>
+          </a:ln>
+        </p:spPr>
+        <p:style>
+          <a:lnRef idx="1">
+            <a:schemeClr val="accent1"/>
+          </a:lnRef>
+          <a:fillRef idx="3">
+            <a:schemeClr val="accent1"/>
+          </a:fillRef>
+          <a:effectRef idx="2">
+            <a:schemeClr val="accent1"/>
+          </a:effectRef>
+          <a:fontRef idx="minor">
+            <a:schemeClr val="lt1"/>
+          </a:fontRef>
+        </p:style>
+        <p:txBody>
+          <a:bodyPr rtlCol="0" anchor="ctr"/>
+          <a:lstStyle/>
+          <a:p>
+            <a:pPr algn="ctr"/>
+          </a:p>
+        </p:txBody>
+      </p:sp>
+      <p:sp>
+        <p:nvSpPr>
+          <p:cNvPr id="5" name="Rectangle 4"/>
+          <p:cNvSpPr/>
+          <p:nvPr/>
+        </p:nvSpPr>
+        <p:spPr>
+          <a:xfrm>
+            <a:off x="502920" y="384048"/>
+            <a:ext cx="11155680" cy="27432"/>
+          </a:xfrm>
+          <a:prstGeom prst="rect">
+            <a:avLst/>
+          </a:prstGeom>
+          <a:solidFill>
+            <a:srgbClr val="48BF8F"/>
+          </a:solidFill>
+          <a:ln>
+            <a:noFill/>
+          </a:ln>
+        </p:spPr>
+        <p:style>
+          <a:lnRef idx="1">
+            <a:schemeClr val="accent1"/>
+          </a:lnRef>
+          <a:fillRef idx="3">
+            <a:schemeClr val="accent1"/>
+          </a:fillRef>
+          <a:effectRef idx="2">
+            <a:schemeClr val="accent1"/>
+          </a:effectRef>
+          <a:fontRef idx="minor">
+            <a:schemeClr val="lt1"/>
+          </a:fontRef>
+        </p:style>
+        <p:txBody>
+          <a:bodyPr rtlCol="0" anchor="ctr"/>
+          <a:lstStyle/>
+          <a:p>
+            <a:pPr algn="ctr"/>
+          </a:p>
+        </p:txBody>
+      </p:sp>
+      <p:sp>
+        <p:nvSpPr>
+          <p:cNvPr id="6" name="Rectangle 5"/>
+          <p:cNvSpPr/>
+          <p:nvPr/>
+        </p:nvSpPr>
+        <p:spPr>
+          <a:xfrm>
+            <a:off x="502920" y="6437376"/>
+            <a:ext cx="11155680" cy="27432"/>
+          </a:xfrm>
+          <a:prstGeom prst="rect">
+            <a:avLst/>
+          </a:prstGeom>
+          <a:solidFill>
+            <a:srgbClr val="48BF8F"/>
+          </a:solidFill>
+          <a:ln>
+            <a:noFill/>
+          </a:ln>
+        </p:spPr>
+        <p:style>
+          <a:lnRef idx="1">
+            <a:schemeClr val="accent1"/>
+          </a:lnRef>
+          <a:fillRef idx="3">
+            <a:schemeClr val="accent1"/>
+          </a:fillRef>
+          <a:effectRef idx="2">
+            <a:schemeClr val="accent1"/>
+          </a:effectRef>
+          <a:fontRef idx="minor">
+            <a:schemeClr val="lt1"/>
+          </a:fontRef>
+        </p:style>
+        <p:txBody>
+          <a:bodyPr rtlCol="0" anchor="ctr"/>
+          <a:lstStyle/>
+          <a:p>
+            <a:pPr algn="ctr"/>
+          </a:p>
+        </p:txBody>
+      </p:sp>
+      <p:sp>
+        <p:nvSpPr>
+          <p:cNvPr id="7" name="TextBox 6"/>
+          <p:cNvSpPr txBox="1"/>
+          <p:nvPr/>
+        </p:nvSpPr>
+        <p:spPr>
+          <a:xfrm>
+            <a:off x="713232" y="548640"/>
+            <a:ext cx="10698480" cy="301752"/>
+          </a:xfrm>
+          <a:prstGeom prst="rect">
+            <a:avLst/>
+          </a:prstGeom>
+          <a:noFill/>
+        </p:spPr>
+        <p:txBody>
+          <a:bodyPr wrap="square" anchor="t">
+            <a:spAutoFit/>
+          </a:bodyPr>
+          <a:lstStyle/>
+          <a:p>
+            <a:pPr algn="l"/>
+            <a:r>
+              <a:rPr sz="1000" b="1">
+                <a:solidFill>
+                  <a:srgbClr val="48BF8F"/>
+                </a:solidFill>
+                <a:latin typeface="Aptos"/>
+              </a:rPr>
+              <a:t>COMPLETE TRACKED FILE TREE, NO TRACKED FILE OMITTED</a:t>
+            </a:r>
+          </a:p>
+        </p:txBody>
+      </p:sp>
+      <p:sp>
+        <p:nvSpPr>
+          <p:cNvPr id="8" name="TextBox 7"/>
+          <p:cNvSpPr txBox="1"/>
+          <p:nvPr/>
+        </p:nvSpPr>
+        <p:spPr>
+          <a:xfrm>
+            <a:off x="694944" y="850392"/>
+            <a:ext cx="10881360" cy="566928"/>
+          </a:xfrm>
+          <a:prstGeom prst="rect">
+            <a:avLst/>
+          </a:prstGeom>
+          <a:noFill/>
+        </p:spPr>
+        <p:txBody>
+          <a:bodyPr wrap="square" anchor="t">
+            <a:spAutoFit/>
+          </a:bodyPr>
+          <a:lstStyle/>
+          <a:p>
+            <a:pPr algn="l"/>
+            <a:r>
+              <a:rPr sz="2700" b="0">
+                <a:solidFill>
+                  <a:srgbClr val="E8E8DE"/>
+                </a:solidFill>
+                <a:latin typeface="Aptos Display"/>
+              </a:rPr>
+              <a:t>Tracked File Tree Appendix 27/28</a:t>
+            </a:r>
+          </a:p>
+        </p:txBody>
+      </p:sp>
+      <p:sp>
+        <p:nvSpPr>
+          <p:cNvPr id="9" name="TextBox 8"/>
+          <p:cNvSpPr txBox="1"/>
+          <p:nvPr/>
+        </p:nvSpPr>
+        <p:spPr>
+          <a:xfrm>
+            <a:off x="658368" y="1426464"/>
+            <a:ext cx="10927080" cy="4956048"/>
+          </a:xfrm>
+          <a:prstGeom prst="rect">
+            <a:avLst/>
+          </a:prstGeom>
+          <a:noFill/>
+        </p:spPr>
+        <p:txBody>
+          <a:bodyPr wrap="square" anchor="t">
+            <a:spAutoFit/>
+          </a:bodyPr>
+          <a:lstStyle/>
+          <a:p>
+            <a:pPr algn="l"/>
+            <a:r>
+              <a:rPr sz="700" b="0">
+                <a:solidFill>
+                  <a:srgbClr val="E8E8DE"/>
+                </a:solidFill>
+                <a:latin typeface="Cascadia Mono"/>
+              </a:rPr>
+              <a:t>    |   |           `-- XAIHT-Tlamatini.mp4
+    |   |-- telegram/
+    |   |   |-- AztecTlamatini.txt
+    |   |   |-- config.yaml
+    |   |   `-- telegram_receiver.py
+    |   |-- templates/
+    |   |   `-- agent/
+    |   |       |-- agent_page.html
+    |   |       |-- agentic_control_panel.html
+    |   |       |-- login.html
+    |   |       `-- welcome.html
+    |   |-- test_fixtures/
+    |   |   `-- talker_orpheus_tokens.txt
+    |   `-- TlamatiniSourceCode/
+    |       `-- README.md
+    |-- DB/
+    |   |-- Older/
+    |   |   `-- README.md
+    |   `-- ToLoad/
+    |       `-- README.md
+    |-- jd-cli/
+    |   |-- jd-cli.bat
+    |   `-- jd-cli.jar
+    `-- tlamatini/
+        |-- __init__.py
+        |-- asgi.py
+        |-- context_processors.py
+        |-- logging_filters.py
+        |-- middleware.py
+        |-- settings.py
+        |-- urls.py</a:t>
             </a:r>
           </a:p>
         </p:txBody>
@@ -53558,7 +53267,7 @@
                 </a:solidFill>
                 <a:latin typeface="Aptos Display"/>
               </a:rPr>
-              <a:t>Tracked File Tree Appendix 26/27</a:t>
+              <a:t>Tracked File Tree Appendix 28/28</a:t>
             </a:r>
           </a:p>
         </p:txBody>
@@ -53593,37 +53302,7 @@
                 </a:solidFill>
                 <a:latin typeface="Cascadia Mono"/>
               </a:rPr>
-              <a:t>    |   |       |   `-- tools_dialog.js
-    |   |       |-- sounds/
-    |   |       |   |-- hypervisor_alert.wav
-    |   |       |   `-- notification.wav
-    |   |       `-- video/
-    |   |           `-- XAIHT-Tlamatini.mp4
-    |   |-- telegram/
-    |   |   |-- AztecTlamatini.txt
-    |   |   |-- config.yaml
-    |   |   `-- telegram_receiver.py
-    |   |-- templates/
-    |   |   `-- agent/
-    |   |       |-- agent_page.html
-    |   |       |-- agentic_control_panel.html
-    |   |       |-- login.html
-    |   |       `-- welcome.html
-    |   `-- TlamatiniSourceCode/
-    |       `-- README.md
-    |-- DB/
-    |   |-- Older/
-    |   |   `-- README.md
-    |   `-- ToLoad/
-    |       `-- README.md
-    |-- jd-cli/
-    |   |-- jd-cli.bat
-    |   `-- jd-cli.jar
-    `-- tlamatini/
-        |-- __init__.py
-        |-- asgi.py
-        |-- context_processors.py
-        |-- logging_filters.py</a:t>
+              <a:t>        `-- wsgi.py</a:t>
             </a:r>
           </a:p>
         </p:txBody>
@@ -53637,347 +53316,6 @@
 </file>
 
 <file path=ppt/slides/slide86.xml><?xml version="1.0" encoding="utf-8"?>
-<p:sld xmlns:a="http://schemas.openxmlformats.org/drawingml/2006/main" xmlns:p="http://schemas.openxmlformats.org/presentationml/2006/main" xmlns:r="http://schemas.openxmlformats.org/officeDocument/2006/relationships">
-  <p:cSld>
-    <p:spTree>
-      <p:nvGrpSpPr>
-        <p:cNvPr id="1" name=""/>
-        <p:cNvGrpSpPr/>
-        <p:nvPr/>
-      </p:nvGrpSpPr>
-      <p:grpSpPr/>
-      <p:sp>
-        <p:nvSpPr>
-          <p:cNvPr id="2" name="Rectangle 1"/>
-          <p:cNvSpPr/>
-          <p:nvPr/>
-        </p:nvSpPr>
-        <p:spPr>
-          <a:xfrm>
-            <a:off x="0" y="0"/>
-            <a:ext cx="12191695" cy="6858000"/>
-          </a:xfrm>
-          <a:prstGeom prst="rect">
-            <a:avLst/>
-          </a:prstGeom>
-          <a:solidFill>
-            <a:srgbClr val="080D0D"/>
-          </a:solidFill>
-          <a:ln>
-            <a:noFill/>
-          </a:ln>
-        </p:spPr>
-        <p:style>
-          <a:lnRef idx="1">
-            <a:schemeClr val="accent1"/>
-          </a:lnRef>
-          <a:fillRef idx="3">
-            <a:schemeClr val="accent1"/>
-          </a:fillRef>
-          <a:effectRef idx="2">
-            <a:schemeClr val="accent1"/>
-          </a:effectRef>
-          <a:fontRef idx="minor">
-            <a:schemeClr val="lt1"/>
-          </a:fontRef>
-        </p:style>
-        <p:txBody>
-          <a:bodyPr rtlCol="0" anchor="ctr"/>
-          <a:lstStyle/>
-          <a:p>
-            <a:pPr algn="ctr"/>
-          </a:p>
-        </p:txBody>
-      </p:sp>
-      <p:sp>
-        <p:nvSpPr>
-          <p:cNvPr id="3" name="Rectangle 2"/>
-          <p:cNvSpPr/>
-          <p:nvPr/>
-        </p:nvSpPr>
-        <p:spPr>
-          <a:xfrm>
-            <a:off x="320040" y="384048"/>
-            <a:ext cx="36576" cy="6080760"/>
-          </a:xfrm>
-          <a:prstGeom prst="rect">
-            <a:avLst/>
-          </a:prstGeom>
-          <a:solidFill>
-            <a:srgbClr val="48BF8F"/>
-          </a:solidFill>
-          <a:ln>
-            <a:noFill/>
-          </a:ln>
-        </p:spPr>
-        <p:style>
-          <a:lnRef idx="1">
-            <a:schemeClr val="accent1"/>
-          </a:lnRef>
-          <a:fillRef idx="3">
-            <a:schemeClr val="accent1"/>
-          </a:fillRef>
-          <a:effectRef idx="2">
-            <a:schemeClr val="accent1"/>
-          </a:effectRef>
-          <a:fontRef idx="minor">
-            <a:schemeClr val="lt1"/>
-          </a:fontRef>
-        </p:style>
-        <p:txBody>
-          <a:bodyPr rtlCol="0" anchor="ctr"/>
-          <a:lstStyle/>
-          <a:p>
-            <a:pPr algn="ctr"/>
-          </a:p>
-        </p:txBody>
-      </p:sp>
-      <p:sp>
-        <p:nvSpPr>
-          <p:cNvPr id="4" name="Rectangle 3"/>
-          <p:cNvSpPr/>
-          <p:nvPr/>
-        </p:nvSpPr>
-        <p:spPr>
-          <a:xfrm>
-            <a:off x="11716207" y="384048"/>
-            <a:ext cx="36576" cy="6080760"/>
-          </a:xfrm>
-          <a:prstGeom prst="rect">
-            <a:avLst/>
-          </a:prstGeom>
-          <a:solidFill>
-            <a:srgbClr val="48BF8F"/>
-          </a:solidFill>
-          <a:ln>
-            <a:noFill/>
-          </a:ln>
-        </p:spPr>
-        <p:style>
-          <a:lnRef idx="1">
-            <a:schemeClr val="accent1"/>
-          </a:lnRef>
-          <a:fillRef idx="3">
-            <a:schemeClr val="accent1"/>
-          </a:fillRef>
-          <a:effectRef idx="2">
-            <a:schemeClr val="accent1"/>
-          </a:effectRef>
-          <a:fontRef idx="minor">
-            <a:schemeClr val="lt1"/>
-          </a:fontRef>
-        </p:style>
-        <p:txBody>
-          <a:bodyPr rtlCol="0" anchor="ctr"/>
-          <a:lstStyle/>
-          <a:p>
-            <a:pPr algn="ctr"/>
-          </a:p>
-        </p:txBody>
-      </p:sp>
-      <p:sp>
-        <p:nvSpPr>
-          <p:cNvPr id="5" name="Rectangle 4"/>
-          <p:cNvSpPr/>
-          <p:nvPr/>
-        </p:nvSpPr>
-        <p:spPr>
-          <a:xfrm>
-            <a:off x="502920" y="384048"/>
-            <a:ext cx="11155680" cy="27432"/>
-          </a:xfrm>
-          <a:prstGeom prst="rect">
-            <a:avLst/>
-          </a:prstGeom>
-          <a:solidFill>
-            <a:srgbClr val="48BF8F"/>
-          </a:solidFill>
-          <a:ln>
-            <a:noFill/>
-          </a:ln>
-        </p:spPr>
-        <p:style>
-          <a:lnRef idx="1">
-            <a:schemeClr val="accent1"/>
-          </a:lnRef>
-          <a:fillRef idx="3">
-            <a:schemeClr val="accent1"/>
-          </a:fillRef>
-          <a:effectRef idx="2">
-            <a:schemeClr val="accent1"/>
-          </a:effectRef>
-          <a:fontRef idx="minor">
-            <a:schemeClr val="lt1"/>
-          </a:fontRef>
-        </p:style>
-        <p:txBody>
-          <a:bodyPr rtlCol="0" anchor="ctr"/>
-          <a:lstStyle/>
-          <a:p>
-            <a:pPr algn="ctr"/>
-          </a:p>
-        </p:txBody>
-      </p:sp>
-      <p:sp>
-        <p:nvSpPr>
-          <p:cNvPr id="6" name="Rectangle 5"/>
-          <p:cNvSpPr/>
-          <p:nvPr/>
-        </p:nvSpPr>
-        <p:spPr>
-          <a:xfrm>
-            <a:off x="502920" y="6437376"/>
-            <a:ext cx="11155680" cy="27432"/>
-          </a:xfrm>
-          <a:prstGeom prst="rect">
-            <a:avLst/>
-          </a:prstGeom>
-          <a:solidFill>
-            <a:srgbClr val="48BF8F"/>
-          </a:solidFill>
-          <a:ln>
-            <a:noFill/>
-          </a:ln>
-        </p:spPr>
-        <p:style>
-          <a:lnRef idx="1">
-            <a:schemeClr val="accent1"/>
-          </a:lnRef>
-          <a:fillRef idx="3">
-            <a:schemeClr val="accent1"/>
-          </a:fillRef>
-          <a:effectRef idx="2">
-            <a:schemeClr val="accent1"/>
-          </a:effectRef>
-          <a:fontRef idx="minor">
-            <a:schemeClr val="lt1"/>
-          </a:fontRef>
-        </p:style>
-        <p:txBody>
-          <a:bodyPr rtlCol="0" anchor="ctr"/>
-          <a:lstStyle/>
-          <a:p>
-            <a:pPr algn="ctr"/>
-          </a:p>
-        </p:txBody>
-      </p:sp>
-      <p:sp>
-        <p:nvSpPr>
-          <p:cNvPr id="7" name="TextBox 6"/>
-          <p:cNvSpPr txBox="1"/>
-          <p:nvPr/>
-        </p:nvSpPr>
-        <p:spPr>
-          <a:xfrm>
-            <a:off x="713232" y="548640"/>
-            <a:ext cx="10698480" cy="301752"/>
-          </a:xfrm>
-          <a:prstGeom prst="rect">
-            <a:avLst/>
-          </a:prstGeom>
-          <a:noFill/>
-        </p:spPr>
-        <p:txBody>
-          <a:bodyPr wrap="square" anchor="t">
-            <a:spAutoFit/>
-          </a:bodyPr>
-          <a:lstStyle/>
-          <a:p>
-            <a:pPr algn="l"/>
-            <a:r>
-              <a:rPr sz="1000" b="1">
-                <a:solidFill>
-                  <a:srgbClr val="48BF8F"/>
-                </a:solidFill>
-                <a:latin typeface="Aptos"/>
-              </a:rPr>
-              <a:t>COMPLETE TRACKED FILE TREE, NO TRACKED FILE OMITTED</a:t>
-            </a:r>
-          </a:p>
-        </p:txBody>
-      </p:sp>
-      <p:sp>
-        <p:nvSpPr>
-          <p:cNvPr id="8" name="TextBox 7"/>
-          <p:cNvSpPr txBox="1"/>
-          <p:nvPr/>
-        </p:nvSpPr>
-        <p:spPr>
-          <a:xfrm>
-            <a:off x="694944" y="850392"/>
-            <a:ext cx="10881360" cy="566928"/>
-          </a:xfrm>
-          <a:prstGeom prst="rect">
-            <a:avLst/>
-          </a:prstGeom>
-          <a:noFill/>
-        </p:spPr>
-        <p:txBody>
-          <a:bodyPr wrap="square" anchor="t">
-            <a:spAutoFit/>
-          </a:bodyPr>
-          <a:lstStyle/>
-          <a:p>
-            <a:pPr algn="l"/>
-            <a:r>
-              <a:rPr sz="2700" b="0">
-                <a:solidFill>
-                  <a:srgbClr val="E8E8DE"/>
-                </a:solidFill>
-                <a:latin typeface="Aptos Display"/>
-              </a:rPr>
-              <a:t>Tracked File Tree Appendix 27/27</a:t>
-            </a:r>
-          </a:p>
-        </p:txBody>
-      </p:sp>
-      <p:sp>
-        <p:nvSpPr>
-          <p:cNvPr id="9" name="TextBox 8"/>
-          <p:cNvSpPr txBox="1"/>
-          <p:nvPr/>
-        </p:nvSpPr>
-        <p:spPr>
-          <a:xfrm>
-            <a:off x="658368" y="1426464"/>
-            <a:ext cx="10927080" cy="4956048"/>
-          </a:xfrm>
-          <a:prstGeom prst="rect">
-            <a:avLst/>
-          </a:prstGeom>
-          <a:noFill/>
-        </p:spPr>
-        <p:txBody>
-          <a:bodyPr wrap="square" anchor="t">
-            <a:spAutoFit/>
-          </a:bodyPr>
-          <a:lstStyle/>
-          <a:p>
-            <a:pPr algn="l"/>
-            <a:r>
-              <a:rPr sz="700" b="0">
-                <a:solidFill>
-                  <a:srgbClr val="E8E8DE"/>
-                </a:solidFill>
-                <a:latin typeface="Cascadia Mono"/>
-              </a:rPr>
-              <a:t>        |-- middleware.py
-        |-- settings.py
-        |-- urls.py
-        `-- wsgi.py</a:t>
-            </a:r>
-          </a:p>
-        </p:txBody>
-      </p:sp>
-    </p:spTree>
-  </p:cSld>
-  <p:clrMapOvr>
-    <a:masterClrMapping/>
-  </p:clrMapOvr>
-</p:sld>
-</file>
-
-<file path=ppt/slides/slide87.xml><?xml version="1.0" encoding="utf-8"?>
 <p:sld xmlns:a="http://schemas.openxmlformats.org/drawingml/2006/main" xmlns:p="http://schemas.openxmlformats.org/presentationml/2006/main" xmlns:r="http://schemas.openxmlformats.org/officeDocument/2006/relationships">
   <p:cSld>
     <p:spTree>
